--- a/output_pptx/The_Lord_Is_My_Salvation.pptx
+++ b/output_pptx/The_Lord_Is_My_Salvation.pptx
@@ -12,6 +12,51 @@
     <p:sldId id="260" r:id="rId11"/>
     <p:sldId id="261" r:id="rId12"/>
     <p:sldId id="262" r:id="rId13"/>
+    <p:sldId id="263" r:id="rId14"/>
+    <p:sldId id="264" r:id="rId15"/>
+    <p:sldId id="265" r:id="rId16"/>
+    <p:sldId id="266" r:id="rId17"/>
+    <p:sldId id="267" r:id="rId18"/>
+    <p:sldId id="268" r:id="rId19"/>
+    <p:sldId id="269" r:id="rId20"/>
+    <p:sldId id="270" r:id="rId21"/>
+    <p:sldId id="271" r:id="rId22"/>
+    <p:sldId id="272" r:id="rId23"/>
+    <p:sldId id="273" r:id="rId24"/>
+    <p:sldId id="274" r:id="rId25"/>
+    <p:sldId id="275" r:id="rId26"/>
+    <p:sldId id="276" r:id="rId27"/>
+    <p:sldId id="277" r:id="rId28"/>
+    <p:sldId id="278" r:id="rId29"/>
+    <p:sldId id="279" r:id="rId30"/>
+    <p:sldId id="280" r:id="rId31"/>
+    <p:sldId id="281" r:id="rId32"/>
+    <p:sldId id="282" r:id="rId33"/>
+    <p:sldId id="283" r:id="rId34"/>
+    <p:sldId id="284" r:id="rId35"/>
+    <p:sldId id="285" r:id="rId36"/>
+    <p:sldId id="286" r:id="rId37"/>
+    <p:sldId id="287" r:id="rId38"/>
+    <p:sldId id="288" r:id="rId39"/>
+    <p:sldId id="289" r:id="rId40"/>
+    <p:sldId id="290" r:id="rId41"/>
+    <p:sldId id="291" r:id="rId42"/>
+    <p:sldId id="292" r:id="rId43"/>
+    <p:sldId id="293" r:id="rId44"/>
+    <p:sldId id="294" r:id="rId45"/>
+    <p:sldId id="295" r:id="rId46"/>
+    <p:sldId id="296" r:id="rId47"/>
+    <p:sldId id="297" r:id="rId48"/>
+    <p:sldId id="298" r:id="rId49"/>
+    <p:sldId id="299" r:id="rId50"/>
+    <p:sldId id="300" r:id="rId51"/>
+    <p:sldId id="301" r:id="rId52"/>
+    <p:sldId id="302" r:id="rId53"/>
+    <p:sldId id="303" r:id="rId54"/>
+    <p:sldId id="304" r:id="rId55"/>
+    <p:sldId id="305" r:id="rId56"/>
+    <p:sldId id="306" r:id="rId57"/>
+    <p:sldId id="307" r:id="rId58"/>
   </p:sldIdLst>
   <p:sldSz cx="12191695" cy="6858000" type="screen4x3"/>
   <p:notesSz cx="6858000" cy="9144000"/>
@@ -3110,29 +3155,29 @@
         </p:nvSpPr>
         <p:spPr>
           <a:xfrm>
-            <a:off x="594360" y="1837944"/>
-            <a:ext cx="11002975" cy="685800"/>
-          </a:xfrm>
-          <a:prstGeom prst="rect">
-            <a:avLst/>
-          </a:prstGeom>
-          <a:noFill/>
-        </p:spPr>
-        <p:txBody>
-          <a:bodyPr wrap="square">
-            <a:spAutoFit/>
-          </a:bodyPr>
-          <a:lstStyle/>
-          <a:p>
-            <a:pPr algn="ctr"/>
-            <a:r>
-              <a:rPr sz="4400" b="1" i="0">
+            <a:off x="640080" y="2052828"/>
+            <a:ext cx="10911535" cy="731520"/>
+          </a:xfrm>
+          <a:prstGeom prst="rect">
+            <a:avLst/>
+          </a:prstGeom>
+          <a:noFill/>
+        </p:spPr>
+        <p:txBody>
+          <a:bodyPr wrap="square">
+            <a:spAutoFit/>
+          </a:bodyPr>
+          <a:lstStyle/>
+          <a:p>
+            <a:pPr algn="ctr"/>
+            <a:r>
+              <a:rPr sz="4800" b="1" i="0">
                 <a:solidFill>
                   <a:srgbClr val="FFFFFF"/>
                 </a:solidFill>
                 <a:latin typeface="Arial"/>
               </a:rPr>
-              <a:t>主の恵みにより　罪の嵐 抜け</a:t>
+              <a:t>Divina graça me alcançou</a:t>
             </a:r>
           </a:p>
         </p:txBody>
@@ -3145,29 +3190,125 @@
         </p:nvSpPr>
         <p:spPr>
           <a:xfrm>
-            <a:off x="594360" y="2560320"/>
-            <a:ext cx="11002975" cy="384048"/>
-          </a:xfrm>
-          <a:prstGeom prst="rect">
-            <a:avLst/>
-          </a:prstGeom>
-          <a:noFill/>
-        </p:spPr>
-        <p:txBody>
-          <a:bodyPr wrap="square">
-            <a:spAutoFit/>
-          </a:bodyPr>
-          <a:lstStyle/>
-          <a:p>
-            <a:pPr algn="ctr"/>
-            <a:r>
-              <a:rPr sz="2344" b="0" i="1">
-                <a:solidFill>
-                  <a:srgbClr val="B4B4B4"/>
-                </a:solidFill>
-                <a:latin typeface="Arial"/>
-              </a:rPr>
-              <a:t>Shu no megumi ni yori  tsumi no arashi nuke</a:t>
+            <a:off x="640080" y="2985516"/>
+            <a:ext cx="10911535" cy="731520"/>
+          </a:xfrm>
+          <a:prstGeom prst="rect">
+            <a:avLst/>
+          </a:prstGeom>
+          <a:noFill/>
+        </p:spPr>
+        <p:txBody>
+          <a:bodyPr wrap="square">
+            <a:spAutoFit/>
+          </a:bodyPr>
+          <a:lstStyle/>
+          <a:p>
+            <a:pPr algn="ctr"/>
+            <a:r>
+              <a:rPr sz="4800" b="1" i="0">
+                <a:solidFill>
+                  <a:srgbClr val="FFFFFF"/>
+                </a:solidFill>
+                <a:latin typeface="Arial"/>
+              </a:rPr>
+              <a:t>Do bravo mar me resgatou</a:t>
+            </a:r>
+          </a:p>
+        </p:txBody>
+      </p:sp>
+    </p:spTree>
+  </p:cSld>
+  <p:clrMapOvr>
+    <a:masterClrMapping/>
+  </p:clrMapOvr>
+</p:sld>
+</file>
+
+<file path=ppt/slides/slide10.xml><?xml version="1.0" encoding="utf-8"?>
+<p:sld xmlns:a="http://schemas.openxmlformats.org/drawingml/2006/main" xmlns:p="http://schemas.openxmlformats.org/presentationml/2006/main" xmlns:r="http://schemas.openxmlformats.org/officeDocument/2006/relationships">
+  <p:cSld>
+    <p:bg>
+      <p:bgPr>
+        <a:solidFill>
+          <a:srgbClr val="000000"/>
+        </a:solidFill>
+        <a:effectLst/>
+      </p:bgPr>
+    </p:bg>
+    <p:spTree>
+      <p:nvGrpSpPr>
+        <p:cNvPr id="1" name=""/>
+        <p:cNvGrpSpPr/>
+        <p:nvPr/>
+      </p:nvGrpSpPr>
+      <p:grpSpPr/>
+      <p:sp>
+        <p:nvSpPr>
+          <p:cNvPr id="2" name="TextBox 1"/>
+          <p:cNvSpPr txBox="1"/>
+          <p:nvPr/>
+        </p:nvSpPr>
+        <p:spPr>
+          <a:xfrm>
+            <a:off x="640080" y="2500884"/>
+            <a:ext cx="10911535" cy="731520"/>
+          </a:xfrm>
+          <a:prstGeom prst="rect">
+            <a:avLst/>
+          </a:prstGeom>
+          <a:noFill/>
+        </p:spPr>
+        <p:txBody>
+          <a:bodyPr wrap="square">
+            <a:spAutoFit/>
+          </a:bodyPr>
+          <a:lstStyle/>
+          <a:p>
+            <a:pPr algn="ctr"/>
+            <a:r>
+              <a:rPr sz="4800" b="1" i="0">
+                <a:solidFill>
+                  <a:srgbClr val="FFFFFF"/>
+                </a:solidFill>
+                <a:latin typeface="Arial"/>
+              </a:rPr>
+              <a:t>救いにあずか っ た　主こそ我が救い</a:t>
+            </a:r>
+          </a:p>
+        </p:txBody>
+      </p:sp>
+      <p:sp>
+        <p:nvSpPr>
+          <p:cNvPr id="3" name="TextBox 2"/>
+          <p:cNvSpPr txBox="1"/>
+          <p:nvPr/>
+        </p:nvSpPr>
+        <p:spPr>
+          <a:xfrm>
+            <a:off x="640080" y="3268980"/>
+            <a:ext cx="10911535" cy="365760"/>
+          </a:xfrm>
+          <a:prstGeom prst="rect">
+            <a:avLst/>
+          </a:prstGeom>
+          <a:noFill/>
+        </p:spPr>
+        <p:txBody>
+          <a:bodyPr wrap="square">
+            <a:spAutoFit/>
+          </a:bodyPr>
+          <a:lstStyle/>
+          <a:p>
+            <a:pPr algn="ctr"/>
+            <a:r>
+              <a:rPr sz="2400" b="0" i="1">
+                <a:solidFill>
+                  <a:srgbClr val="AAAAAA"/>
+                </a:solidFill>
+                <a:latin typeface="Arial"/>
+              </a:rPr>
+              <a:t>sukui niazuka tsu ta shu koso waga sukui</a:t>
             </a:r>
           </a:p>
         </p:txBody>
@@ -3180,8 +3321,8 @@
         </p:nvSpPr>
         <p:spPr>
           <a:xfrm>
-            <a:off x="594360" y="2980944"/>
-            <a:ext cx="11002975" cy="347472"/>
+            <a:off x="640080" y="4046220"/>
+            <a:ext cx="10911535" cy="310896"/>
           </a:xfrm>
           <a:prstGeom prst="rect">
             <a:avLst/>
@@ -3198,60 +3339,147 @@
             <a:r>
               <a:rPr sz="2000" b="0" i="1">
                 <a:solidFill>
-                  <a:srgbClr val="8C8C8C"/>
-                </a:solidFill>
-                <a:latin typeface="Arial"/>
-              </a:rPr>
-              <a:t/>
-            </a:r>
-          </a:p>
-        </p:txBody>
-      </p:sp>
-      <p:sp>
-        <p:nvSpPr>
-          <p:cNvPr id="5" name="TextBox 4"/>
-          <p:cNvSpPr txBox="1"/>
-          <p:nvPr/>
-        </p:nvSpPr>
-        <p:spPr>
-          <a:xfrm>
-            <a:off x="594360" y="3529584"/>
-            <a:ext cx="11002975" cy="685800"/>
-          </a:xfrm>
-          <a:prstGeom prst="rect">
-            <a:avLst/>
-          </a:prstGeom>
-          <a:noFill/>
-        </p:spPr>
-        <p:txBody>
-          <a:bodyPr wrap="square">
-            <a:spAutoFit/>
-          </a:bodyPr>
-          <a:lstStyle/>
-          <a:p>
-            <a:pPr algn="ctr"/>
-            <a:r>
-              <a:rPr sz="4400" b="1" i="0">
+                  <a:srgbClr val="828282"/>
+                </a:solidFill>
+                <a:latin typeface="Arial"/>
+              </a:rPr>
+              <a:t>Divina graça me alcançou</a:t>
+            </a:r>
+          </a:p>
+        </p:txBody>
+      </p:sp>
+    </p:spTree>
+  </p:cSld>
+  <p:clrMapOvr>
+    <a:masterClrMapping/>
+  </p:clrMapOvr>
+</p:sld>
+</file>
+
+<file path=ppt/slides/slide11.xml><?xml version="1.0" encoding="utf-8"?>
+<p:sld xmlns:a="http://schemas.openxmlformats.org/drawingml/2006/main" xmlns:p="http://schemas.openxmlformats.org/presentationml/2006/main" xmlns:r="http://schemas.openxmlformats.org/officeDocument/2006/relationships">
+  <p:cSld>
+    <p:bg>
+      <p:bgPr>
+        <a:solidFill>
+          <a:srgbClr val="000000"/>
+        </a:solidFill>
+        <a:effectLst/>
+      </p:bgPr>
+    </p:bg>
+    <p:spTree>
+      <p:nvGrpSpPr>
+        <p:cNvPr id="1" name=""/>
+        <p:cNvGrpSpPr/>
+        <p:nvPr/>
+      </p:nvGrpSpPr>
+      <p:grpSpPr/>
+      <p:sp>
+        <p:nvSpPr>
+          <p:cNvPr id="2" name="TextBox 1"/>
+          <p:cNvSpPr txBox="1"/>
+          <p:nvPr/>
+        </p:nvSpPr>
+        <p:spPr>
+          <a:xfrm>
+            <a:off x="640080" y="2702052"/>
+            <a:ext cx="10911535" cy="731520"/>
+          </a:xfrm>
+          <a:prstGeom prst="rect">
+            <a:avLst/>
+          </a:prstGeom>
+          <a:noFill/>
+        </p:spPr>
+        <p:txBody>
+          <a:bodyPr wrap="square">
+            <a:spAutoFit/>
+          </a:bodyPr>
+          <a:lstStyle/>
+          <a:p>
+            <a:pPr algn="ctr"/>
+            <a:r>
+              <a:rPr sz="4800" b="1" i="0">
                 <a:solidFill>
                   <a:srgbClr val="FFFFFF"/>
                 </a:solidFill>
                 <a:latin typeface="Arial"/>
               </a:rPr>
-              <a:t>救いにあずか っ た 主こそ我が救い</a:t>
-            </a:r>
-          </a:p>
-        </p:txBody>
-      </p:sp>
-      <p:sp>
-        <p:nvSpPr>
-          <p:cNvPr id="6" name="TextBox 5"/>
-          <p:cNvSpPr txBox="1"/>
-          <p:nvPr/>
-        </p:nvSpPr>
-        <p:spPr>
-          <a:xfrm>
-            <a:off x="594360" y="4251960"/>
-            <a:ext cx="11002975" cy="384048"/>
+              <a:t>Tu és minha salvação, Senhor</a:t>
+            </a:r>
+          </a:p>
+        </p:txBody>
+      </p:sp>
+    </p:spTree>
+  </p:cSld>
+  <p:clrMapOvr>
+    <a:masterClrMapping/>
+  </p:clrMapOvr>
+</p:sld>
+</file>
+
+<file path=ppt/slides/slide12.xml><?xml version="1.0" encoding="utf-8"?>
+<p:sld xmlns:a="http://schemas.openxmlformats.org/drawingml/2006/main" xmlns:p="http://schemas.openxmlformats.org/presentationml/2006/main" xmlns:r="http://schemas.openxmlformats.org/officeDocument/2006/relationships">
+  <p:cSld>
+    <p:bg>
+      <p:bgPr>
+        <a:solidFill>
+          <a:srgbClr val="000000"/>
+        </a:solidFill>
+        <a:effectLst/>
+      </p:bgPr>
+    </p:bg>
+    <p:spTree>
+      <p:nvGrpSpPr>
+        <p:cNvPr id="1" name=""/>
+        <p:cNvGrpSpPr/>
+        <p:nvPr/>
+      </p:nvGrpSpPr>
+      <p:grpSpPr/>
+      <p:sp>
+        <p:nvSpPr>
+          <p:cNvPr id="2" name="TextBox 1"/>
+          <p:cNvSpPr txBox="1"/>
+          <p:nvPr/>
+        </p:nvSpPr>
+        <p:spPr>
+          <a:xfrm>
+            <a:off x="640080" y="2500884"/>
+            <a:ext cx="10911535" cy="731520"/>
+          </a:xfrm>
+          <a:prstGeom prst="rect">
+            <a:avLst/>
+          </a:prstGeom>
+          <a:noFill/>
+        </p:spPr>
+        <p:txBody>
+          <a:bodyPr wrap="square">
+            <a:spAutoFit/>
+          </a:bodyPr>
+          <a:lstStyle/>
+          <a:p>
+            <a:pPr algn="ctr"/>
+            <a:r>
+              <a:rPr sz="4800" b="1" i="0">
+                <a:solidFill>
+                  <a:srgbClr val="FFFFFF"/>
+                </a:solidFill>
+                <a:latin typeface="Arial"/>
+              </a:rPr>
+              <a:t>闇が襲っても　主の光により</a:t>
+            </a:r>
+          </a:p>
+        </p:txBody>
+      </p:sp>
+      <p:sp>
+        <p:nvSpPr>
+          <p:cNvPr id="3" name="TextBox 2"/>
+          <p:cNvSpPr txBox="1"/>
+          <p:nvPr/>
+        </p:nvSpPr>
+        <p:spPr>
+          <a:xfrm>
+            <a:off x="640080" y="3268980"/>
+            <a:ext cx="10911535" cy="365760"/>
           </a:xfrm>
           <a:prstGeom prst="rect">
             <a:avLst/>
@@ -3268,25 +3496,25 @@
             <a:r>
               <a:rPr sz="2400" b="0" i="1">
                 <a:solidFill>
-                  <a:srgbClr val="B4B4B4"/>
-                </a:solidFill>
-                <a:latin typeface="Arial"/>
-              </a:rPr>
-              <a:t>sukui ni azukatta  Shu koso waga sukui</a:t>
-            </a:r>
-          </a:p>
-        </p:txBody>
-      </p:sp>
-      <p:sp>
-        <p:nvSpPr>
-          <p:cNvPr id="7" name="TextBox 6"/>
-          <p:cNvSpPr txBox="1"/>
-          <p:nvPr/>
-        </p:nvSpPr>
-        <p:spPr>
-          <a:xfrm>
-            <a:off x="594360" y="4672584"/>
-            <a:ext cx="11002975" cy="347472"/>
+                  <a:srgbClr val="AAAAAA"/>
+                </a:solidFill>
+                <a:latin typeface="Arial"/>
+              </a:rPr>
+              <a:t>yami ga osotsu temo omono hikari niyori</a:t>
+            </a:r>
+          </a:p>
+        </p:txBody>
+      </p:sp>
+      <p:sp>
+        <p:nvSpPr>
+          <p:cNvPr id="4" name="TextBox 3"/>
+          <p:cNvSpPr txBox="1"/>
+          <p:nvPr/>
+        </p:nvSpPr>
+        <p:spPr>
+          <a:xfrm>
+            <a:off x="640080" y="4046220"/>
+            <a:ext cx="10911535" cy="310896"/>
           </a:xfrm>
           <a:prstGeom prst="rect">
             <a:avLst/>
@@ -3303,11 +3531,683 @@
             <a:r>
               <a:rPr sz="2000" b="0" i="1">
                 <a:solidFill>
-                  <a:srgbClr val="8C8C8C"/>
-                </a:solidFill>
-                <a:latin typeface="Arial"/>
-              </a:rPr>
-              <a:t/>
+                  <a:srgbClr val="828282"/>
+                </a:solidFill>
+                <a:latin typeface="Arial"/>
+              </a:rPr>
+              <a:t>Divina graça me alcançou</a:t>
+            </a:r>
+          </a:p>
+        </p:txBody>
+      </p:sp>
+    </p:spTree>
+  </p:cSld>
+  <p:clrMapOvr>
+    <a:masterClrMapping/>
+  </p:clrMapOvr>
+</p:sld>
+</file>
+
+<file path=ppt/slides/slide13.xml><?xml version="1.0" encoding="utf-8"?>
+<p:sld xmlns:a="http://schemas.openxmlformats.org/drawingml/2006/main" xmlns:p="http://schemas.openxmlformats.org/presentationml/2006/main" xmlns:r="http://schemas.openxmlformats.org/officeDocument/2006/relationships">
+  <p:cSld>
+    <p:bg>
+      <p:bgPr>
+        <a:solidFill>
+          <a:srgbClr val="000000"/>
+        </a:solidFill>
+        <a:effectLst/>
+      </p:bgPr>
+    </p:bg>
+    <p:spTree>
+      <p:nvGrpSpPr>
+        <p:cNvPr id="1" name=""/>
+        <p:cNvGrpSpPr/>
+        <p:nvPr/>
+      </p:nvGrpSpPr>
+      <p:grpSpPr/>
+      <p:sp>
+        <p:nvSpPr>
+          <p:cNvPr id="2" name="TextBox 1"/>
+          <p:cNvSpPr txBox="1"/>
+          <p:nvPr/>
+        </p:nvSpPr>
+        <p:spPr>
+          <a:xfrm>
+            <a:off x="640080" y="2702052"/>
+            <a:ext cx="10911535" cy="731520"/>
+          </a:xfrm>
+          <a:prstGeom prst="rect">
+            <a:avLst/>
+          </a:prstGeom>
+          <a:noFill/>
+        </p:spPr>
+        <p:txBody>
+          <a:bodyPr wrap="square">
+            <a:spAutoFit/>
+          </a:bodyPr>
+          <a:lstStyle/>
+          <a:p>
+            <a:pPr algn="ctr"/>
+            <a:r>
+              <a:rPr sz="4800" b="1" i="0">
+                <a:solidFill>
+                  <a:srgbClr val="FFFFFF"/>
+                </a:solidFill>
+                <a:latin typeface="Arial"/>
+              </a:rPr>
+              <a:t>E quando a vida ao fim chegar</a:t>
+            </a:r>
+          </a:p>
+        </p:txBody>
+      </p:sp>
+    </p:spTree>
+  </p:cSld>
+  <p:clrMapOvr>
+    <a:masterClrMapping/>
+  </p:clrMapOvr>
+</p:sld>
+</file>
+
+<file path=ppt/slides/slide14.xml><?xml version="1.0" encoding="utf-8"?>
+<p:sld xmlns:a="http://schemas.openxmlformats.org/drawingml/2006/main" xmlns:p="http://schemas.openxmlformats.org/presentationml/2006/main" xmlns:r="http://schemas.openxmlformats.org/officeDocument/2006/relationships">
+  <p:cSld>
+    <p:bg>
+      <p:bgPr>
+        <a:solidFill>
+          <a:srgbClr val="000000"/>
+        </a:solidFill>
+        <a:effectLst/>
+      </p:bgPr>
+    </p:bg>
+    <p:spTree>
+      <p:nvGrpSpPr>
+        <p:cNvPr id="1" name=""/>
+        <p:cNvGrpSpPr/>
+        <p:nvPr/>
+      </p:nvGrpSpPr>
+      <p:grpSpPr/>
+      <p:sp>
+        <p:nvSpPr>
+          <p:cNvPr id="2" name="TextBox 1"/>
+          <p:cNvSpPr txBox="1"/>
+          <p:nvPr/>
+        </p:nvSpPr>
+        <p:spPr>
+          <a:xfrm>
+            <a:off x="640080" y="2500884"/>
+            <a:ext cx="10911535" cy="731520"/>
+          </a:xfrm>
+          <a:prstGeom prst="rect">
+            <a:avLst/>
+          </a:prstGeom>
+          <a:noFill/>
+        </p:spPr>
+        <p:txBody>
+          <a:bodyPr wrap="square">
+            <a:spAutoFit/>
+          </a:bodyPr>
+          <a:lstStyle/>
+          <a:p>
+            <a:pPr algn="ctr"/>
+            <a:r>
+              <a:rPr sz="4800" b="1" i="0">
+                <a:solidFill>
+                  <a:srgbClr val="FFFFFF"/>
+                </a:solidFill>
+                <a:latin typeface="Arial"/>
+              </a:rPr>
+              <a:t>平安、力 得る　主こそ我が救い</a:t>
+            </a:r>
+          </a:p>
+        </p:txBody>
+      </p:sp>
+      <p:sp>
+        <p:nvSpPr>
+          <p:cNvPr id="3" name="TextBox 2"/>
+          <p:cNvSpPr txBox="1"/>
+          <p:nvPr/>
+        </p:nvSpPr>
+        <p:spPr>
+          <a:xfrm>
+            <a:off x="640080" y="3268980"/>
+            <a:ext cx="10911535" cy="365760"/>
+          </a:xfrm>
+          <a:prstGeom prst="rect">
+            <a:avLst/>
+          </a:prstGeom>
+          <a:noFill/>
+        </p:spPr>
+        <p:txBody>
+          <a:bodyPr wrap="square">
+            <a:spAutoFit/>
+          </a:bodyPr>
+          <a:lstStyle/>
+          <a:p>
+            <a:pPr algn="ctr"/>
+            <a:r>
+              <a:rPr sz="2400" b="0" i="1">
+                <a:solidFill>
+                  <a:srgbClr val="AAAAAA"/>
+                </a:solidFill>
+                <a:latin typeface="Arial"/>
+              </a:rPr>
+              <a:t>heian , chikara eru shu koso waga sukui</a:t>
+            </a:r>
+          </a:p>
+        </p:txBody>
+      </p:sp>
+      <p:sp>
+        <p:nvSpPr>
+          <p:cNvPr id="4" name="TextBox 3"/>
+          <p:cNvSpPr txBox="1"/>
+          <p:nvPr/>
+        </p:nvSpPr>
+        <p:spPr>
+          <a:xfrm>
+            <a:off x="640080" y="4046220"/>
+            <a:ext cx="10911535" cy="310896"/>
+          </a:xfrm>
+          <a:prstGeom prst="rect">
+            <a:avLst/>
+          </a:prstGeom>
+          <a:noFill/>
+        </p:spPr>
+        <p:txBody>
+          <a:bodyPr wrap="square">
+            <a:spAutoFit/>
+          </a:bodyPr>
+          <a:lstStyle/>
+          <a:p>
+            <a:pPr algn="ctr"/>
+            <a:r>
+              <a:rPr sz="2000" b="0" i="1">
+                <a:solidFill>
+                  <a:srgbClr val="828282"/>
+                </a:solidFill>
+                <a:latin typeface="Arial"/>
+              </a:rPr>
+              <a:t>Divina graça me alcançou</a:t>
+            </a:r>
+          </a:p>
+        </p:txBody>
+      </p:sp>
+    </p:spTree>
+  </p:cSld>
+  <p:clrMapOvr>
+    <a:masterClrMapping/>
+  </p:clrMapOvr>
+</p:sld>
+</file>
+
+<file path=ppt/slides/slide15.xml><?xml version="1.0" encoding="utf-8"?>
+<p:sld xmlns:a="http://schemas.openxmlformats.org/drawingml/2006/main" xmlns:p="http://schemas.openxmlformats.org/presentationml/2006/main" xmlns:r="http://schemas.openxmlformats.org/officeDocument/2006/relationships">
+  <p:cSld>
+    <p:bg>
+      <p:bgPr>
+        <a:solidFill>
+          <a:srgbClr val="000000"/>
+        </a:solidFill>
+        <a:effectLst/>
+      </p:bgPr>
+    </p:bg>
+    <p:spTree>
+      <p:nvGrpSpPr>
+        <p:cNvPr id="1" name=""/>
+        <p:cNvGrpSpPr/>
+        <p:nvPr/>
+      </p:nvGrpSpPr>
+      <p:grpSpPr/>
+      <p:sp>
+        <p:nvSpPr>
+          <p:cNvPr id="2" name="TextBox 1"/>
+          <p:cNvSpPr txBox="1"/>
+          <p:nvPr/>
+        </p:nvSpPr>
+        <p:spPr>
+          <a:xfrm>
+            <a:off x="640080" y="2052828"/>
+            <a:ext cx="10911535" cy="731520"/>
+          </a:xfrm>
+          <a:prstGeom prst="rect">
+            <a:avLst/>
+          </a:prstGeom>
+          <a:noFill/>
+        </p:spPr>
+        <p:txBody>
+          <a:bodyPr wrap="square">
+            <a:spAutoFit/>
+          </a:bodyPr>
+          <a:lstStyle/>
+          <a:p>
+            <a:pPr algn="ctr"/>
+            <a:r>
+              <a:rPr sz="4800" b="1" i="0">
+                <a:solidFill>
+                  <a:srgbClr val="FFFFFF"/>
+                </a:solidFill>
+                <a:latin typeface="Arial"/>
+              </a:rPr>
+              <a:t>Levantarei Para Casa irei</a:t>
+            </a:r>
+          </a:p>
+        </p:txBody>
+      </p:sp>
+      <p:sp>
+        <p:nvSpPr>
+          <p:cNvPr id="3" name="TextBox 2"/>
+          <p:cNvSpPr txBox="1"/>
+          <p:nvPr/>
+        </p:nvSpPr>
+        <p:spPr>
+          <a:xfrm>
+            <a:off x="640080" y="2985516"/>
+            <a:ext cx="10911535" cy="731520"/>
+          </a:xfrm>
+          <a:prstGeom prst="rect">
+            <a:avLst/>
+          </a:prstGeom>
+          <a:noFill/>
+        </p:spPr>
+        <p:txBody>
+          <a:bodyPr wrap="square">
+            <a:spAutoFit/>
+          </a:bodyPr>
+          <a:lstStyle/>
+          <a:p>
+            <a:pPr algn="ctr"/>
+            <a:r>
+              <a:rPr sz="4800" b="1" i="0">
+                <a:solidFill>
+                  <a:srgbClr val="FFFFFF"/>
+                </a:solidFill>
+                <a:latin typeface="Arial"/>
+              </a:rPr>
+              <a:t>Tu és minha salvação, Senhor</a:t>
+            </a:r>
+          </a:p>
+        </p:txBody>
+      </p:sp>
+    </p:spTree>
+  </p:cSld>
+  <p:clrMapOvr>
+    <a:masterClrMapping/>
+  </p:clrMapOvr>
+</p:sld>
+</file>
+
+<file path=ppt/slides/slide16.xml><?xml version="1.0" encoding="utf-8"?>
+<p:sld xmlns:a="http://schemas.openxmlformats.org/drawingml/2006/main" xmlns:p="http://schemas.openxmlformats.org/presentationml/2006/main" xmlns:r="http://schemas.openxmlformats.org/officeDocument/2006/relationships">
+  <p:cSld>
+    <p:bg>
+      <p:bgPr>
+        <a:solidFill>
+          <a:srgbClr val="000000"/>
+        </a:solidFill>
+        <a:effectLst/>
+      </p:bgPr>
+    </p:bg>
+    <p:spTree>
+      <p:nvGrpSpPr>
+        <p:cNvPr id="1" name=""/>
+        <p:cNvGrpSpPr/>
+        <p:nvPr/>
+      </p:nvGrpSpPr>
+      <p:grpSpPr/>
+      <p:sp>
+        <p:nvSpPr>
+          <p:cNvPr id="2" name="TextBox 1"/>
+          <p:cNvSpPr txBox="1"/>
+          <p:nvPr/>
+        </p:nvSpPr>
+        <p:spPr>
+          <a:xfrm>
+            <a:off x="640080" y="2500884"/>
+            <a:ext cx="10911535" cy="731520"/>
+          </a:xfrm>
+          <a:prstGeom prst="rect">
+            <a:avLst/>
+          </a:prstGeom>
+          <a:noFill/>
+        </p:spPr>
+        <p:txBody>
+          <a:bodyPr wrap="square">
+            <a:spAutoFit/>
+          </a:bodyPr>
+          <a:lstStyle/>
+          <a:p>
+            <a:pPr algn="ctr"/>
+            <a:r>
+              <a:rPr sz="4800" b="1" i="0">
+                <a:solidFill>
+                  <a:srgbClr val="FFFFFF"/>
+                </a:solidFill>
+                <a:latin typeface="Arial"/>
+              </a:rPr>
+              <a:t>主イエスこそ神</a:t>
+            </a:r>
+          </a:p>
+        </p:txBody>
+      </p:sp>
+      <p:sp>
+        <p:nvSpPr>
+          <p:cNvPr id="3" name="TextBox 2"/>
+          <p:cNvSpPr txBox="1"/>
+          <p:nvPr/>
+        </p:nvSpPr>
+        <p:spPr>
+          <a:xfrm>
+            <a:off x="640080" y="3268980"/>
+            <a:ext cx="10911535" cy="365760"/>
+          </a:xfrm>
+          <a:prstGeom prst="rect">
+            <a:avLst/>
+          </a:prstGeom>
+          <a:noFill/>
+        </p:spPr>
+        <p:txBody>
+          <a:bodyPr wrap="square">
+            <a:spAutoFit/>
+          </a:bodyPr>
+          <a:lstStyle/>
+          <a:p>
+            <a:pPr algn="ctr"/>
+            <a:r>
+              <a:rPr sz="2400" b="0" i="1">
+                <a:solidFill>
+                  <a:srgbClr val="AAAAAA"/>
+                </a:solidFill>
+                <a:latin typeface="Arial"/>
+              </a:rPr>
+              <a:t>shu iesu koso kami</a:t>
+            </a:r>
+          </a:p>
+        </p:txBody>
+      </p:sp>
+      <p:sp>
+        <p:nvSpPr>
+          <p:cNvPr id="4" name="TextBox 3"/>
+          <p:cNvSpPr txBox="1"/>
+          <p:nvPr/>
+        </p:nvSpPr>
+        <p:spPr>
+          <a:xfrm>
+            <a:off x="640080" y="4046220"/>
+            <a:ext cx="10911535" cy="310896"/>
+          </a:xfrm>
+          <a:prstGeom prst="rect">
+            <a:avLst/>
+          </a:prstGeom>
+          <a:noFill/>
+        </p:spPr>
+        <p:txBody>
+          <a:bodyPr wrap="square">
+            <a:spAutoFit/>
+          </a:bodyPr>
+          <a:lstStyle/>
+          <a:p>
+            <a:pPr algn="ctr"/>
+            <a:r>
+              <a:rPr sz="2000" b="0" i="1">
+                <a:solidFill>
+                  <a:srgbClr val="828282"/>
+                </a:solidFill>
+                <a:latin typeface="Arial"/>
+              </a:rPr>
+              <a:t>Divina graça me alcançou</a:t>
+            </a:r>
+          </a:p>
+        </p:txBody>
+      </p:sp>
+    </p:spTree>
+  </p:cSld>
+  <p:clrMapOvr>
+    <a:masterClrMapping/>
+  </p:clrMapOvr>
+</p:sld>
+</file>
+
+<file path=ppt/slides/slide17.xml><?xml version="1.0" encoding="utf-8"?>
+<p:sld xmlns:a="http://schemas.openxmlformats.org/drawingml/2006/main" xmlns:p="http://schemas.openxmlformats.org/presentationml/2006/main" xmlns:r="http://schemas.openxmlformats.org/officeDocument/2006/relationships">
+  <p:cSld>
+    <p:bg>
+      <p:bgPr>
+        <a:solidFill>
+          <a:srgbClr val="000000"/>
+        </a:solidFill>
+        <a:effectLst/>
+      </p:bgPr>
+    </p:bg>
+    <p:spTree>
+      <p:nvGrpSpPr>
+        <p:cNvPr id="1" name=""/>
+        <p:cNvGrpSpPr/>
+        <p:nvPr/>
+      </p:nvGrpSpPr>
+      <p:grpSpPr/>
+      <p:sp>
+        <p:nvSpPr>
+          <p:cNvPr id="2" name="TextBox 1"/>
+          <p:cNvSpPr txBox="1"/>
+          <p:nvPr/>
+        </p:nvSpPr>
+        <p:spPr>
+          <a:xfrm>
+            <a:off x="640080" y="2702052"/>
+            <a:ext cx="10911535" cy="731520"/>
+          </a:xfrm>
+          <a:prstGeom prst="rect">
+            <a:avLst/>
+          </a:prstGeom>
+          <a:noFill/>
+        </p:spPr>
+        <p:txBody>
+          <a:bodyPr wrap="square">
+            <a:spAutoFit/>
+          </a:bodyPr>
+          <a:lstStyle/>
+          <a:p>
+            <a:pPr algn="ctr"/>
+            <a:r>
+              <a:rPr sz="4800" b="1" i="0">
+                <a:solidFill>
+                  <a:srgbClr val="FFFFFF"/>
+                </a:solidFill>
+                <a:latin typeface="Arial"/>
+              </a:rPr>
+              <a:t>Glória seja a Deus, o Pai</a:t>
+            </a:r>
+          </a:p>
+        </p:txBody>
+      </p:sp>
+    </p:spTree>
+  </p:cSld>
+  <p:clrMapOvr>
+    <a:masterClrMapping/>
+  </p:clrMapOvr>
+</p:sld>
+</file>
+
+<file path=ppt/slides/slide18.xml><?xml version="1.0" encoding="utf-8"?>
+<p:sld xmlns:a="http://schemas.openxmlformats.org/drawingml/2006/main" xmlns:p="http://schemas.openxmlformats.org/presentationml/2006/main" xmlns:r="http://schemas.openxmlformats.org/officeDocument/2006/relationships">
+  <p:cSld>
+    <p:bg>
+      <p:bgPr>
+        <a:solidFill>
+          <a:srgbClr val="000000"/>
+        </a:solidFill>
+        <a:effectLst/>
+      </p:bgPr>
+    </p:bg>
+    <p:spTree>
+      <p:nvGrpSpPr>
+        <p:cNvPr id="1" name=""/>
+        <p:cNvGrpSpPr/>
+        <p:nvPr/>
+      </p:nvGrpSpPr>
+      <p:grpSpPr/>
+      <p:sp>
+        <p:nvSpPr>
+          <p:cNvPr id="2" name="TextBox 1"/>
+          <p:cNvSpPr txBox="1"/>
+          <p:nvPr/>
+        </p:nvSpPr>
+        <p:spPr>
+          <a:xfrm>
+            <a:off x="640080" y="2500884"/>
+            <a:ext cx="10911535" cy="731520"/>
+          </a:xfrm>
+          <a:prstGeom prst="rect">
+            <a:avLst/>
+          </a:prstGeom>
+          <a:noFill/>
+        </p:spPr>
+        <p:txBody>
+          <a:bodyPr wrap="square">
+            <a:spAutoFit/>
+          </a:bodyPr>
+          <a:lstStyle/>
+          <a:p>
+            <a:pPr algn="ctr"/>
+            <a:r>
+              <a:rPr sz="4800" b="1" i="0">
+                <a:solidFill>
+                  <a:srgbClr val="FFFFFF"/>
+                </a:solidFill>
+                <a:latin typeface="Arial"/>
+              </a:rPr>
+              <a:t>我らの罪 背負い</a:t>
+            </a:r>
+          </a:p>
+        </p:txBody>
+      </p:sp>
+      <p:sp>
+        <p:nvSpPr>
+          <p:cNvPr id="3" name="TextBox 2"/>
+          <p:cNvSpPr txBox="1"/>
+          <p:nvPr/>
+        </p:nvSpPr>
+        <p:spPr>
+          <a:xfrm>
+            <a:off x="640080" y="3268980"/>
+            <a:ext cx="10911535" cy="365760"/>
+          </a:xfrm>
+          <a:prstGeom prst="rect">
+            <a:avLst/>
+          </a:prstGeom>
+          <a:noFill/>
+        </p:spPr>
+        <p:txBody>
+          <a:bodyPr wrap="square">
+            <a:spAutoFit/>
+          </a:bodyPr>
+          <a:lstStyle/>
+          <a:p>
+            <a:pPr algn="ctr"/>
+            <a:r>
+              <a:rPr sz="2400" b="0" i="1">
+                <a:solidFill>
+                  <a:srgbClr val="AAAAAA"/>
+                </a:solidFill>
+                <a:latin typeface="Arial"/>
+              </a:rPr>
+              <a:t>warera no tsumi seoi</a:t>
+            </a:r>
+          </a:p>
+        </p:txBody>
+      </p:sp>
+      <p:sp>
+        <p:nvSpPr>
+          <p:cNvPr id="4" name="TextBox 3"/>
+          <p:cNvSpPr txBox="1"/>
+          <p:nvPr/>
+        </p:nvSpPr>
+        <p:spPr>
+          <a:xfrm>
+            <a:off x="640080" y="4046220"/>
+            <a:ext cx="10911535" cy="310896"/>
+          </a:xfrm>
+          <a:prstGeom prst="rect">
+            <a:avLst/>
+          </a:prstGeom>
+          <a:noFill/>
+        </p:spPr>
+        <p:txBody>
+          <a:bodyPr wrap="square">
+            <a:spAutoFit/>
+          </a:bodyPr>
+          <a:lstStyle/>
+          <a:p>
+            <a:pPr algn="ctr"/>
+            <a:r>
+              <a:rPr sz="2000" b="0" i="1">
+                <a:solidFill>
+                  <a:srgbClr val="828282"/>
+                </a:solidFill>
+                <a:latin typeface="Arial"/>
+              </a:rPr>
+              <a:t>Divina graça me alcançou</a:t>
+            </a:r>
+          </a:p>
+        </p:txBody>
+      </p:sp>
+    </p:spTree>
+  </p:cSld>
+  <p:clrMapOvr>
+    <a:masterClrMapping/>
+  </p:clrMapOvr>
+</p:sld>
+</file>
+
+<file path=ppt/slides/slide19.xml><?xml version="1.0" encoding="utf-8"?>
+<p:sld xmlns:a="http://schemas.openxmlformats.org/drawingml/2006/main" xmlns:p="http://schemas.openxmlformats.org/presentationml/2006/main" xmlns:r="http://schemas.openxmlformats.org/officeDocument/2006/relationships">
+  <p:cSld>
+    <p:bg>
+      <p:bgPr>
+        <a:solidFill>
+          <a:srgbClr val="000000"/>
+        </a:solidFill>
+        <a:effectLst/>
+      </p:bgPr>
+    </p:bg>
+    <p:spTree>
+      <p:nvGrpSpPr>
+        <p:cNvPr id="1" name=""/>
+        <p:cNvGrpSpPr/>
+        <p:nvPr/>
+      </p:nvGrpSpPr>
+      <p:grpSpPr/>
+      <p:sp>
+        <p:nvSpPr>
+          <p:cNvPr id="2" name="TextBox 1"/>
+          <p:cNvSpPr txBox="1"/>
+          <p:nvPr/>
+        </p:nvSpPr>
+        <p:spPr>
+          <a:xfrm>
+            <a:off x="640080" y="2702052"/>
+            <a:ext cx="10911535" cy="731520"/>
+          </a:xfrm>
+          <a:prstGeom prst="rect">
+            <a:avLst/>
+          </a:prstGeom>
+          <a:noFill/>
+        </p:spPr>
+        <p:txBody>
+          <a:bodyPr wrap="square">
+            <a:spAutoFit/>
+          </a:bodyPr>
+          <a:lstStyle/>
+          <a:p>
+            <a:pPr algn="ctr"/>
+            <a:r>
+              <a:rPr sz="4800" b="1" i="0">
+                <a:solidFill>
+                  <a:srgbClr val="FFFFFF"/>
+                </a:solidFill>
+                <a:latin typeface="Arial"/>
+              </a:rPr>
+              <a:t>Glória seja a Deus, o Filho</a:t>
             </a:r>
           </a:p>
         </p:txBody>
@@ -3346,29 +4246,29 @@
         </p:nvSpPr>
         <p:spPr>
           <a:xfrm>
-            <a:off x="594360" y="1837944"/>
-            <a:ext cx="11002975" cy="685800"/>
-          </a:xfrm>
-          <a:prstGeom prst="rect">
-            <a:avLst/>
-          </a:prstGeom>
-          <a:noFill/>
-        </p:spPr>
-        <p:txBody>
-          <a:bodyPr wrap="square">
-            <a:spAutoFit/>
-          </a:bodyPr>
-          <a:lstStyle/>
-          <a:p>
-            <a:pPr algn="ctr"/>
-            <a:r>
-              <a:rPr sz="4400" b="1" i="0">
+            <a:off x="640080" y="2052828"/>
+            <a:ext cx="10911535" cy="731520"/>
+          </a:xfrm>
+          <a:prstGeom prst="rect">
+            <a:avLst/>
+          </a:prstGeom>
+          <a:noFill/>
+        </p:spPr>
+        <p:txBody>
+          <a:bodyPr wrap="square">
+            <a:spAutoFit/>
+          </a:bodyPr>
+          <a:lstStyle/>
+          <a:p>
+            <a:pPr algn="ctr"/>
+            <a:r>
+              <a:rPr sz="4800" b="1" i="0">
                 <a:solidFill>
                   <a:srgbClr val="FFFFFF"/>
                 </a:solidFill>
                 <a:latin typeface="Arial"/>
               </a:rPr>
-              <a:t>闇が襲っても　主の光により</a:t>
+              <a:t>À terra firme, me levou</a:t>
             </a:r>
           </a:p>
         </p:txBody>
@@ -3381,8 +4281,104 @@
         </p:nvSpPr>
         <p:spPr>
           <a:xfrm>
-            <a:off x="594360" y="2560320"/>
-            <a:ext cx="11002975" cy="384048"/>
+            <a:off x="640080" y="2985516"/>
+            <a:ext cx="10911535" cy="731520"/>
+          </a:xfrm>
+          <a:prstGeom prst="rect">
+            <a:avLst/>
+          </a:prstGeom>
+          <a:noFill/>
+        </p:spPr>
+        <p:txBody>
+          <a:bodyPr wrap="square">
+            <a:spAutoFit/>
+          </a:bodyPr>
+          <a:lstStyle/>
+          <a:p>
+            <a:pPr algn="ctr"/>
+            <a:r>
+              <a:rPr sz="4800" b="1" i="0">
+                <a:solidFill>
+                  <a:srgbClr val="FFFFFF"/>
+                </a:solidFill>
+                <a:latin typeface="Arial"/>
+              </a:rPr>
+              <a:t>Tu és minha salvação, Senhor</a:t>
+            </a:r>
+          </a:p>
+        </p:txBody>
+      </p:sp>
+    </p:spTree>
+  </p:cSld>
+  <p:clrMapOvr>
+    <a:masterClrMapping/>
+  </p:clrMapOvr>
+</p:sld>
+</file>
+
+<file path=ppt/slides/slide20.xml><?xml version="1.0" encoding="utf-8"?>
+<p:sld xmlns:a="http://schemas.openxmlformats.org/drawingml/2006/main" xmlns:p="http://schemas.openxmlformats.org/presentationml/2006/main" xmlns:r="http://schemas.openxmlformats.org/officeDocument/2006/relationships">
+  <p:cSld>
+    <p:bg>
+      <p:bgPr>
+        <a:solidFill>
+          <a:srgbClr val="000000"/>
+        </a:solidFill>
+        <a:effectLst/>
+      </p:bgPr>
+    </p:bg>
+    <p:spTree>
+      <p:nvGrpSpPr>
+        <p:cNvPr id="1" name=""/>
+        <p:cNvGrpSpPr/>
+        <p:nvPr/>
+      </p:nvGrpSpPr>
+      <p:grpSpPr/>
+      <p:sp>
+        <p:nvSpPr>
+          <p:cNvPr id="2" name="TextBox 1"/>
+          <p:cNvSpPr txBox="1"/>
+          <p:nvPr/>
+        </p:nvSpPr>
+        <p:spPr>
+          <a:xfrm>
+            <a:off x="640080" y="2500884"/>
+            <a:ext cx="10911535" cy="731520"/>
+          </a:xfrm>
+          <a:prstGeom prst="rect">
+            <a:avLst/>
+          </a:prstGeom>
+          <a:noFill/>
+        </p:spPr>
+        <p:txBody>
+          <a:bodyPr wrap="square">
+            <a:spAutoFit/>
+          </a:bodyPr>
+          <a:lstStyle/>
+          <a:p>
+            <a:pPr algn="ctr"/>
+            <a:r>
+              <a:rPr sz="4800" b="1" i="0">
+                <a:solidFill>
+                  <a:srgbClr val="FFFFFF"/>
+                </a:solidFill>
+                <a:latin typeface="Arial"/>
+              </a:rPr>
+              <a:t>あがなう 勝利の主</a:t>
+            </a:r>
+          </a:p>
+        </p:txBody>
+      </p:sp>
+      <p:sp>
+        <p:nvSpPr>
+          <p:cNvPr id="3" name="TextBox 2"/>
+          <p:cNvSpPr txBox="1"/>
+          <p:nvPr/>
+        </p:nvSpPr>
+        <p:spPr>
+          <a:xfrm>
+            <a:off x="640080" y="3268980"/>
+            <a:ext cx="10911535" cy="365760"/>
           </a:xfrm>
           <a:prstGeom prst="rect">
             <a:avLst/>
@@ -3399,11 +4395,11 @@
             <a:r>
               <a:rPr sz="2400" b="0" i="1">
                 <a:solidFill>
-                  <a:srgbClr val="B4B4B4"/>
-                </a:solidFill>
-                <a:latin typeface="Arial"/>
-              </a:rPr>
-              <a:t>yami ga osottemo  shu no hikari ni yori</a:t>
+                  <a:srgbClr val="AAAAAA"/>
+                </a:solidFill>
+                <a:latin typeface="Arial"/>
+              </a:rPr>
+              <a:t>aganau shouri no shu</a:t>
             </a:r>
           </a:p>
         </p:txBody>
@@ -3416,8 +4412,8 @@
         </p:nvSpPr>
         <p:spPr>
           <a:xfrm>
-            <a:off x="594360" y="2980944"/>
-            <a:ext cx="11002975" cy="347472"/>
+            <a:off x="640080" y="4046220"/>
+            <a:ext cx="10911535" cy="310896"/>
           </a:xfrm>
           <a:prstGeom prst="rect">
             <a:avLst/>
@@ -3434,7 +4430,871 @@
             <a:r>
               <a:rPr sz="2000" b="0" i="1">
                 <a:solidFill>
-                  <a:srgbClr val="8C8C8C"/>
+                  <a:srgbClr val="828282"/>
+                </a:solidFill>
+                <a:latin typeface="Arial"/>
+              </a:rPr>
+              <a:t>Divina graça me alcançou</a:t>
+            </a:r>
+          </a:p>
+        </p:txBody>
+      </p:sp>
+    </p:spTree>
+  </p:cSld>
+  <p:clrMapOvr>
+    <a:masterClrMapping/>
+  </p:clrMapOvr>
+</p:sld>
+</file>
+
+<file path=ppt/slides/slide21.xml><?xml version="1.0" encoding="utf-8"?>
+<p:sld xmlns:a="http://schemas.openxmlformats.org/drawingml/2006/main" xmlns:p="http://schemas.openxmlformats.org/presentationml/2006/main" xmlns:r="http://schemas.openxmlformats.org/officeDocument/2006/relationships">
+  <p:cSld>
+    <p:bg>
+      <p:bgPr>
+        <a:solidFill>
+          <a:srgbClr val="000000"/>
+        </a:solidFill>
+        <a:effectLst/>
+      </p:bgPr>
+    </p:bg>
+    <p:spTree>
+      <p:nvGrpSpPr>
+        <p:cNvPr id="1" name=""/>
+        <p:cNvGrpSpPr/>
+        <p:nvPr/>
+      </p:nvGrpSpPr>
+      <p:grpSpPr/>
+      <p:sp>
+        <p:nvSpPr>
+          <p:cNvPr id="2" name="TextBox 1"/>
+          <p:cNvSpPr txBox="1"/>
+          <p:nvPr/>
+        </p:nvSpPr>
+        <p:spPr>
+          <a:xfrm>
+            <a:off x="640080" y="2702052"/>
+            <a:ext cx="10911535" cy="731520"/>
+          </a:xfrm>
+          <a:prstGeom prst="rect">
+            <a:avLst/>
+          </a:prstGeom>
+          <a:noFill/>
+        </p:spPr>
+        <p:txBody>
+          <a:bodyPr wrap="square">
+            <a:spAutoFit/>
+          </a:bodyPr>
+          <a:lstStyle/>
+          <a:p>
+            <a:pPr algn="ctr"/>
+            <a:r>
+              <a:rPr sz="4800" b="1" i="0">
+                <a:solidFill>
+                  <a:srgbClr val="FFFFFF"/>
+                </a:solidFill>
+                <a:latin typeface="Arial"/>
+              </a:rPr>
+              <a:t>Divina graça me alcançou</a:t>
+            </a:r>
+          </a:p>
+        </p:txBody>
+      </p:sp>
+    </p:spTree>
+  </p:cSld>
+  <p:clrMapOvr>
+    <a:masterClrMapping/>
+  </p:clrMapOvr>
+</p:sld>
+</file>
+
+<file path=ppt/slides/slide22.xml><?xml version="1.0" encoding="utf-8"?>
+<p:sld xmlns:a="http://schemas.openxmlformats.org/drawingml/2006/main" xmlns:p="http://schemas.openxmlformats.org/presentationml/2006/main" xmlns:r="http://schemas.openxmlformats.org/officeDocument/2006/relationships">
+  <p:cSld>
+    <p:bg>
+      <p:bgPr>
+        <a:solidFill>
+          <a:srgbClr val="000000"/>
+        </a:solidFill>
+        <a:effectLst/>
+      </p:bgPr>
+    </p:bg>
+    <p:spTree>
+      <p:nvGrpSpPr>
+        <p:cNvPr id="1" name=""/>
+        <p:cNvGrpSpPr/>
+        <p:nvPr/>
+      </p:nvGrpSpPr>
+      <p:grpSpPr/>
+      <p:sp>
+        <p:nvSpPr>
+          <p:cNvPr id="2" name="TextBox 1"/>
+          <p:cNvSpPr txBox="1"/>
+          <p:nvPr/>
+        </p:nvSpPr>
+        <p:spPr>
+          <a:xfrm>
+            <a:off x="640080" y="2500884"/>
+            <a:ext cx="10911535" cy="731520"/>
+          </a:xfrm>
+          <a:prstGeom prst="rect">
+            <a:avLst/>
+          </a:prstGeom>
+          <a:noFill/>
+        </p:spPr>
+        <p:txBody>
+          <a:bodyPr wrap="square">
+            <a:spAutoFit/>
+          </a:bodyPr>
+          <a:lstStyle/>
+          <a:p>
+            <a:pPr algn="ctr"/>
+            <a:r>
+              <a:rPr sz="4800" b="1" i="0">
+                <a:solidFill>
+                  <a:srgbClr val="FFFFFF"/>
+                </a:solidFill>
+                <a:latin typeface="Arial"/>
+              </a:rPr>
+              <a:t>主こそ我が救い</a:t>
+            </a:r>
+          </a:p>
+        </p:txBody>
+      </p:sp>
+      <p:sp>
+        <p:nvSpPr>
+          <p:cNvPr id="3" name="TextBox 2"/>
+          <p:cNvSpPr txBox="1"/>
+          <p:nvPr/>
+        </p:nvSpPr>
+        <p:spPr>
+          <a:xfrm>
+            <a:off x="640080" y="3268980"/>
+            <a:ext cx="10911535" cy="365760"/>
+          </a:xfrm>
+          <a:prstGeom prst="rect">
+            <a:avLst/>
+          </a:prstGeom>
+          <a:noFill/>
+        </p:spPr>
+        <p:txBody>
+          <a:bodyPr wrap="square">
+            <a:spAutoFit/>
+          </a:bodyPr>
+          <a:lstStyle/>
+          <a:p>
+            <a:pPr algn="ctr"/>
+            <a:r>
+              <a:rPr sz="2400" b="0" i="1">
+                <a:solidFill>
+                  <a:srgbClr val="AAAAAA"/>
+                </a:solidFill>
+                <a:latin typeface="Arial"/>
+              </a:rPr>
+              <a:t>shu koso waga sukui</a:t>
+            </a:r>
+          </a:p>
+        </p:txBody>
+      </p:sp>
+      <p:sp>
+        <p:nvSpPr>
+          <p:cNvPr id="4" name="TextBox 3"/>
+          <p:cNvSpPr txBox="1"/>
+          <p:nvPr/>
+        </p:nvSpPr>
+        <p:spPr>
+          <a:xfrm>
+            <a:off x="640080" y="4046220"/>
+            <a:ext cx="10911535" cy="310896"/>
+          </a:xfrm>
+          <a:prstGeom prst="rect">
+            <a:avLst/>
+          </a:prstGeom>
+          <a:noFill/>
+        </p:spPr>
+        <p:txBody>
+          <a:bodyPr wrap="square">
+            <a:spAutoFit/>
+          </a:bodyPr>
+          <a:lstStyle/>
+          <a:p>
+            <a:pPr algn="ctr"/>
+            <a:r>
+              <a:rPr sz="2000" b="0" i="1">
+                <a:solidFill>
+                  <a:srgbClr val="828282"/>
+                </a:solidFill>
+                <a:latin typeface="Arial"/>
+              </a:rPr>
+              <a:t>Divina graça me alcançou</a:t>
+            </a:r>
+          </a:p>
+        </p:txBody>
+      </p:sp>
+    </p:spTree>
+  </p:cSld>
+  <p:clrMapOvr>
+    <a:masterClrMapping/>
+  </p:clrMapOvr>
+</p:sld>
+</file>
+
+<file path=ppt/slides/slide23.xml><?xml version="1.0" encoding="utf-8"?>
+<p:sld xmlns:a="http://schemas.openxmlformats.org/drawingml/2006/main" xmlns:p="http://schemas.openxmlformats.org/presentationml/2006/main" xmlns:r="http://schemas.openxmlformats.org/officeDocument/2006/relationships">
+  <p:cSld>
+    <p:bg>
+      <p:bgPr>
+        <a:solidFill>
+          <a:srgbClr val="000000"/>
+        </a:solidFill>
+        <a:effectLst/>
+      </p:bgPr>
+    </p:bg>
+    <p:spTree>
+      <p:nvGrpSpPr>
+        <p:cNvPr id="1" name=""/>
+        <p:cNvGrpSpPr/>
+        <p:nvPr/>
+      </p:nvGrpSpPr>
+      <p:grpSpPr/>
+      <p:sp>
+        <p:nvSpPr>
+          <p:cNvPr id="2" name="TextBox 1"/>
+          <p:cNvSpPr txBox="1"/>
+          <p:nvPr/>
+        </p:nvSpPr>
+        <p:spPr>
+          <a:xfrm>
+            <a:off x="640080" y="2052828"/>
+            <a:ext cx="10911535" cy="731520"/>
+          </a:xfrm>
+          <a:prstGeom prst="rect">
+            <a:avLst/>
+          </a:prstGeom>
+          <a:noFill/>
+        </p:spPr>
+        <p:txBody>
+          <a:bodyPr wrap="square">
+            <a:spAutoFit/>
+          </a:bodyPr>
+          <a:lstStyle/>
+          <a:p>
+            <a:pPr algn="ctr"/>
+            <a:r>
+              <a:rPr sz="4800" b="1" i="0">
+                <a:solidFill>
+                  <a:srgbClr val="FFFFFF"/>
+                </a:solidFill>
+                <a:latin typeface="Arial"/>
+              </a:rPr>
+              <a:t>Do bravo mar me resgatou</a:t>
+            </a:r>
+          </a:p>
+        </p:txBody>
+      </p:sp>
+      <p:sp>
+        <p:nvSpPr>
+          <p:cNvPr id="3" name="TextBox 2"/>
+          <p:cNvSpPr txBox="1"/>
+          <p:nvPr/>
+        </p:nvSpPr>
+        <p:spPr>
+          <a:xfrm>
+            <a:off x="640080" y="2985516"/>
+            <a:ext cx="10911535" cy="731520"/>
+          </a:xfrm>
+          <a:prstGeom prst="rect">
+            <a:avLst/>
+          </a:prstGeom>
+          <a:noFill/>
+        </p:spPr>
+        <p:txBody>
+          <a:bodyPr wrap="square">
+            <a:spAutoFit/>
+          </a:bodyPr>
+          <a:lstStyle/>
+          <a:p>
+            <a:pPr algn="ctr"/>
+            <a:r>
+              <a:rPr sz="4800" b="1" i="0">
+                <a:solidFill>
+                  <a:srgbClr val="FFFFFF"/>
+                </a:solidFill>
+                <a:latin typeface="Arial"/>
+              </a:rPr>
+              <a:t>À terra firme, me levou</a:t>
+            </a:r>
+          </a:p>
+        </p:txBody>
+      </p:sp>
+    </p:spTree>
+  </p:cSld>
+  <p:clrMapOvr>
+    <a:masterClrMapping/>
+  </p:clrMapOvr>
+</p:sld>
+</file>
+
+<file path=ppt/slides/slide24.xml><?xml version="1.0" encoding="utf-8"?>
+<p:sld xmlns:a="http://schemas.openxmlformats.org/drawingml/2006/main" xmlns:p="http://schemas.openxmlformats.org/presentationml/2006/main" xmlns:r="http://schemas.openxmlformats.org/officeDocument/2006/relationships">
+  <p:cSld>
+    <p:bg>
+      <p:bgPr>
+        <a:solidFill>
+          <a:srgbClr val="000000"/>
+        </a:solidFill>
+        <a:effectLst/>
+      </p:bgPr>
+    </p:bg>
+    <p:spTree>
+      <p:nvGrpSpPr>
+        <p:cNvPr id="1" name=""/>
+        <p:cNvGrpSpPr/>
+        <p:nvPr/>
+      </p:nvGrpSpPr>
+      <p:grpSpPr/>
+      <p:sp>
+        <p:nvSpPr>
+          <p:cNvPr id="2" name="TextBox 1"/>
+          <p:cNvSpPr txBox="1"/>
+          <p:nvPr/>
+        </p:nvSpPr>
+        <p:spPr>
+          <a:xfrm>
+            <a:off x="640080" y="2500884"/>
+            <a:ext cx="10911535" cy="731520"/>
+          </a:xfrm>
+          <a:prstGeom prst="rect">
+            <a:avLst/>
+          </a:prstGeom>
+          <a:noFill/>
+        </p:spPr>
+        <p:txBody>
+          <a:bodyPr wrap="square">
+            <a:spAutoFit/>
+          </a:bodyPr>
+          <a:lstStyle/>
+          <a:p>
+            <a:pPr algn="ctr"/>
+            <a:r>
+              <a:rPr sz="4800" b="1" i="0">
+                <a:solidFill>
+                  <a:srgbClr val="FFFFFF"/>
+                </a:solidFill>
+                <a:latin typeface="Arial"/>
+              </a:rPr>
+              <a:t>最期の瞬間まで　私は主のもの</a:t>
+            </a:r>
+          </a:p>
+        </p:txBody>
+      </p:sp>
+      <p:sp>
+        <p:nvSpPr>
+          <p:cNvPr id="3" name="TextBox 2"/>
+          <p:cNvSpPr txBox="1"/>
+          <p:nvPr/>
+        </p:nvSpPr>
+        <p:spPr>
+          <a:xfrm>
+            <a:off x="640080" y="3268980"/>
+            <a:ext cx="10911535" cy="365760"/>
+          </a:xfrm>
+          <a:prstGeom prst="rect">
+            <a:avLst/>
+          </a:prstGeom>
+          <a:noFill/>
+        </p:spPr>
+        <p:txBody>
+          <a:bodyPr wrap="square">
+            <a:spAutoFit/>
+          </a:bodyPr>
+          <a:lstStyle/>
+          <a:p>
+            <a:pPr algn="ctr"/>
+            <a:r>
+              <a:rPr sz="2400" b="0" i="1">
+                <a:solidFill>
+                  <a:srgbClr val="AAAAAA"/>
+                </a:solidFill>
+                <a:latin typeface="Arial"/>
+              </a:rPr>
+              <a:t>saigo no shunkan made watashi ha omono mono</a:t>
+            </a:r>
+          </a:p>
+        </p:txBody>
+      </p:sp>
+      <p:sp>
+        <p:nvSpPr>
+          <p:cNvPr id="4" name="TextBox 3"/>
+          <p:cNvSpPr txBox="1"/>
+          <p:nvPr/>
+        </p:nvSpPr>
+        <p:spPr>
+          <a:xfrm>
+            <a:off x="640080" y="4046220"/>
+            <a:ext cx="10911535" cy="310896"/>
+          </a:xfrm>
+          <a:prstGeom prst="rect">
+            <a:avLst/>
+          </a:prstGeom>
+          <a:noFill/>
+        </p:spPr>
+        <p:txBody>
+          <a:bodyPr wrap="square">
+            <a:spAutoFit/>
+          </a:bodyPr>
+          <a:lstStyle/>
+          <a:p>
+            <a:pPr algn="ctr"/>
+            <a:r>
+              <a:rPr sz="2000" b="0" i="1">
+                <a:solidFill>
+                  <a:srgbClr val="828282"/>
+                </a:solidFill>
+                <a:latin typeface="Arial"/>
+              </a:rPr>
+              <a:t>Divina graça me alcançou</a:t>
+            </a:r>
+          </a:p>
+        </p:txBody>
+      </p:sp>
+    </p:spTree>
+  </p:cSld>
+  <p:clrMapOvr>
+    <a:masterClrMapping/>
+  </p:clrMapOvr>
+</p:sld>
+</file>
+
+<file path=ppt/slides/slide25.xml><?xml version="1.0" encoding="utf-8"?>
+<p:sld xmlns:a="http://schemas.openxmlformats.org/drawingml/2006/main" xmlns:p="http://schemas.openxmlformats.org/presentationml/2006/main" xmlns:r="http://schemas.openxmlformats.org/officeDocument/2006/relationships">
+  <p:cSld>
+    <p:bg>
+      <p:bgPr>
+        <a:solidFill>
+          <a:srgbClr val="000000"/>
+        </a:solidFill>
+        <a:effectLst/>
+      </p:bgPr>
+    </p:bg>
+    <p:spTree>
+      <p:nvGrpSpPr>
+        <p:cNvPr id="1" name=""/>
+        <p:cNvGrpSpPr/>
+        <p:nvPr/>
+      </p:nvGrpSpPr>
+      <p:grpSpPr/>
+      <p:sp>
+        <p:nvSpPr>
+          <p:cNvPr id="2" name="TextBox 1"/>
+          <p:cNvSpPr txBox="1"/>
+          <p:nvPr/>
+        </p:nvSpPr>
+        <p:spPr>
+          <a:xfrm>
+            <a:off x="640080" y="2702052"/>
+            <a:ext cx="10911535" cy="731520"/>
+          </a:xfrm>
+          <a:prstGeom prst="rect">
+            <a:avLst/>
+          </a:prstGeom>
+          <a:noFill/>
+        </p:spPr>
+        <p:txBody>
+          <a:bodyPr wrap="square">
+            <a:spAutoFit/>
+          </a:bodyPr>
+          <a:lstStyle/>
+          <a:p>
+            <a:pPr algn="ctr"/>
+            <a:r>
+              <a:rPr sz="4800" b="1" i="0">
+                <a:solidFill>
+                  <a:srgbClr val="FFFFFF"/>
+                </a:solidFill>
+                <a:latin typeface="Arial"/>
+              </a:rPr>
+              <a:t>Tu és minha salvação, Senhor</a:t>
+            </a:r>
+          </a:p>
+        </p:txBody>
+      </p:sp>
+    </p:spTree>
+  </p:cSld>
+  <p:clrMapOvr>
+    <a:masterClrMapping/>
+  </p:clrMapOvr>
+</p:sld>
+</file>
+
+<file path=ppt/slides/slide26.xml><?xml version="1.0" encoding="utf-8"?>
+<p:sld xmlns:a="http://schemas.openxmlformats.org/drawingml/2006/main" xmlns:p="http://schemas.openxmlformats.org/presentationml/2006/main" xmlns:r="http://schemas.openxmlformats.org/officeDocument/2006/relationships">
+  <p:cSld>
+    <p:bg>
+      <p:bgPr>
+        <a:solidFill>
+          <a:srgbClr val="000000"/>
+        </a:solidFill>
+        <a:effectLst/>
+      </p:bgPr>
+    </p:bg>
+    <p:spTree>
+      <p:nvGrpSpPr>
+        <p:cNvPr id="1" name=""/>
+        <p:cNvGrpSpPr/>
+        <p:nvPr/>
+      </p:nvGrpSpPr>
+      <p:grpSpPr/>
+      <p:sp>
+        <p:nvSpPr>
+          <p:cNvPr id="2" name="TextBox 1"/>
+          <p:cNvSpPr txBox="1"/>
+          <p:nvPr/>
+        </p:nvSpPr>
+        <p:spPr>
+          <a:xfrm>
+            <a:off x="640080" y="2500884"/>
+            <a:ext cx="10911535" cy="731520"/>
+          </a:xfrm>
+          <a:prstGeom prst="rect">
+            <a:avLst/>
+          </a:prstGeom>
+          <a:noFill/>
+        </p:spPr>
+        <p:txBody>
+          <a:bodyPr wrap="square">
+            <a:spAutoFit/>
+          </a:bodyPr>
+          <a:lstStyle/>
+          <a:p>
+            <a:pPr algn="ctr"/>
+            <a:r>
+              <a:rPr sz="4800" b="1" i="0">
+                <a:solidFill>
+                  <a:srgbClr val="FFFFFF"/>
+                </a:solidFill>
+                <a:latin typeface="Arial"/>
+              </a:rPr>
+              <a:t>帰りゆく 主のもとへ　主こそ我が救い</a:t>
+            </a:r>
+          </a:p>
+        </p:txBody>
+      </p:sp>
+      <p:sp>
+        <p:nvSpPr>
+          <p:cNvPr id="3" name="TextBox 2"/>
+          <p:cNvSpPr txBox="1"/>
+          <p:nvPr/>
+        </p:nvSpPr>
+        <p:spPr>
+          <a:xfrm>
+            <a:off x="640080" y="3268980"/>
+            <a:ext cx="10911535" cy="365760"/>
+          </a:xfrm>
+          <a:prstGeom prst="rect">
+            <a:avLst/>
+          </a:prstGeom>
+          <a:noFill/>
+        </p:spPr>
+        <p:txBody>
+          <a:bodyPr wrap="square">
+            <a:spAutoFit/>
+          </a:bodyPr>
+          <a:lstStyle/>
+          <a:p>
+            <a:pPr algn="ctr"/>
+            <a:r>
+              <a:rPr sz="2400" b="0" i="1">
+                <a:solidFill>
+                  <a:srgbClr val="AAAAAA"/>
+                </a:solidFill>
+                <a:latin typeface="Arial"/>
+              </a:rPr>
+              <a:t>kaeri yuku omono motohe shu koso waga sukui</a:t>
+            </a:r>
+          </a:p>
+        </p:txBody>
+      </p:sp>
+      <p:sp>
+        <p:nvSpPr>
+          <p:cNvPr id="4" name="TextBox 3"/>
+          <p:cNvSpPr txBox="1"/>
+          <p:nvPr/>
+        </p:nvSpPr>
+        <p:spPr>
+          <a:xfrm>
+            <a:off x="640080" y="4046220"/>
+            <a:ext cx="10911535" cy="310896"/>
+          </a:xfrm>
+          <a:prstGeom prst="rect">
+            <a:avLst/>
+          </a:prstGeom>
+          <a:noFill/>
+        </p:spPr>
+        <p:txBody>
+          <a:bodyPr wrap="square">
+            <a:spAutoFit/>
+          </a:bodyPr>
+          <a:lstStyle/>
+          <a:p>
+            <a:pPr algn="ctr"/>
+            <a:r>
+              <a:rPr sz="2000" b="0" i="1">
+                <a:solidFill>
+                  <a:srgbClr val="828282"/>
+                </a:solidFill>
+                <a:latin typeface="Arial"/>
+              </a:rPr>
+              <a:t>Divina graça me alcançou</a:t>
+            </a:r>
+          </a:p>
+        </p:txBody>
+      </p:sp>
+    </p:spTree>
+  </p:cSld>
+  <p:clrMapOvr>
+    <a:masterClrMapping/>
+  </p:clrMapOvr>
+</p:sld>
+</file>
+
+<file path=ppt/slides/slide27.xml><?xml version="1.0" encoding="utf-8"?>
+<p:sld xmlns:a="http://schemas.openxmlformats.org/drawingml/2006/main" xmlns:p="http://schemas.openxmlformats.org/presentationml/2006/main" xmlns:r="http://schemas.openxmlformats.org/officeDocument/2006/relationships">
+  <p:cSld>
+    <p:bg>
+      <p:bgPr>
+        <a:solidFill>
+          <a:srgbClr val="000000"/>
+        </a:solidFill>
+        <a:effectLst/>
+      </p:bgPr>
+    </p:bg>
+    <p:spTree>
+      <p:nvGrpSpPr>
+        <p:cNvPr id="1" name=""/>
+        <p:cNvGrpSpPr/>
+        <p:nvPr/>
+      </p:nvGrpSpPr>
+      <p:grpSpPr/>
+      <p:sp>
+        <p:nvSpPr>
+          <p:cNvPr id="2" name="TextBox 1"/>
+          <p:cNvSpPr txBox="1"/>
+          <p:nvPr/>
+        </p:nvSpPr>
+        <p:spPr>
+          <a:xfrm>
+            <a:off x="640080" y="2052828"/>
+            <a:ext cx="10911535" cy="731520"/>
+          </a:xfrm>
+          <a:prstGeom prst="rect">
+            <a:avLst/>
+          </a:prstGeom>
+          <a:noFill/>
+        </p:spPr>
+        <p:txBody>
+          <a:bodyPr wrap="square">
+            <a:spAutoFit/>
+          </a:bodyPr>
+          <a:lstStyle/>
+          <a:p>
+            <a:pPr algn="ctr"/>
+            <a:r>
+              <a:rPr sz="4800" b="1" i="0">
+                <a:solidFill>
+                  <a:srgbClr val="FFFFFF"/>
+                </a:solidFill>
+                <a:latin typeface="Arial"/>
+              </a:rPr>
+              <a:t>Tu és minha salvação, Senhor</a:t>
+            </a:r>
+          </a:p>
+        </p:txBody>
+      </p:sp>
+      <p:sp>
+        <p:nvSpPr>
+          <p:cNvPr id="3" name="TextBox 2"/>
+          <p:cNvSpPr txBox="1"/>
+          <p:nvPr/>
+        </p:nvSpPr>
+        <p:spPr>
+          <a:xfrm>
+            <a:off x="640080" y="2985516"/>
+            <a:ext cx="10911535" cy="731520"/>
+          </a:xfrm>
+          <a:prstGeom prst="rect">
+            <a:avLst/>
+          </a:prstGeom>
+          <a:noFill/>
+        </p:spPr>
+        <p:txBody>
+          <a:bodyPr wrap="square">
+            <a:spAutoFit/>
+          </a:bodyPr>
+          <a:lstStyle/>
+          <a:p>
+            <a:pPr algn="ctr"/>
+            <a:r>
+              <a:rPr sz="4800" b="1" i="0">
+                <a:solidFill>
+                  <a:srgbClr val="FFFFFF"/>
+                </a:solidFill>
+                <a:latin typeface="Arial"/>
+              </a:rPr>
+              <a:t>Quem é como o Senhor, meu Deus?</a:t>
+            </a:r>
+          </a:p>
+        </p:txBody>
+      </p:sp>
+    </p:spTree>
+  </p:cSld>
+  <p:clrMapOvr>
+    <a:masterClrMapping/>
+  </p:clrMapOvr>
+</p:sld>
+</file>
+
+<file path=ppt/slides/slide28.xml><?xml version="1.0" encoding="utf-8"?>
+<p:sld xmlns:a="http://schemas.openxmlformats.org/drawingml/2006/main" xmlns:p="http://schemas.openxmlformats.org/presentationml/2006/main" xmlns:r="http://schemas.openxmlformats.org/officeDocument/2006/relationships">
+  <p:cSld>
+    <p:bg>
+      <p:bgPr>
+        <a:solidFill>
+          <a:srgbClr val="000000"/>
+        </a:solidFill>
+        <a:effectLst/>
+      </p:bgPr>
+    </p:bg>
+    <p:spTree>
+      <p:nvGrpSpPr>
+        <p:cNvPr id="1" name=""/>
+        <p:cNvGrpSpPr/>
+        <p:nvPr/>
+      </p:nvGrpSpPr>
+      <p:grpSpPr/>
+      <p:sp>
+        <p:nvSpPr>
+          <p:cNvPr id="2" name="TextBox 1"/>
+          <p:cNvSpPr txBox="1"/>
+          <p:nvPr/>
+        </p:nvSpPr>
+        <p:spPr>
+          <a:xfrm>
+            <a:off x="640080" y="2052828"/>
+            <a:ext cx="10911535" cy="731520"/>
+          </a:xfrm>
+          <a:prstGeom prst="rect">
+            <a:avLst/>
+          </a:prstGeom>
+          <a:noFill/>
+        </p:spPr>
+        <p:txBody>
+          <a:bodyPr wrap="square">
+            <a:spAutoFit/>
+          </a:bodyPr>
+          <a:lstStyle/>
+          <a:p>
+            <a:pPr algn="ctr"/>
+            <a:r>
+              <a:rPr sz="4800" b="1" i="0">
+                <a:solidFill>
+                  <a:srgbClr val="FFFFFF"/>
+                </a:solidFill>
+                <a:latin typeface="Arial"/>
+              </a:rPr>
+              <a:t>Salva os seus com amor fiel</a:t>
+            </a:r>
+          </a:p>
+        </p:txBody>
+      </p:sp>
+      <p:sp>
+        <p:nvSpPr>
+          <p:cNvPr id="3" name="TextBox 2"/>
+          <p:cNvSpPr txBox="1"/>
+          <p:nvPr/>
+        </p:nvSpPr>
+        <p:spPr>
+          <a:xfrm>
+            <a:off x="640080" y="2985516"/>
+            <a:ext cx="10911535" cy="731520"/>
+          </a:xfrm>
+          <a:prstGeom prst="rect">
+            <a:avLst/>
+          </a:prstGeom>
+          <a:noFill/>
+        </p:spPr>
+        <p:txBody>
+          <a:bodyPr wrap="square">
+            <a:spAutoFit/>
+          </a:bodyPr>
+          <a:lstStyle/>
+          <a:p>
+            <a:pPr algn="ctr"/>
+            <a:r>
+              <a:rPr sz="4800" b="1" i="0">
+                <a:solidFill>
+                  <a:srgbClr val="FFFFFF"/>
+                </a:solidFill>
+                <a:latin typeface="Arial"/>
+              </a:rPr>
+              <a:t>Pagou, venceu, tudo consumou</a:t>
+            </a:r>
+          </a:p>
+        </p:txBody>
+      </p:sp>
+    </p:spTree>
+  </p:cSld>
+  <p:clrMapOvr>
+    <a:masterClrMapping/>
+  </p:clrMapOvr>
+</p:sld>
+</file>
+
+<file path=ppt/slides/slide29.xml><?xml version="1.0" encoding="utf-8"?>
+<p:sld xmlns:a="http://schemas.openxmlformats.org/drawingml/2006/main" xmlns:p="http://schemas.openxmlformats.org/presentationml/2006/main" xmlns:r="http://schemas.openxmlformats.org/officeDocument/2006/relationships">
+  <p:cSld>
+    <p:bg>
+      <p:bgPr>
+        <a:solidFill>
+          <a:srgbClr val="000000"/>
+        </a:solidFill>
+        <a:effectLst/>
+      </p:bgPr>
+    </p:bg>
+    <p:spTree>
+      <p:nvGrpSpPr>
+        <p:cNvPr id="1" name=""/>
+        <p:cNvGrpSpPr/>
+        <p:nvPr/>
+      </p:nvGrpSpPr>
+      <p:grpSpPr/>
+      <p:sp>
+        <p:nvSpPr>
+          <p:cNvPr id="2" name="TextBox 1"/>
+          <p:cNvSpPr txBox="1"/>
+          <p:nvPr/>
+        </p:nvSpPr>
+        <p:spPr>
+          <a:xfrm>
+            <a:off x="640080" y="2052828"/>
+            <a:ext cx="10911535" cy="731520"/>
+          </a:xfrm>
+          <a:prstGeom prst="rect">
+            <a:avLst/>
+          </a:prstGeom>
+          <a:noFill/>
+        </p:spPr>
+        <p:txBody>
+          <a:bodyPr wrap="square">
+            <a:spAutoFit/>
+          </a:bodyPr>
+          <a:lstStyle/>
+          <a:p>
+            <a:pPr algn="ctr"/>
+            <a:r>
+              <a:rPr sz="4800" b="1" i="0">
+                <a:solidFill>
+                  <a:srgbClr val="FFFFFF"/>
                 </a:solidFill>
                 <a:latin typeface="Arial"/>
               </a:rPr>
@@ -3445,101 +5305,31 @@
       </p:sp>
       <p:sp>
         <p:nvSpPr>
-          <p:cNvPr id="5" name="TextBox 4"/>
-          <p:cNvSpPr txBox="1"/>
-          <p:nvPr/>
-        </p:nvSpPr>
-        <p:spPr>
-          <a:xfrm>
-            <a:off x="594360" y="3529584"/>
-            <a:ext cx="11002975" cy="685800"/>
-          </a:xfrm>
-          <a:prstGeom prst="rect">
-            <a:avLst/>
-          </a:prstGeom>
-          <a:noFill/>
-        </p:spPr>
-        <p:txBody>
-          <a:bodyPr wrap="square">
-            <a:spAutoFit/>
-          </a:bodyPr>
-          <a:lstStyle/>
-          <a:p>
-            <a:pPr algn="ctr"/>
-            <a:r>
-              <a:rPr sz="4400" b="1" i="0">
+          <p:cNvPr id="3" name="TextBox 2"/>
+          <p:cNvSpPr txBox="1"/>
+          <p:nvPr/>
+        </p:nvSpPr>
+        <p:spPr>
+          <a:xfrm>
+            <a:off x="640080" y="2985516"/>
+            <a:ext cx="10911535" cy="731520"/>
+          </a:xfrm>
+          <a:prstGeom prst="rect">
+            <a:avLst/>
+          </a:prstGeom>
+          <a:noFill/>
+        </p:spPr>
+        <p:txBody>
+          <a:bodyPr wrap="square">
+            <a:spAutoFit/>
+          </a:bodyPr>
+          <a:lstStyle/>
+          <a:p>
+            <a:pPr algn="ctr"/>
+            <a:r>
+              <a:rPr sz="4800" b="1" i="0">
                 <a:solidFill>
                   <a:srgbClr val="FFFFFF"/>
-                </a:solidFill>
-                <a:latin typeface="Arial"/>
-              </a:rPr>
-              <a:t>平安 力 得る 主こそ我が救い</a:t>
-            </a:r>
-          </a:p>
-        </p:txBody>
-      </p:sp>
-      <p:sp>
-        <p:nvSpPr>
-          <p:cNvPr id="6" name="TextBox 5"/>
-          <p:cNvSpPr txBox="1"/>
-          <p:nvPr/>
-        </p:nvSpPr>
-        <p:spPr>
-          <a:xfrm>
-            <a:off x="594360" y="4251960"/>
-            <a:ext cx="11002975" cy="384048"/>
-          </a:xfrm>
-          <a:prstGeom prst="rect">
-            <a:avLst/>
-          </a:prstGeom>
-          <a:noFill/>
-        </p:spPr>
-        <p:txBody>
-          <a:bodyPr wrap="square">
-            <a:spAutoFit/>
-          </a:bodyPr>
-          <a:lstStyle/>
-          <a:p>
-            <a:pPr algn="ctr"/>
-            <a:r>
-              <a:rPr sz="2400" b="0" i="1">
-                <a:solidFill>
-                  <a:srgbClr val="B4B4B4"/>
-                </a:solidFill>
-                <a:latin typeface="Arial"/>
-              </a:rPr>
-              <a:t>heian chikara eru     shu koso waga sukui</a:t>
-            </a:r>
-          </a:p>
-        </p:txBody>
-      </p:sp>
-      <p:sp>
-        <p:nvSpPr>
-          <p:cNvPr id="7" name="TextBox 6"/>
-          <p:cNvSpPr txBox="1"/>
-          <p:nvPr/>
-        </p:nvSpPr>
-        <p:spPr>
-          <a:xfrm>
-            <a:off x="594360" y="4672584"/>
-            <a:ext cx="11002975" cy="347472"/>
-          </a:xfrm>
-          <a:prstGeom prst="rect">
-            <a:avLst/>
-          </a:prstGeom>
-          <a:noFill/>
-        </p:spPr>
-        <p:txBody>
-          <a:bodyPr wrap="square">
-            <a:spAutoFit/>
-          </a:bodyPr>
-          <a:lstStyle/>
-          <a:p>
-            <a:pPr algn="ctr"/>
-            <a:r>
-              <a:rPr sz="2000" b="0" i="1">
-                <a:solidFill>
-                  <a:srgbClr val="8C8C8C"/>
                 </a:solidFill>
                 <a:latin typeface="Arial"/>
               </a:rPr>
@@ -3582,29 +5372,29 @@
         </p:nvSpPr>
         <p:spPr>
           <a:xfrm>
-            <a:off x="594360" y="1837944"/>
-            <a:ext cx="11002975" cy="685800"/>
-          </a:xfrm>
-          <a:prstGeom prst="rect">
-            <a:avLst/>
-          </a:prstGeom>
-          <a:noFill/>
-        </p:spPr>
-        <p:txBody>
-          <a:bodyPr wrap="square">
-            <a:spAutoFit/>
-          </a:bodyPr>
-          <a:lstStyle/>
-          <a:p>
-            <a:pPr algn="ctr"/>
-            <a:r>
-              <a:rPr sz="4400" b="1" i="0">
+            <a:off x="640080" y="2052828"/>
+            <a:ext cx="10911535" cy="731520"/>
+          </a:xfrm>
+          <a:prstGeom prst="rect">
+            <a:avLst/>
+          </a:prstGeom>
+          <a:noFill/>
+        </p:spPr>
+        <p:txBody>
+          <a:bodyPr wrap="square">
+            <a:spAutoFit/>
+          </a:bodyPr>
+          <a:lstStyle/>
+          <a:p>
+            <a:pPr algn="ctr"/>
+            <a:r>
+              <a:rPr sz="4800" b="1" i="0">
                 <a:solidFill>
                   <a:srgbClr val="FFFFFF"/>
                 </a:solidFill>
                 <a:latin typeface="Arial"/>
               </a:rPr>
-              <a:t>主イエスこそ神   我らの罪 背負い</a:t>
+              <a:t>A escuridão não temerei</a:t>
             </a:r>
           </a:p>
         </p:txBody>
@@ -3617,8 +5407,549 @@
         </p:nvSpPr>
         <p:spPr>
           <a:xfrm>
-            <a:off x="594360" y="2560320"/>
-            <a:ext cx="11002975" cy="384048"/>
+            <a:off x="640080" y="2985516"/>
+            <a:ext cx="10911535" cy="731520"/>
+          </a:xfrm>
+          <a:prstGeom prst="rect">
+            <a:avLst/>
+          </a:prstGeom>
+          <a:noFill/>
+        </p:spPr>
+        <p:txBody>
+          <a:bodyPr wrap="square">
+            <a:spAutoFit/>
+          </a:bodyPr>
+          <a:lstStyle/>
+          <a:p>
+            <a:pPr algn="ctr"/>
+            <a:r>
+              <a:rPr sz="4800" b="1" i="0">
+                <a:solidFill>
+                  <a:srgbClr val="FFFFFF"/>
+                </a:solidFill>
+                <a:latin typeface="Arial"/>
+              </a:rPr>
+              <a:t>Em tua mão me agarrarei</a:t>
+            </a:r>
+          </a:p>
+        </p:txBody>
+      </p:sp>
+    </p:spTree>
+  </p:cSld>
+  <p:clrMapOvr>
+    <a:masterClrMapping/>
+  </p:clrMapOvr>
+</p:sld>
+</file>
+
+<file path=ppt/slides/slide30.xml><?xml version="1.0" encoding="utf-8"?>
+<p:sld xmlns:a="http://schemas.openxmlformats.org/drawingml/2006/main" xmlns:p="http://schemas.openxmlformats.org/presentationml/2006/main" xmlns:r="http://schemas.openxmlformats.org/officeDocument/2006/relationships">
+  <p:cSld>
+    <p:bg>
+      <p:bgPr>
+        <a:solidFill>
+          <a:srgbClr val="000000"/>
+        </a:solidFill>
+        <a:effectLst/>
+      </p:bgPr>
+    </p:bg>
+    <p:spTree>
+      <p:nvGrpSpPr>
+        <p:cNvPr id="1" name=""/>
+        <p:cNvGrpSpPr/>
+        <p:nvPr/>
+      </p:nvGrpSpPr>
+      <p:grpSpPr/>
+      <p:sp>
+        <p:nvSpPr>
+          <p:cNvPr id="2" name="TextBox 1"/>
+          <p:cNvSpPr txBox="1"/>
+          <p:nvPr/>
+        </p:nvSpPr>
+        <p:spPr>
+          <a:xfrm>
+            <a:off x="640080" y="2052828"/>
+            <a:ext cx="10911535" cy="731520"/>
+          </a:xfrm>
+          <a:prstGeom prst="rect">
+            <a:avLst/>
+          </a:prstGeom>
+          <a:noFill/>
+        </p:spPr>
+        <p:txBody>
+          <a:bodyPr wrap="square">
+            <a:spAutoFit/>
+          </a:bodyPr>
+          <a:lstStyle/>
+          <a:p>
+            <a:pPr algn="ctr"/>
+            <a:r>
+              <a:rPr sz="4800" b="1" i="0">
+                <a:solidFill>
+                  <a:srgbClr val="FFFFFF"/>
+                </a:solidFill>
+                <a:latin typeface="Arial"/>
+              </a:rPr>
+              <a:t/>
+            </a:r>
+          </a:p>
+        </p:txBody>
+      </p:sp>
+      <p:sp>
+        <p:nvSpPr>
+          <p:cNvPr id="3" name="TextBox 2"/>
+          <p:cNvSpPr txBox="1"/>
+          <p:nvPr/>
+        </p:nvSpPr>
+        <p:spPr>
+          <a:xfrm>
+            <a:off x="640080" y="2985516"/>
+            <a:ext cx="10911535" cy="731520"/>
+          </a:xfrm>
+          <a:prstGeom prst="rect">
+            <a:avLst/>
+          </a:prstGeom>
+          <a:noFill/>
+        </p:spPr>
+        <p:txBody>
+          <a:bodyPr wrap="square">
+            <a:spAutoFit/>
+          </a:bodyPr>
+          <a:lstStyle/>
+          <a:p>
+            <a:pPr algn="ctr"/>
+            <a:r>
+              <a:rPr sz="4800" b="1" i="0">
+                <a:solidFill>
+                  <a:srgbClr val="FFFFFF"/>
+                </a:solidFill>
+                <a:latin typeface="Arial"/>
+              </a:rPr>
+              <a:t/>
+            </a:r>
+          </a:p>
+        </p:txBody>
+      </p:sp>
+    </p:spTree>
+  </p:cSld>
+  <p:clrMapOvr>
+    <a:masterClrMapping/>
+  </p:clrMapOvr>
+</p:sld>
+</file>
+
+<file path=ppt/slides/slide31.xml><?xml version="1.0" encoding="utf-8"?>
+<p:sld xmlns:a="http://schemas.openxmlformats.org/drawingml/2006/main" xmlns:p="http://schemas.openxmlformats.org/presentationml/2006/main" xmlns:r="http://schemas.openxmlformats.org/officeDocument/2006/relationships">
+  <p:cSld>
+    <p:bg>
+      <p:bgPr>
+        <a:solidFill>
+          <a:srgbClr val="000000"/>
+        </a:solidFill>
+        <a:effectLst/>
+      </p:bgPr>
+    </p:bg>
+    <p:spTree>
+      <p:nvGrpSpPr>
+        <p:cNvPr id="1" name=""/>
+        <p:cNvGrpSpPr/>
+        <p:nvPr/>
+      </p:nvGrpSpPr>
+      <p:grpSpPr/>
+      <p:sp>
+        <p:nvSpPr>
+          <p:cNvPr id="2" name="TextBox 1"/>
+          <p:cNvSpPr txBox="1"/>
+          <p:nvPr/>
+        </p:nvSpPr>
+        <p:spPr>
+          <a:xfrm>
+            <a:off x="640080" y="2052828"/>
+            <a:ext cx="10911535" cy="731520"/>
+          </a:xfrm>
+          <a:prstGeom prst="rect">
+            <a:avLst/>
+          </a:prstGeom>
+          <a:noFill/>
+        </p:spPr>
+        <p:txBody>
+          <a:bodyPr wrap="square">
+            <a:spAutoFit/>
+          </a:bodyPr>
+          <a:lstStyle/>
+          <a:p>
+            <a:pPr algn="ctr"/>
+            <a:r>
+              <a:rPr sz="4800" b="1" i="0">
+                <a:solidFill>
+                  <a:srgbClr val="FFFFFF"/>
+                </a:solidFill>
+                <a:latin typeface="Arial"/>
+              </a:rPr>
+              <a:t/>
+            </a:r>
+          </a:p>
+        </p:txBody>
+      </p:sp>
+      <p:sp>
+        <p:nvSpPr>
+          <p:cNvPr id="3" name="TextBox 2"/>
+          <p:cNvSpPr txBox="1"/>
+          <p:nvPr/>
+        </p:nvSpPr>
+        <p:spPr>
+          <a:xfrm>
+            <a:off x="640080" y="2985516"/>
+            <a:ext cx="10911535" cy="731520"/>
+          </a:xfrm>
+          <a:prstGeom prst="rect">
+            <a:avLst/>
+          </a:prstGeom>
+          <a:noFill/>
+        </p:spPr>
+        <p:txBody>
+          <a:bodyPr wrap="square">
+            <a:spAutoFit/>
+          </a:bodyPr>
+          <a:lstStyle/>
+          <a:p>
+            <a:pPr algn="ctr"/>
+            <a:r>
+              <a:rPr sz="4800" b="1" i="0">
+                <a:solidFill>
+                  <a:srgbClr val="FFFFFF"/>
+                </a:solidFill>
+                <a:latin typeface="Arial"/>
+              </a:rPr>
+              <a:t/>
+            </a:r>
+          </a:p>
+        </p:txBody>
+      </p:sp>
+    </p:spTree>
+  </p:cSld>
+  <p:clrMapOvr>
+    <a:masterClrMapping/>
+  </p:clrMapOvr>
+</p:sld>
+</file>
+
+<file path=ppt/slides/slide32.xml><?xml version="1.0" encoding="utf-8"?>
+<p:sld xmlns:a="http://schemas.openxmlformats.org/drawingml/2006/main" xmlns:p="http://schemas.openxmlformats.org/presentationml/2006/main" xmlns:r="http://schemas.openxmlformats.org/officeDocument/2006/relationships">
+  <p:cSld>
+    <p:bg>
+      <p:bgPr>
+        <a:solidFill>
+          <a:srgbClr val="000000"/>
+        </a:solidFill>
+        <a:effectLst/>
+      </p:bgPr>
+    </p:bg>
+    <p:spTree>
+      <p:nvGrpSpPr>
+        <p:cNvPr id="1" name=""/>
+        <p:cNvGrpSpPr/>
+        <p:nvPr/>
+      </p:nvGrpSpPr>
+      <p:grpSpPr/>
+      <p:sp>
+        <p:nvSpPr>
+          <p:cNvPr id="2" name="TextBox 1"/>
+          <p:cNvSpPr txBox="1"/>
+          <p:nvPr/>
+        </p:nvSpPr>
+        <p:spPr>
+          <a:xfrm>
+            <a:off x="640080" y="2052828"/>
+            <a:ext cx="10911535" cy="731520"/>
+          </a:xfrm>
+          <a:prstGeom prst="rect">
+            <a:avLst/>
+          </a:prstGeom>
+          <a:noFill/>
+        </p:spPr>
+        <p:txBody>
+          <a:bodyPr wrap="square">
+            <a:spAutoFit/>
+          </a:bodyPr>
+          <a:lstStyle/>
+          <a:p>
+            <a:pPr algn="ctr"/>
+            <a:r>
+              <a:rPr sz="4800" b="1" i="0">
+                <a:solidFill>
+                  <a:srgbClr val="FFFFFF"/>
+                </a:solidFill>
+                <a:latin typeface="Arial"/>
+              </a:rPr>
+              <a:t/>
+            </a:r>
+          </a:p>
+        </p:txBody>
+      </p:sp>
+      <p:sp>
+        <p:nvSpPr>
+          <p:cNvPr id="3" name="TextBox 2"/>
+          <p:cNvSpPr txBox="1"/>
+          <p:nvPr/>
+        </p:nvSpPr>
+        <p:spPr>
+          <a:xfrm>
+            <a:off x="640080" y="2985516"/>
+            <a:ext cx="10911535" cy="731520"/>
+          </a:xfrm>
+          <a:prstGeom prst="rect">
+            <a:avLst/>
+          </a:prstGeom>
+          <a:noFill/>
+        </p:spPr>
+        <p:txBody>
+          <a:bodyPr wrap="square">
+            <a:spAutoFit/>
+          </a:bodyPr>
+          <a:lstStyle/>
+          <a:p>
+            <a:pPr algn="ctr"/>
+            <a:r>
+              <a:rPr sz="4800" b="1" i="0">
+                <a:solidFill>
+                  <a:srgbClr val="FFFFFF"/>
+                </a:solidFill>
+                <a:latin typeface="Arial"/>
+              </a:rPr>
+              <a:t/>
+            </a:r>
+          </a:p>
+        </p:txBody>
+      </p:sp>
+    </p:spTree>
+  </p:cSld>
+  <p:clrMapOvr>
+    <a:masterClrMapping/>
+  </p:clrMapOvr>
+</p:sld>
+</file>
+
+<file path=ppt/slides/slide33.xml><?xml version="1.0" encoding="utf-8"?>
+<p:sld xmlns:a="http://schemas.openxmlformats.org/drawingml/2006/main" xmlns:p="http://schemas.openxmlformats.org/presentationml/2006/main" xmlns:r="http://schemas.openxmlformats.org/officeDocument/2006/relationships">
+  <p:cSld>
+    <p:bg>
+      <p:bgPr>
+        <a:solidFill>
+          <a:srgbClr val="000000"/>
+        </a:solidFill>
+        <a:effectLst/>
+      </p:bgPr>
+    </p:bg>
+    <p:spTree>
+      <p:nvGrpSpPr>
+        <p:cNvPr id="1" name=""/>
+        <p:cNvGrpSpPr/>
+        <p:nvPr/>
+      </p:nvGrpSpPr>
+      <p:grpSpPr/>
+      <p:sp>
+        <p:nvSpPr>
+          <p:cNvPr id="2" name="TextBox 1"/>
+          <p:cNvSpPr txBox="1"/>
+          <p:nvPr/>
+        </p:nvSpPr>
+        <p:spPr>
+          <a:xfrm>
+            <a:off x="640080" y="2052828"/>
+            <a:ext cx="10911535" cy="731520"/>
+          </a:xfrm>
+          <a:prstGeom prst="rect">
+            <a:avLst/>
+          </a:prstGeom>
+          <a:noFill/>
+        </p:spPr>
+        <p:txBody>
+          <a:bodyPr wrap="square">
+            <a:spAutoFit/>
+          </a:bodyPr>
+          <a:lstStyle/>
+          <a:p>
+            <a:pPr algn="ctr"/>
+            <a:r>
+              <a:rPr sz="4800" b="1" i="0">
+                <a:solidFill>
+                  <a:srgbClr val="FFFFFF"/>
+                </a:solidFill>
+                <a:latin typeface="Arial"/>
+              </a:rPr>
+              <a:t/>
+            </a:r>
+          </a:p>
+        </p:txBody>
+      </p:sp>
+      <p:sp>
+        <p:nvSpPr>
+          <p:cNvPr id="3" name="TextBox 2"/>
+          <p:cNvSpPr txBox="1"/>
+          <p:nvPr/>
+        </p:nvSpPr>
+        <p:spPr>
+          <a:xfrm>
+            <a:off x="640080" y="2985516"/>
+            <a:ext cx="10911535" cy="731520"/>
+          </a:xfrm>
+          <a:prstGeom prst="rect">
+            <a:avLst/>
+          </a:prstGeom>
+          <a:noFill/>
+        </p:spPr>
+        <p:txBody>
+          <a:bodyPr wrap="square">
+            <a:spAutoFit/>
+          </a:bodyPr>
+          <a:lstStyle/>
+          <a:p>
+            <a:pPr algn="ctr"/>
+            <a:r>
+              <a:rPr sz="4800" b="1" i="0">
+                <a:solidFill>
+                  <a:srgbClr val="FFFFFF"/>
+                </a:solidFill>
+                <a:latin typeface="Arial"/>
+              </a:rPr>
+              <a:t/>
+            </a:r>
+          </a:p>
+        </p:txBody>
+      </p:sp>
+    </p:spTree>
+  </p:cSld>
+  <p:clrMapOvr>
+    <a:masterClrMapping/>
+  </p:clrMapOvr>
+</p:sld>
+</file>
+
+<file path=ppt/slides/slide34.xml><?xml version="1.0" encoding="utf-8"?>
+<p:sld xmlns:a="http://schemas.openxmlformats.org/drawingml/2006/main" xmlns:p="http://schemas.openxmlformats.org/presentationml/2006/main" xmlns:r="http://schemas.openxmlformats.org/officeDocument/2006/relationships">
+  <p:cSld>
+    <p:bg>
+      <p:bgPr>
+        <a:solidFill>
+          <a:srgbClr val="000000"/>
+        </a:solidFill>
+        <a:effectLst/>
+      </p:bgPr>
+    </p:bg>
+    <p:spTree>
+      <p:nvGrpSpPr>
+        <p:cNvPr id="1" name=""/>
+        <p:cNvGrpSpPr/>
+        <p:nvPr/>
+      </p:nvGrpSpPr>
+      <p:grpSpPr/>
+      <p:sp>
+        <p:nvSpPr>
+          <p:cNvPr id="2" name="TextBox 1"/>
+          <p:cNvSpPr txBox="1"/>
+          <p:nvPr/>
+        </p:nvSpPr>
+        <p:spPr>
+          <a:xfrm>
+            <a:off x="640080" y="2702052"/>
+            <a:ext cx="10911535" cy="731520"/>
+          </a:xfrm>
+          <a:prstGeom prst="rect">
+            <a:avLst/>
+          </a:prstGeom>
+          <a:noFill/>
+        </p:spPr>
+        <p:txBody>
+          <a:bodyPr wrap="square">
+            <a:spAutoFit/>
+          </a:bodyPr>
+          <a:lstStyle/>
+          <a:p>
+            <a:pPr algn="ctr"/>
+            <a:r>
+              <a:rPr sz="4800" b="1" i="0">
+                <a:solidFill>
+                  <a:srgbClr val="FFFFFF"/>
+                </a:solidFill>
+                <a:latin typeface="Arial"/>
+              </a:rPr>
+              <a:t/>
+            </a:r>
+          </a:p>
+        </p:txBody>
+      </p:sp>
+    </p:spTree>
+  </p:cSld>
+  <p:clrMapOvr>
+    <a:masterClrMapping/>
+  </p:clrMapOvr>
+</p:sld>
+</file>
+
+<file path=ppt/slides/slide35.xml><?xml version="1.0" encoding="utf-8"?>
+<p:sld xmlns:a="http://schemas.openxmlformats.org/drawingml/2006/main" xmlns:p="http://schemas.openxmlformats.org/presentationml/2006/main" xmlns:r="http://schemas.openxmlformats.org/officeDocument/2006/relationships">
+  <p:cSld>
+    <p:bg>
+      <p:bgPr>
+        <a:solidFill>
+          <a:srgbClr val="000000"/>
+        </a:solidFill>
+        <a:effectLst/>
+      </p:bgPr>
+    </p:bg>
+    <p:spTree>
+      <p:nvGrpSpPr>
+        <p:cNvPr id="1" name=""/>
+        <p:cNvGrpSpPr/>
+        <p:nvPr/>
+      </p:nvGrpSpPr>
+      <p:grpSpPr/>
+      <p:sp>
+        <p:nvSpPr>
+          <p:cNvPr id="2" name="TextBox 1"/>
+          <p:cNvSpPr txBox="1"/>
+          <p:nvPr/>
+        </p:nvSpPr>
+        <p:spPr>
+          <a:xfrm>
+            <a:off x="640080" y="2500884"/>
+            <a:ext cx="10911535" cy="731520"/>
+          </a:xfrm>
+          <a:prstGeom prst="rect">
+            <a:avLst/>
+          </a:prstGeom>
+          <a:noFill/>
+        </p:spPr>
+        <p:txBody>
+          <a:bodyPr wrap="square">
+            <a:spAutoFit/>
+          </a:bodyPr>
+          <a:lstStyle/>
+          <a:p>
+            <a:pPr algn="ctr"/>
+            <a:r>
+              <a:rPr sz="4800" b="1" i="0">
+                <a:solidFill>
+                  <a:srgbClr val="FFFFFF"/>
+                </a:solidFill>
+                <a:latin typeface="Arial"/>
+              </a:rPr>
+              <a:t>栄光あれ　父なる主に</a:t>
+            </a:r>
+          </a:p>
+        </p:txBody>
+      </p:sp>
+      <p:sp>
+        <p:nvSpPr>
+          <p:cNvPr id="3" name="TextBox 2"/>
+          <p:cNvSpPr txBox="1"/>
+          <p:nvPr/>
+        </p:nvSpPr>
+        <p:spPr>
+          <a:xfrm>
+            <a:off x="640080" y="3268980"/>
+            <a:ext cx="10911535" cy="365760"/>
           </a:xfrm>
           <a:prstGeom prst="rect">
             <a:avLst/>
@@ -3635,11 +5966,11 @@
             <a:r>
               <a:rPr sz="2400" b="0" i="1">
                 <a:solidFill>
-                  <a:srgbClr val="B4B4B4"/>
-                </a:solidFill>
-                <a:latin typeface="Arial"/>
-              </a:rPr>
-              <a:t>shu iesu koso kami  warera no tsumi seoi</a:t>
+                  <a:srgbClr val="AAAAAA"/>
+                </a:solidFill>
+                <a:latin typeface="Arial"/>
+              </a:rPr>
+              <a:t>eikou are chichi naru omoni</a:t>
             </a:r>
           </a:p>
         </p:txBody>
@@ -3652,8 +5983,8 @@
         </p:nvSpPr>
         <p:spPr>
           <a:xfrm>
-            <a:off x="594360" y="2980944"/>
-            <a:ext cx="11002975" cy="347472"/>
+            <a:off x="640080" y="4046220"/>
+            <a:ext cx="10911535" cy="310896"/>
           </a:xfrm>
           <a:prstGeom prst="rect">
             <a:avLst/>
@@ -3670,7 +6001,68 @@
             <a:r>
               <a:rPr sz="2000" b="0" i="1">
                 <a:solidFill>
-                  <a:srgbClr val="8C8C8C"/>
+                  <a:srgbClr val="828282"/>
+                </a:solidFill>
+                <a:latin typeface="Arial"/>
+              </a:rPr>
+              <a:t>Divina graça me alcançou</a:t>
+            </a:r>
+          </a:p>
+        </p:txBody>
+      </p:sp>
+    </p:spTree>
+  </p:cSld>
+  <p:clrMapOvr>
+    <a:masterClrMapping/>
+  </p:clrMapOvr>
+</p:sld>
+</file>
+
+<file path=ppt/slides/slide36.xml><?xml version="1.0" encoding="utf-8"?>
+<p:sld xmlns:a="http://schemas.openxmlformats.org/drawingml/2006/main" xmlns:p="http://schemas.openxmlformats.org/presentationml/2006/main" xmlns:r="http://schemas.openxmlformats.org/officeDocument/2006/relationships">
+  <p:cSld>
+    <p:bg>
+      <p:bgPr>
+        <a:solidFill>
+          <a:srgbClr val="000000"/>
+        </a:solidFill>
+        <a:effectLst/>
+      </p:bgPr>
+    </p:bg>
+    <p:spTree>
+      <p:nvGrpSpPr>
+        <p:cNvPr id="1" name=""/>
+        <p:cNvGrpSpPr/>
+        <p:nvPr/>
+      </p:nvGrpSpPr>
+      <p:grpSpPr/>
+      <p:sp>
+        <p:nvSpPr>
+          <p:cNvPr id="2" name="TextBox 1"/>
+          <p:cNvSpPr txBox="1"/>
+          <p:nvPr/>
+        </p:nvSpPr>
+        <p:spPr>
+          <a:xfrm>
+            <a:off x="640080" y="2702052"/>
+            <a:ext cx="10911535" cy="731520"/>
+          </a:xfrm>
+          <a:prstGeom prst="rect">
+            <a:avLst/>
+          </a:prstGeom>
+          <a:noFill/>
+        </p:spPr>
+        <p:txBody>
+          <a:bodyPr wrap="square">
+            <a:spAutoFit/>
+          </a:bodyPr>
+          <a:lstStyle/>
+          <a:p>
+            <a:pPr algn="ctr"/>
+            <a:r>
+              <a:rPr sz="4800" b="1" i="0">
+                <a:solidFill>
+                  <a:srgbClr val="FFFFFF"/>
                 </a:solidFill>
                 <a:latin typeface="Arial"/>
               </a:rPr>
@@ -3679,51 +6071,77 @@
           </a:p>
         </p:txBody>
       </p:sp>
-      <p:sp>
-        <p:nvSpPr>
-          <p:cNvPr id="5" name="TextBox 4"/>
-          <p:cNvSpPr txBox="1"/>
-          <p:nvPr/>
-        </p:nvSpPr>
-        <p:spPr>
-          <a:xfrm>
-            <a:off x="594360" y="3529584"/>
-            <a:ext cx="11002975" cy="685800"/>
-          </a:xfrm>
-          <a:prstGeom prst="rect">
-            <a:avLst/>
-          </a:prstGeom>
-          <a:noFill/>
-        </p:spPr>
-        <p:txBody>
-          <a:bodyPr wrap="square">
-            <a:spAutoFit/>
-          </a:bodyPr>
-          <a:lstStyle/>
-          <a:p>
-            <a:pPr algn="ctr"/>
-            <a:r>
-              <a:rPr sz="4400" b="1" i="0">
+    </p:spTree>
+  </p:cSld>
+  <p:clrMapOvr>
+    <a:masterClrMapping/>
+  </p:clrMapOvr>
+</p:sld>
+</file>
+
+<file path=ppt/slides/slide37.xml><?xml version="1.0" encoding="utf-8"?>
+<p:sld xmlns:a="http://schemas.openxmlformats.org/drawingml/2006/main" xmlns:p="http://schemas.openxmlformats.org/presentationml/2006/main" xmlns:r="http://schemas.openxmlformats.org/officeDocument/2006/relationships">
+  <p:cSld>
+    <p:bg>
+      <p:bgPr>
+        <a:solidFill>
+          <a:srgbClr val="000000"/>
+        </a:solidFill>
+        <a:effectLst/>
+      </p:bgPr>
+    </p:bg>
+    <p:spTree>
+      <p:nvGrpSpPr>
+        <p:cNvPr id="1" name=""/>
+        <p:cNvGrpSpPr/>
+        <p:nvPr/>
+      </p:nvGrpSpPr>
+      <p:grpSpPr/>
+      <p:sp>
+        <p:nvSpPr>
+          <p:cNvPr id="2" name="TextBox 1"/>
+          <p:cNvSpPr txBox="1"/>
+          <p:nvPr/>
+        </p:nvSpPr>
+        <p:spPr>
+          <a:xfrm>
+            <a:off x="640080" y="2500884"/>
+            <a:ext cx="10911535" cy="731520"/>
+          </a:xfrm>
+          <a:prstGeom prst="rect">
+            <a:avLst/>
+          </a:prstGeom>
+          <a:noFill/>
+        </p:spPr>
+        <p:txBody>
+          <a:bodyPr wrap="square">
+            <a:spAutoFit/>
+          </a:bodyPr>
+          <a:lstStyle/>
+          <a:p>
+            <a:pPr algn="ctr"/>
+            <a:r>
+              <a:rPr sz="4800" b="1" i="0">
                 <a:solidFill>
                   <a:srgbClr val="FFFFFF"/>
                 </a:solidFill>
                 <a:latin typeface="Arial"/>
               </a:rPr>
-              <a:t>あがなう 勝利の主</a:t>
-            </a:r>
-          </a:p>
-        </p:txBody>
-      </p:sp>
-      <p:sp>
-        <p:nvSpPr>
-          <p:cNvPr id="6" name="TextBox 5"/>
-          <p:cNvSpPr txBox="1"/>
-          <p:nvPr/>
-        </p:nvSpPr>
-        <p:spPr>
-          <a:xfrm>
-            <a:off x="594360" y="4251960"/>
-            <a:ext cx="11002975" cy="384048"/>
+              <a:t>御子なるイエスに</a:t>
+            </a:r>
+          </a:p>
+        </p:txBody>
+      </p:sp>
+      <p:sp>
+        <p:nvSpPr>
+          <p:cNvPr id="3" name="TextBox 2"/>
+          <p:cNvSpPr txBox="1"/>
+          <p:nvPr/>
+        </p:nvSpPr>
+        <p:spPr>
+          <a:xfrm>
+            <a:off x="640080" y="3268980"/>
+            <a:ext cx="10911535" cy="365760"/>
           </a:xfrm>
           <a:prstGeom prst="rect">
             <a:avLst/>
@@ -3740,25 +6158,25 @@
             <a:r>
               <a:rPr sz="2400" b="0" i="1">
                 <a:solidFill>
-                  <a:srgbClr val="B4B4B4"/>
-                </a:solidFill>
-                <a:latin typeface="Arial"/>
-              </a:rPr>
-              <a:t>aganau shori no Shu</a:t>
-            </a:r>
-          </a:p>
-        </p:txBody>
-      </p:sp>
-      <p:sp>
-        <p:nvSpPr>
-          <p:cNvPr id="7" name="TextBox 6"/>
-          <p:cNvSpPr txBox="1"/>
-          <p:nvPr/>
-        </p:nvSpPr>
-        <p:spPr>
-          <a:xfrm>
-            <a:off x="594360" y="4672584"/>
-            <a:ext cx="11002975" cy="347472"/>
+                  <a:srgbClr val="AAAAAA"/>
+                </a:solidFill>
+                <a:latin typeface="Arial"/>
+              </a:rPr>
+              <a:t>miko naru iesu ni</a:t>
+            </a:r>
+          </a:p>
+        </p:txBody>
+      </p:sp>
+      <p:sp>
+        <p:nvSpPr>
+          <p:cNvPr id="4" name="TextBox 3"/>
+          <p:cNvSpPr txBox="1"/>
+          <p:nvPr/>
+        </p:nvSpPr>
+        <p:spPr>
+          <a:xfrm>
+            <a:off x="640080" y="4046220"/>
+            <a:ext cx="10911535" cy="310896"/>
           </a:xfrm>
           <a:prstGeom prst="rect">
             <a:avLst/>
@@ -3775,11 +6193,203 @@
             <a:r>
               <a:rPr sz="2000" b="0" i="1">
                 <a:solidFill>
-                  <a:srgbClr val="8C8C8C"/>
+                  <a:srgbClr val="828282"/>
+                </a:solidFill>
+                <a:latin typeface="Arial"/>
+              </a:rPr>
+              <a:t>Divina graça me alcançou</a:t>
+            </a:r>
+          </a:p>
+        </p:txBody>
+      </p:sp>
+    </p:spTree>
+  </p:cSld>
+  <p:clrMapOvr>
+    <a:masterClrMapping/>
+  </p:clrMapOvr>
+</p:sld>
+</file>
+
+<file path=ppt/slides/slide38.xml><?xml version="1.0" encoding="utf-8"?>
+<p:sld xmlns:a="http://schemas.openxmlformats.org/drawingml/2006/main" xmlns:p="http://schemas.openxmlformats.org/presentationml/2006/main" xmlns:r="http://schemas.openxmlformats.org/officeDocument/2006/relationships">
+  <p:cSld>
+    <p:bg>
+      <p:bgPr>
+        <a:solidFill>
+          <a:srgbClr val="000000"/>
+        </a:solidFill>
+        <a:effectLst/>
+      </p:bgPr>
+    </p:bg>
+    <p:spTree>
+      <p:nvGrpSpPr>
+        <p:cNvPr id="1" name=""/>
+        <p:cNvGrpSpPr/>
+        <p:nvPr/>
+      </p:nvGrpSpPr>
+      <p:grpSpPr/>
+      <p:sp>
+        <p:nvSpPr>
+          <p:cNvPr id="2" name="TextBox 1"/>
+          <p:cNvSpPr txBox="1"/>
+          <p:nvPr/>
+        </p:nvSpPr>
+        <p:spPr>
+          <a:xfrm>
+            <a:off x="640080" y="2702052"/>
+            <a:ext cx="10911535" cy="731520"/>
+          </a:xfrm>
+          <a:prstGeom prst="rect">
+            <a:avLst/>
+          </a:prstGeom>
+          <a:noFill/>
+        </p:spPr>
+        <p:txBody>
+          <a:bodyPr wrap="square">
+            <a:spAutoFit/>
+          </a:bodyPr>
+          <a:lstStyle/>
+          <a:p>
+            <a:pPr algn="ctr"/>
+            <a:r>
+              <a:rPr sz="4800" b="1" i="0">
+                <a:solidFill>
+                  <a:srgbClr val="FFFFFF"/>
                 </a:solidFill>
                 <a:latin typeface="Arial"/>
               </a:rPr>
               <a:t/>
+            </a:r>
+          </a:p>
+        </p:txBody>
+      </p:sp>
+    </p:spTree>
+  </p:cSld>
+  <p:clrMapOvr>
+    <a:masterClrMapping/>
+  </p:clrMapOvr>
+</p:sld>
+</file>
+
+<file path=ppt/slides/slide39.xml><?xml version="1.0" encoding="utf-8"?>
+<p:sld xmlns:a="http://schemas.openxmlformats.org/drawingml/2006/main" xmlns:p="http://schemas.openxmlformats.org/presentationml/2006/main" xmlns:r="http://schemas.openxmlformats.org/officeDocument/2006/relationships">
+  <p:cSld>
+    <p:bg>
+      <p:bgPr>
+        <a:solidFill>
+          <a:srgbClr val="000000"/>
+        </a:solidFill>
+        <a:effectLst/>
+      </p:bgPr>
+    </p:bg>
+    <p:spTree>
+      <p:nvGrpSpPr>
+        <p:cNvPr id="1" name=""/>
+        <p:cNvGrpSpPr/>
+        <p:nvPr/>
+      </p:nvGrpSpPr>
+      <p:grpSpPr/>
+      <p:sp>
+        <p:nvSpPr>
+          <p:cNvPr id="2" name="TextBox 1"/>
+          <p:cNvSpPr txBox="1"/>
+          <p:nvPr/>
+        </p:nvSpPr>
+        <p:spPr>
+          <a:xfrm>
+            <a:off x="640080" y="2500884"/>
+            <a:ext cx="10911535" cy="731520"/>
+          </a:xfrm>
+          <a:prstGeom prst="rect">
+            <a:avLst/>
+          </a:prstGeom>
+          <a:noFill/>
+        </p:spPr>
+        <p:txBody>
+          <a:bodyPr wrap="square">
+            <a:spAutoFit/>
+          </a:bodyPr>
+          <a:lstStyle/>
+          <a:p>
+            <a:pPr algn="ctr"/>
+            <a:r>
+              <a:rPr sz="4800" b="1" i="0">
+                <a:solidFill>
+                  <a:srgbClr val="FFFFFF"/>
+                </a:solidFill>
+                <a:latin typeface="Arial"/>
+              </a:rPr>
+              <a:t>栄光あれ　主の御霊に</a:t>
+            </a:r>
+          </a:p>
+        </p:txBody>
+      </p:sp>
+      <p:sp>
+        <p:nvSpPr>
+          <p:cNvPr id="3" name="TextBox 2"/>
+          <p:cNvSpPr txBox="1"/>
+          <p:nvPr/>
+        </p:nvSpPr>
+        <p:spPr>
+          <a:xfrm>
+            <a:off x="640080" y="3268980"/>
+            <a:ext cx="10911535" cy="365760"/>
+          </a:xfrm>
+          <a:prstGeom prst="rect">
+            <a:avLst/>
+          </a:prstGeom>
+          <a:noFill/>
+        </p:spPr>
+        <p:txBody>
+          <a:bodyPr wrap="square">
+            <a:spAutoFit/>
+          </a:bodyPr>
+          <a:lstStyle/>
+          <a:p>
+            <a:pPr algn="ctr"/>
+            <a:r>
+              <a:rPr sz="2400" b="0" i="1">
+                <a:solidFill>
+                  <a:srgbClr val="AAAAAA"/>
+                </a:solidFill>
+                <a:latin typeface="Arial"/>
+              </a:rPr>
+              <a:t>eikou are omono goryou ni</a:t>
+            </a:r>
+          </a:p>
+        </p:txBody>
+      </p:sp>
+      <p:sp>
+        <p:nvSpPr>
+          <p:cNvPr id="4" name="TextBox 3"/>
+          <p:cNvSpPr txBox="1"/>
+          <p:nvPr/>
+        </p:nvSpPr>
+        <p:spPr>
+          <a:xfrm>
+            <a:off x="640080" y="4046220"/>
+            <a:ext cx="10911535" cy="310896"/>
+          </a:xfrm>
+          <a:prstGeom prst="rect">
+            <a:avLst/>
+          </a:prstGeom>
+          <a:noFill/>
+        </p:spPr>
+        <p:txBody>
+          <a:bodyPr wrap="square">
+            <a:spAutoFit/>
+          </a:bodyPr>
+          <a:lstStyle/>
+          <a:p>
+            <a:pPr algn="ctr"/>
+            <a:r>
+              <a:rPr sz="2000" b="0" i="1">
+                <a:solidFill>
+                  <a:srgbClr val="828282"/>
+                </a:solidFill>
+                <a:latin typeface="Arial"/>
+              </a:rPr>
+              <a:t>Divina graça me alcançou</a:t>
             </a:r>
           </a:p>
         </p:txBody>
@@ -3818,28 +6428,185 @@
         </p:nvSpPr>
         <p:spPr>
           <a:xfrm>
-            <a:off x="594360" y="2683764"/>
-            <a:ext cx="11002975" cy="685800"/>
-          </a:xfrm>
-          <a:prstGeom prst="rect">
-            <a:avLst/>
-          </a:prstGeom>
-          <a:noFill/>
-        </p:spPr>
-        <p:txBody>
-          <a:bodyPr wrap="square">
-            <a:spAutoFit/>
-          </a:bodyPr>
-          <a:lstStyle/>
-          <a:p>
-            <a:pPr algn="ctr"/>
-            <a:r>
-              <a:rPr sz="4400" b="1" i="0">
+            <a:off x="640080" y="2052828"/>
+            <a:ext cx="10911535" cy="731520"/>
+          </a:xfrm>
+          <a:prstGeom prst="rect">
+            <a:avLst/>
+          </a:prstGeom>
+          <a:noFill/>
+        </p:spPr>
+        <p:txBody>
+          <a:bodyPr wrap="square">
+            <a:spAutoFit/>
+          </a:bodyPr>
+          <a:lstStyle/>
+          <a:p>
+            <a:pPr algn="ctr"/>
+            <a:r>
+              <a:rPr sz="4800" b="1" i="0">
                 <a:solidFill>
                   <a:srgbClr val="FFFFFF"/>
                 </a:solidFill>
                 <a:latin typeface="Arial"/>
               </a:rPr>
+              <a:t>Contemplarei o nascer do sol</a:t>
+            </a:r>
+          </a:p>
+        </p:txBody>
+      </p:sp>
+      <p:sp>
+        <p:nvSpPr>
+          <p:cNvPr id="3" name="TextBox 2"/>
+          <p:cNvSpPr txBox="1"/>
+          <p:nvPr/>
+        </p:nvSpPr>
+        <p:spPr>
+          <a:xfrm>
+            <a:off x="640080" y="2985516"/>
+            <a:ext cx="10911535" cy="731520"/>
+          </a:xfrm>
+          <a:prstGeom prst="rect">
+            <a:avLst/>
+          </a:prstGeom>
+          <a:noFill/>
+        </p:spPr>
+        <p:txBody>
+          <a:bodyPr wrap="square">
+            <a:spAutoFit/>
+          </a:bodyPr>
+          <a:lstStyle/>
+          <a:p>
+            <a:pPr algn="ctr"/>
+            <a:r>
+              <a:rPr sz="4800" b="1" i="0">
+                <a:solidFill>
+                  <a:srgbClr val="FFFFFF"/>
+                </a:solidFill>
+                <a:latin typeface="Arial"/>
+              </a:rPr>
+              <a:t>Tu és minha salvação, Senhor</a:t>
+            </a:r>
+          </a:p>
+        </p:txBody>
+      </p:sp>
+    </p:spTree>
+  </p:cSld>
+  <p:clrMapOvr>
+    <a:masterClrMapping/>
+  </p:clrMapOvr>
+</p:sld>
+</file>
+
+<file path=ppt/slides/slide40.xml><?xml version="1.0" encoding="utf-8"?>
+<p:sld xmlns:a="http://schemas.openxmlformats.org/drawingml/2006/main" xmlns:p="http://schemas.openxmlformats.org/presentationml/2006/main" xmlns:r="http://schemas.openxmlformats.org/officeDocument/2006/relationships">
+  <p:cSld>
+    <p:bg>
+      <p:bgPr>
+        <a:solidFill>
+          <a:srgbClr val="000000"/>
+        </a:solidFill>
+        <a:effectLst/>
+      </p:bgPr>
+    </p:bg>
+    <p:spTree>
+      <p:nvGrpSpPr>
+        <p:cNvPr id="1" name=""/>
+        <p:cNvGrpSpPr/>
+        <p:nvPr/>
+      </p:nvGrpSpPr>
+      <p:grpSpPr/>
+      <p:sp>
+        <p:nvSpPr>
+          <p:cNvPr id="2" name="TextBox 1"/>
+          <p:cNvSpPr txBox="1"/>
+          <p:nvPr/>
+        </p:nvSpPr>
+        <p:spPr>
+          <a:xfrm>
+            <a:off x="640080" y="2702052"/>
+            <a:ext cx="10911535" cy="731520"/>
+          </a:xfrm>
+          <a:prstGeom prst="rect">
+            <a:avLst/>
+          </a:prstGeom>
+          <a:noFill/>
+        </p:spPr>
+        <p:txBody>
+          <a:bodyPr wrap="square">
+            <a:spAutoFit/>
+          </a:bodyPr>
+          <a:lstStyle/>
+          <a:p>
+            <a:pPr algn="ctr"/>
+            <a:r>
+              <a:rPr sz="4800" b="1" i="0">
+                <a:solidFill>
+                  <a:srgbClr val="FFFFFF"/>
+                </a:solidFill>
+                <a:latin typeface="Arial"/>
+              </a:rPr>
+              <a:t/>
+            </a:r>
+          </a:p>
+        </p:txBody>
+      </p:sp>
+    </p:spTree>
+  </p:cSld>
+  <p:clrMapOvr>
+    <a:masterClrMapping/>
+  </p:clrMapOvr>
+</p:sld>
+</file>
+
+<file path=ppt/slides/slide41.xml><?xml version="1.0" encoding="utf-8"?>
+<p:sld xmlns:a="http://schemas.openxmlformats.org/drawingml/2006/main" xmlns:p="http://schemas.openxmlformats.org/presentationml/2006/main" xmlns:r="http://schemas.openxmlformats.org/officeDocument/2006/relationships">
+  <p:cSld>
+    <p:bg>
+      <p:bgPr>
+        <a:solidFill>
+          <a:srgbClr val="000000"/>
+        </a:solidFill>
+        <a:effectLst/>
+      </p:bgPr>
+    </p:bg>
+    <p:spTree>
+      <p:nvGrpSpPr>
+        <p:cNvPr id="1" name=""/>
+        <p:cNvGrpSpPr/>
+        <p:nvPr/>
+      </p:nvGrpSpPr>
+      <p:grpSpPr/>
+      <p:sp>
+        <p:nvSpPr>
+          <p:cNvPr id="2" name="TextBox 1"/>
+          <p:cNvSpPr txBox="1"/>
+          <p:nvPr/>
+        </p:nvSpPr>
+        <p:spPr>
+          <a:xfrm>
+            <a:off x="640080" y="2500884"/>
+            <a:ext cx="10911535" cy="731520"/>
+          </a:xfrm>
+          <a:prstGeom prst="rect">
+            <a:avLst/>
+          </a:prstGeom>
+          <a:noFill/>
+        </p:spPr>
+        <p:txBody>
+          <a:bodyPr wrap="square">
+            <a:spAutoFit/>
+          </a:bodyPr>
+          <a:lstStyle/>
+          <a:p>
+            <a:pPr algn="ctr"/>
+            <a:r>
+              <a:rPr sz="4800" b="1" i="0">
+                <a:solidFill>
+                  <a:srgbClr val="FFFFFF"/>
+                </a:solidFill>
+                <a:latin typeface="Arial"/>
+              </a:rPr>
               <a:t>主こそ我が救い</a:t>
             </a:r>
           </a:p>
@@ -3853,8 +6620,8 @@
         </p:nvSpPr>
         <p:spPr>
           <a:xfrm>
-            <a:off x="594360" y="3406140"/>
-            <a:ext cx="11002975" cy="384048"/>
+            <a:off x="640080" y="3268980"/>
+            <a:ext cx="10911535" cy="365760"/>
           </a:xfrm>
           <a:prstGeom prst="rect">
             <a:avLst/>
@@ -3871,11 +6638,11 @@
             <a:r>
               <a:rPr sz="2400" b="0" i="1">
                 <a:solidFill>
-                  <a:srgbClr val="B4B4B4"/>
-                </a:solidFill>
-                <a:latin typeface="Arial"/>
-              </a:rPr>
-              <a:t>Shu koso waga sukui</a:t>
+                  <a:srgbClr val="AAAAAA"/>
+                </a:solidFill>
+                <a:latin typeface="Arial"/>
+              </a:rPr>
+              <a:t>shu koso waga sukui</a:t>
             </a:r>
           </a:p>
         </p:txBody>
@@ -3888,8 +6655,8 @@
         </p:nvSpPr>
         <p:spPr>
           <a:xfrm>
-            <a:off x="594360" y="3826764"/>
-            <a:ext cx="11002975" cy="347472"/>
+            <a:off x="640080" y="4046220"/>
+            <a:ext cx="10911535" cy="310896"/>
           </a:xfrm>
           <a:prstGeom prst="rect">
             <a:avLst/>
@@ -3906,11 +6673,814 @@
             <a:r>
               <a:rPr sz="2000" b="0" i="1">
                 <a:solidFill>
-                  <a:srgbClr val="8C8C8C"/>
+                  <a:srgbClr val="828282"/>
+                </a:solidFill>
+                <a:latin typeface="Arial"/>
+              </a:rPr>
+              <a:t>Divina graça me alcançou</a:t>
+            </a:r>
+          </a:p>
+        </p:txBody>
+      </p:sp>
+    </p:spTree>
+  </p:cSld>
+  <p:clrMapOvr>
+    <a:masterClrMapping/>
+  </p:clrMapOvr>
+</p:sld>
+</file>
+
+<file path=ppt/slides/slide42.xml><?xml version="1.0" encoding="utf-8"?>
+<p:sld xmlns:a="http://schemas.openxmlformats.org/drawingml/2006/main" xmlns:p="http://schemas.openxmlformats.org/presentationml/2006/main" xmlns:r="http://schemas.openxmlformats.org/officeDocument/2006/relationships">
+  <p:cSld>
+    <p:bg>
+      <p:bgPr>
+        <a:solidFill>
+          <a:srgbClr val="000000"/>
+        </a:solidFill>
+        <a:effectLst/>
+      </p:bgPr>
+    </p:bg>
+    <p:spTree>
+      <p:nvGrpSpPr>
+        <p:cNvPr id="1" name=""/>
+        <p:cNvGrpSpPr/>
+        <p:nvPr/>
+      </p:nvGrpSpPr>
+      <p:grpSpPr/>
+      <p:sp>
+        <p:nvSpPr>
+          <p:cNvPr id="2" name="TextBox 1"/>
+          <p:cNvSpPr txBox="1"/>
+          <p:nvPr/>
+        </p:nvSpPr>
+        <p:spPr>
+          <a:xfrm>
+            <a:off x="640080" y="2052828"/>
+            <a:ext cx="10911535" cy="731520"/>
+          </a:xfrm>
+          <a:prstGeom prst="rect">
+            <a:avLst/>
+          </a:prstGeom>
+          <a:noFill/>
+        </p:spPr>
+        <p:txBody>
+          <a:bodyPr wrap="square">
+            <a:spAutoFit/>
+          </a:bodyPr>
+          <a:lstStyle/>
+          <a:p>
+            <a:pPr algn="ctr"/>
+            <a:r>
+              <a:rPr sz="4800" b="1" i="0">
+                <a:solidFill>
+                  <a:srgbClr val="FFFFFF"/>
                 </a:solidFill>
                 <a:latin typeface="Arial"/>
               </a:rPr>
               <a:t/>
+            </a:r>
+          </a:p>
+        </p:txBody>
+      </p:sp>
+      <p:sp>
+        <p:nvSpPr>
+          <p:cNvPr id="3" name="TextBox 2"/>
+          <p:cNvSpPr txBox="1"/>
+          <p:nvPr/>
+        </p:nvSpPr>
+        <p:spPr>
+          <a:xfrm>
+            <a:off x="640080" y="2985516"/>
+            <a:ext cx="10911535" cy="731520"/>
+          </a:xfrm>
+          <a:prstGeom prst="rect">
+            <a:avLst/>
+          </a:prstGeom>
+          <a:noFill/>
+        </p:spPr>
+        <p:txBody>
+          <a:bodyPr wrap="square">
+            <a:spAutoFit/>
+          </a:bodyPr>
+          <a:lstStyle/>
+          <a:p>
+            <a:pPr algn="ctr"/>
+            <a:r>
+              <a:rPr sz="4800" b="1" i="0">
+                <a:solidFill>
+                  <a:srgbClr val="FFFFFF"/>
+                </a:solidFill>
+                <a:latin typeface="Arial"/>
+              </a:rPr>
+              <a:t/>
+            </a:r>
+          </a:p>
+        </p:txBody>
+      </p:sp>
+    </p:spTree>
+  </p:cSld>
+  <p:clrMapOvr>
+    <a:masterClrMapping/>
+  </p:clrMapOvr>
+</p:sld>
+</file>
+
+<file path=ppt/slides/slide43.xml><?xml version="1.0" encoding="utf-8"?>
+<p:sld xmlns:a="http://schemas.openxmlformats.org/drawingml/2006/main" xmlns:p="http://schemas.openxmlformats.org/presentationml/2006/main" xmlns:r="http://schemas.openxmlformats.org/officeDocument/2006/relationships">
+  <p:cSld>
+    <p:bg>
+      <p:bgPr>
+        <a:solidFill>
+          <a:srgbClr val="000000"/>
+        </a:solidFill>
+        <a:effectLst/>
+      </p:bgPr>
+    </p:bg>
+    <p:spTree>
+      <p:nvGrpSpPr>
+        <p:cNvPr id="1" name=""/>
+        <p:cNvGrpSpPr/>
+        <p:nvPr/>
+      </p:nvGrpSpPr>
+      <p:grpSpPr/>
+      <p:sp>
+        <p:nvSpPr>
+          <p:cNvPr id="2" name="TextBox 1"/>
+          <p:cNvSpPr txBox="1"/>
+          <p:nvPr/>
+        </p:nvSpPr>
+        <p:spPr>
+          <a:xfrm>
+            <a:off x="640080" y="2500884"/>
+            <a:ext cx="10911535" cy="731520"/>
+          </a:xfrm>
+          <a:prstGeom prst="rect">
+            <a:avLst/>
+          </a:prstGeom>
+          <a:noFill/>
+        </p:spPr>
+        <p:txBody>
+          <a:bodyPr wrap="square">
+            <a:spAutoFit/>
+          </a:bodyPr>
+          <a:lstStyle/>
+          <a:p>
+            <a:pPr algn="ctr"/>
+            <a:r>
+              <a:rPr sz="4800" b="1" i="0">
+                <a:solidFill>
+                  <a:srgbClr val="FFFFFF"/>
+                </a:solidFill>
+                <a:latin typeface="Arial"/>
+              </a:rPr>
+              <a:t>主イエスこそ神</a:t>
+            </a:r>
+          </a:p>
+        </p:txBody>
+      </p:sp>
+      <p:sp>
+        <p:nvSpPr>
+          <p:cNvPr id="3" name="TextBox 2"/>
+          <p:cNvSpPr txBox="1"/>
+          <p:nvPr/>
+        </p:nvSpPr>
+        <p:spPr>
+          <a:xfrm>
+            <a:off x="640080" y="3268980"/>
+            <a:ext cx="10911535" cy="365760"/>
+          </a:xfrm>
+          <a:prstGeom prst="rect">
+            <a:avLst/>
+          </a:prstGeom>
+          <a:noFill/>
+        </p:spPr>
+        <p:txBody>
+          <a:bodyPr wrap="square">
+            <a:spAutoFit/>
+          </a:bodyPr>
+          <a:lstStyle/>
+          <a:p>
+            <a:pPr algn="ctr"/>
+            <a:r>
+              <a:rPr sz="2400" b="0" i="1">
+                <a:solidFill>
+                  <a:srgbClr val="AAAAAA"/>
+                </a:solidFill>
+                <a:latin typeface="Arial"/>
+              </a:rPr>
+              <a:t>shu iesu koso kami</a:t>
+            </a:r>
+          </a:p>
+        </p:txBody>
+      </p:sp>
+      <p:sp>
+        <p:nvSpPr>
+          <p:cNvPr id="4" name="TextBox 3"/>
+          <p:cNvSpPr txBox="1"/>
+          <p:nvPr/>
+        </p:nvSpPr>
+        <p:spPr>
+          <a:xfrm>
+            <a:off x="640080" y="4046220"/>
+            <a:ext cx="10911535" cy="310896"/>
+          </a:xfrm>
+          <a:prstGeom prst="rect">
+            <a:avLst/>
+          </a:prstGeom>
+          <a:noFill/>
+        </p:spPr>
+        <p:txBody>
+          <a:bodyPr wrap="square">
+            <a:spAutoFit/>
+          </a:bodyPr>
+          <a:lstStyle/>
+          <a:p>
+            <a:pPr algn="ctr"/>
+            <a:r>
+              <a:rPr sz="2000" b="0" i="1">
+                <a:solidFill>
+                  <a:srgbClr val="828282"/>
+                </a:solidFill>
+                <a:latin typeface="Arial"/>
+              </a:rPr>
+              <a:t>Divina graça me alcançou</a:t>
+            </a:r>
+          </a:p>
+        </p:txBody>
+      </p:sp>
+    </p:spTree>
+  </p:cSld>
+  <p:clrMapOvr>
+    <a:masterClrMapping/>
+  </p:clrMapOvr>
+</p:sld>
+</file>
+
+<file path=ppt/slides/slide44.xml><?xml version="1.0" encoding="utf-8"?>
+<p:sld xmlns:a="http://schemas.openxmlformats.org/drawingml/2006/main" xmlns:p="http://schemas.openxmlformats.org/presentationml/2006/main" xmlns:r="http://schemas.openxmlformats.org/officeDocument/2006/relationships">
+  <p:cSld>
+    <p:bg>
+      <p:bgPr>
+        <a:solidFill>
+          <a:srgbClr val="000000"/>
+        </a:solidFill>
+        <a:effectLst/>
+      </p:bgPr>
+    </p:bg>
+    <p:spTree>
+      <p:nvGrpSpPr>
+        <p:cNvPr id="1" name=""/>
+        <p:cNvGrpSpPr/>
+        <p:nvPr/>
+      </p:nvGrpSpPr>
+      <p:grpSpPr/>
+      <p:sp>
+        <p:nvSpPr>
+          <p:cNvPr id="2" name="TextBox 1"/>
+          <p:cNvSpPr txBox="1"/>
+          <p:nvPr/>
+        </p:nvSpPr>
+        <p:spPr>
+          <a:xfrm>
+            <a:off x="640080" y="2702052"/>
+            <a:ext cx="10911535" cy="731520"/>
+          </a:xfrm>
+          <a:prstGeom prst="rect">
+            <a:avLst/>
+          </a:prstGeom>
+          <a:noFill/>
+        </p:spPr>
+        <p:txBody>
+          <a:bodyPr wrap="square">
+            <a:spAutoFit/>
+          </a:bodyPr>
+          <a:lstStyle/>
+          <a:p>
+            <a:pPr algn="ctr"/>
+            <a:r>
+              <a:rPr sz="4800" b="1" i="0">
+                <a:solidFill>
+                  <a:srgbClr val="FFFFFF"/>
+                </a:solidFill>
+                <a:latin typeface="Arial"/>
+              </a:rPr>
+              <a:t/>
+            </a:r>
+          </a:p>
+        </p:txBody>
+      </p:sp>
+    </p:spTree>
+  </p:cSld>
+  <p:clrMapOvr>
+    <a:masterClrMapping/>
+  </p:clrMapOvr>
+</p:sld>
+</file>
+
+<file path=ppt/slides/slide45.xml><?xml version="1.0" encoding="utf-8"?>
+<p:sld xmlns:a="http://schemas.openxmlformats.org/drawingml/2006/main" xmlns:p="http://schemas.openxmlformats.org/presentationml/2006/main" xmlns:r="http://schemas.openxmlformats.org/officeDocument/2006/relationships">
+  <p:cSld>
+    <p:bg>
+      <p:bgPr>
+        <a:solidFill>
+          <a:srgbClr val="000000"/>
+        </a:solidFill>
+        <a:effectLst/>
+      </p:bgPr>
+    </p:bg>
+    <p:spTree>
+      <p:nvGrpSpPr>
+        <p:cNvPr id="1" name=""/>
+        <p:cNvGrpSpPr/>
+        <p:nvPr/>
+      </p:nvGrpSpPr>
+      <p:grpSpPr/>
+      <p:sp>
+        <p:nvSpPr>
+          <p:cNvPr id="2" name="TextBox 1"/>
+          <p:cNvSpPr txBox="1"/>
+          <p:nvPr/>
+        </p:nvSpPr>
+        <p:spPr>
+          <a:xfrm>
+            <a:off x="640080" y="2500884"/>
+            <a:ext cx="10911535" cy="731520"/>
+          </a:xfrm>
+          <a:prstGeom prst="rect">
+            <a:avLst/>
+          </a:prstGeom>
+          <a:noFill/>
+        </p:spPr>
+        <p:txBody>
+          <a:bodyPr wrap="square">
+            <a:spAutoFit/>
+          </a:bodyPr>
+          <a:lstStyle/>
+          <a:p>
+            <a:pPr algn="ctr"/>
+            <a:r>
+              <a:rPr sz="4800" b="1" i="0">
+                <a:solidFill>
+                  <a:srgbClr val="FFFFFF"/>
+                </a:solidFill>
+                <a:latin typeface="Arial"/>
+              </a:rPr>
+              <a:t>我らの罪 背負い</a:t>
+            </a:r>
+          </a:p>
+        </p:txBody>
+      </p:sp>
+      <p:sp>
+        <p:nvSpPr>
+          <p:cNvPr id="3" name="TextBox 2"/>
+          <p:cNvSpPr txBox="1"/>
+          <p:nvPr/>
+        </p:nvSpPr>
+        <p:spPr>
+          <a:xfrm>
+            <a:off x="640080" y="3268980"/>
+            <a:ext cx="10911535" cy="365760"/>
+          </a:xfrm>
+          <a:prstGeom prst="rect">
+            <a:avLst/>
+          </a:prstGeom>
+          <a:noFill/>
+        </p:spPr>
+        <p:txBody>
+          <a:bodyPr wrap="square">
+            <a:spAutoFit/>
+          </a:bodyPr>
+          <a:lstStyle/>
+          <a:p>
+            <a:pPr algn="ctr"/>
+            <a:r>
+              <a:rPr sz="2400" b="0" i="1">
+                <a:solidFill>
+                  <a:srgbClr val="AAAAAA"/>
+                </a:solidFill>
+                <a:latin typeface="Arial"/>
+              </a:rPr>
+              <a:t>warera no tsumi seoi</a:t>
+            </a:r>
+          </a:p>
+        </p:txBody>
+      </p:sp>
+      <p:sp>
+        <p:nvSpPr>
+          <p:cNvPr id="4" name="TextBox 3"/>
+          <p:cNvSpPr txBox="1"/>
+          <p:nvPr/>
+        </p:nvSpPr>
+        <p:spPr>
+          <a:xfrm>
+            <a:off x="640080" y="4046220"/>
+            <a:ext cx="10911535" cy="310896"/>
+          </a:xfrm>
+          <a:prstGeom prst="rect">
+            <a:avLst/>
+          </a:prstGeom>
+          <a:noFill/>
+        </p:spPr>
+        <p:txBody>
+          <a:bodyPr wrap="square">
+            <a:spAutoFit/>
+          </a:bodyPr>
+          <a:lstStyle/>
+          <a:p>
+            <a:pPr algn="ctr"/>
+            <a:r>
+              <a:rPr sz="2000" b="0" i="1">
+                <a:solidFill>
+                  <a:srgbClr val="828282"/>
+                </a:solidFill>
+                <a:latin typeface="Arial"/>
+              </a:rPr>
+              <a:t>Divina graça me alcançou</a:t>
+            </a:r>
+          </a:p>
+        </p:txBody>
+      </p:sp>
+    </p:spTree>
+  </p:cSld>
+  <p:clrMapOvr>
+    <a:masterClrMapping/>
+  </p:clrMapOvr>
+</p:sld>
+</file>
+
+<file path=ppt/slides/slide46.xml><?xml version="1.0" encoding="utf-8"?>
+<p:sld xmlns:a="http://schemas.openxmlformats.org/drawingml/2006/main" xmlns:p="http://schemas.openxmlformats.org/presentationml/2006/main" xmlns:r="http://schemas.openxmlformats.org/officeDocument/2006/relationships">
+  <p:cSld>
+    <p:bg>
+      <p:bgPr>
+        <a:solidFill>
+          <a:srgbClr val="000000"/>
+        </a:solidFill>
+        <a:effectLst/>
+      </p:bgPr>
+    </p:bg>
+    <p:spTree>
+      <p:nvGrpSpPr>
+        <p:cNvPr id="1" name=""/>
+        <p:cNvGrpSpPr/>
+        <p:nvPr/>
+      </p:nvGrpSpPr>
+      <p:grpSpPr/>
+      <p:sp>
+        <p:nvSpPr>
+          <p:cNvPr id="2" name="TextBox 1"/>
+          <p:cNvSpPr txBox="1"/>
+          <p:nvPr/>
+        </p:nvSpPr>
+        <p:spPr>
+          <a:xfrm>
+            <a:off x="640080" y="2702052"/>
+            <a:ext cx="10911535" cy="731520"/>
+          </a:xfrm>
+          <a:prstGeom prst="rect">
+            <a:avLst/>
+          </a:prstGeom>
+          <a:noFill/>
+        </p:spPr>
+        <p:txBody>
+          <a:bodyPr wrap="square">
+            <a:spAutoFit/>
+          </a:bodyPr>
+          <a:lstStyle/>
+          <a:p>
+            <a:pPr algn="ctr"/>
+            <a:r>
+              <a:rPr sz="4800" b="1" i="0">
+                <a:solidFill>
+                  <a:srgbClr val="FFFFFF"/>
+                </a:solidFill>
+                <a:latin typeface="Arial"/>
+              </a:rPr>
+              <a:t/>
+            </a:r>
+          </a:p>
+        </p:txBody>
+      </p:sp>
+    </p:spTree>
+  </p:cSld>
+  <p:clrMapOvr>
+    <a:masterClrMapping/>
+  </p:clrMapOvr>
+</p:sld>
+</file>
+
+<file path=ppt/slides/slide47.xml><?xml version="1.0" encoding="utf-8"?>
+<p:sld xmlns:a="http://schemas.openxmlformats.org/drawingml/2006/main" xmlns:p="http://schemas.openxmlformats.org/presentationml/2006/main" xmlns:r="http://schemas.openxmlformats.org/officeDocument/2006/relationships">
+  <p:cSld>
+    <p:bg>
+      <p:bgPr>
+        <a:solidFill>
+          <a:srgbClr val="000000"/>
+        </a:solidFill>
+        <a:effectLst/>
+      </p:bgPr>
+    </p:bg>
+    <p:spTree>
+      <p:nvGrpSpPr>
+        <p:cNvPr id="1" name=""/>
+        <p:cNvGrpSpPr/>
+        <p:nvPr/>
+      </p:nvGrpSpPr>
+      <p:grpSpPr/>
+      <p:sp>
+        <p:nvSpPr>
+          <p:cNvPr id="2" name="TextBox 1"/>
+          <p:cNvSpPr txBox="1"/>
+          <p:nvPr/>
+        </p:nvSpPr>
+        <p:spPr>
+          <a:xfrm>
+            <a:off x="640080" y="2500884"/>
+            <a:ext cx="10911535" cy="731520"/>
+          </a:xfrm>
+          <a:prstGeom prst="rect">
+            <a:avLst/>
+          </a:prstGeom>
+          <a:noFill/>
+        </p:spPr>
+        <p:txBody>
+          <a:bodyPr wrap="square">
+            <a:spAutoFit/>
+          </a:bodyPr>
+          <a:lstStyle/>
+          <a:p>
+            <a:pPr algn="ctr"/>
+            <a:r>
+              <a:rPr sz="4800" b="1" i="0">
+                <a:solidFill>
+                  <a:srgbClr val="FFFFFF"/>
+                </a:solidFill>
+                <a:latin typeface="Arial"/>
+              </a:rPr>
+              <a:t>あがなう 勝利の主</a:t>
+            </a:r>
+          </a:p>
+        </p:txBody>
+      </p:sp>
+      <p:sp>
+        <p:nvSpPr>
+          <p:cNvPr id="3" name="TextBox 2"/>
+          <p:cNvSpPr txBox="1"/>
+          <p:nvPr/>
+        </p:nvSpPr>
+        <p:spPr>
+          <a:xfrm>
+            <a:off x="640080" y="3268980"/>
+            <a:ext cx="10911535" cy="365760"/>
+          </a:xfrm>
+          <a:prstGeom prst="rect">
+            <a:avLst/>
+          </a:prstGeom>
+          <a:noFill/>
+        </p:spPr>
+        <p:txBody>
+          <a:bodyPr wrap="square">
+            <a:spAutoFit/>
+          </a:bodyPr>
+          <a:lstStyle/>
+          <a:p>
+            <a:pPr algn="ctr"/>
+            <a:r>
+              <a:rPr sz="2400" b="0" i="1">
+                <a:solidFill>
+                  <a:srgbClr val="AAAAAA"/>
+                </a:solidFill>
+                <a:latin typeface="Arial"/>
+              </a:rPr>
+              <a:t>aganau shouri no shu</a:t>
+            </a:r>
+          </a:p>
+        </p:txBody>
+      </p:sp>
+      <p:sp>
+        <p:nvSpPr>
+          <p:cNvPr id="4" name="TextBox 3"/>
+          <p:cNvSpPr txBox="1"/>
+          <p:nvPr/>
+        </p:nvSpPr>
+        <p:spPr>
+          <a:xfrm>
+            <a:off x="640080" y="4046220"/>
+            <a:ext cx="10911535" cy="310896"/>
+          </a:xfrm>
+          <a:prstGeom prst="rect">
+            <a:avLst/>
+          </a:prstGeom>
+          <a:noFill/>
+        </p:spPr>
+        <p:txBody>
+          <a:bodyPr wrap="square">
+            <a:spAutoFit/>
+          </a:bodyPr>
+          <a:lstStyle/>
+          <a:p>
+            <a:pPr algn="ctr"/>
+            <a:r>
+              <a:rPr sz="2000" b="0" i="1">
+                <a:solidFill>
+                  <a:srgbClr val="828282"/>
+                </a:solidFill>
+                <a:latin typeface="Arial"/>
+              </a:rPr>
+              <a:t>Divina graça me alcançou</a:t>
+            </a:r>
+          </a:p>
+        </p:txBody>
+      </p:sp>
+    </p:spTree>
+  </p:cSld>
+  <p:clrMapOvr>
+    <a:masterClrMapping/>
+  </p:clrMapOvr>
+</p:sld>
+</file>
+
+<file path=ppt/slides/slide48.xml><?xml version="1.0" encoding="utf-8"?>
+<p:sld xmlns:a="http://schemas.openxmlformats.org/drawingml/2006/main" xmlns:p="http://schemas.openxmlformats.org/presentationml/2006/main" xmlns:r="http://schemas.openxmlformats.org/officeDocument/2006/relationships">
+  <p:cSld>
+    <p:bg>
+      <p:bgPr>
+        <a:solidFill>
+          <a:srgbClr val="000000"/>
+        </a:solidFill>
+        <a:effectLst/>
+      </p:bgPr>
+    </p:bg>
+    <p:spTree>
+      <p:nvGrpSpPr>
+        <p:cNvPr id="1" name=""/>
+        <p:cNvGrpSpPr/>
+        <p:nvPr/>
+      </p:nvGrpSpPr>
+      <p:grpSpPr/>
+      <p:sp>
+        <p:nvSpPr>
+          <p:cNvPr id="2" name="TextBox 1"/>
+          <p:cNvSpPr txBox="1"/>
+          <p:nvPr/>
+        </p:nvSpPr>
+        <p:spPr>
+          <a:xfrm>
+            <a:off x="640080" y="2702052"/>
+            <a:ext cx="10911535" cy="731520"/>
+          </a:xfrm>
+          <a:prstGeom prst="rect">
+            <a:avLst/>
+          </a:prstGeom>
+          <a:noFill/>
+        </p:spPr>
+        <p:txBody>
+          <a:bodyPr wrap="square">
+            <a:spAutoFit/>
+          </a:bodyPr>
+          <a:lstStyle/>
+          <a:p>
+            <a:pPr algn="ctr"/>
+            <a:r>
+              <a:rPr sz="4800" b="1" i="0">
+                <a:solidFill>
+                  <a:srgbClr val="FFFFFF"/>
+                </a:solidFill>
+                <a:latin typeface="Arial"/>
+              </a:rPr>
+              <a:t/>
+            </a:r>
+          </a:p>
+        </p:txBody>
+      </p:sp>
+    </p:spTree>
+  </p:cSld>
+  <p:clrMapOvr>
+    <a:masterClrMapping/>
+  </p:clrMapOvr>
+</p:sld>
+</file>
+
+<file path=ppt/slides/slide49.xml><?xml version="1.0" encoding="utf-8"?>
+<p:sld xmlns:a="http://schemas.openxmlformats.org/drawingml/2006/main" xmlns:p="http://schemas.openxmlformats.org/presentationml/2006/main" xmlns:r="http://schemas.openxmlformats.org/officeDocument/2006/relationships">
+  <p:cSld>
+    <p:bg>
+      <p:bgPr>
+        <a:solidFill>
+          <a:srgbClr val="000000"/>
+        </a:solidFill>
+        <a:effectLst/>
+      </p:bgPr>
+    </p:bg>
+    <p:spTree>
+      <p:nvGrpSpPr>
+        <p:cNvPr id="1" name=""/>
+        <p:cNvGrpSpPr/>
+        <p:nvPr/>
+      </p:nvGrpSpPr>
+      <p:grpSpPr/>
+      <p:sp>
+        <p:nvSpPr>
+          <p:cNvPr id="2" name="TextBox 1"/>
+          <p:cNvSpPr txBox="1"/>
+          <p:nvPr/>
+        </p:nvSpPr>
+        <p:spPr>
+          <a:xfrm>
+            <a:off x="640080" y="2500884"/>
+            <a:ext cx="10911535" cy="731520"/>
+          </a:xfrm>
+          <a:prstGeom prst="rect">
+            <a:avLst/>
+          </a:prstGeom>
+          <a:noFill/>
+        </p:spPr>
+        <p:txBody>
+          <a:bodyPr wrap="square">
+            <a:spAutoFit/>
+          </a:bodyPr>
+          <a:lstStyle/>
+          <a:p>
+            <a:pPr algn="ctr"/>
+            <a:r>
+              <a:rPr sz="4800" b="1" i="0">
+                <a:solidFill>
+                  <a:srgbClr val="FFFFFF"/>
+                </a:solidFill>
+                <a:latin typeface="Arial"/>
+              </a:rPr>
+              <a:t>主こそ我が救い</a:t>
+            </a:r>
+          </a:p>
+        </p:txBody>
+      </p:sp>
+      <p:sp>
+        <p:nvSpPr>
+          <p:cNvPr id="3" name="TextBox 2"/>
+          <p:cNvSpPr txBox="1"/>
+          <p:nvPr/>
+        </p:nvSpPr>
+        <p:spPr>
+          <a:xfrm>
+            <a:off x="640080" y="3268980"/>
+            <a:ext cx="10911535" cy="365760"/>
+          </a:xfrm>
+          <a:prstGeom prst="rect">
+            <a:avLst/>
+          </a:prstGeom>
+          <a:noFill/>
+        </p:spPr>
+        <p:txBody>
+          <a:bodyPr wrap="square">
+            <a:spAutoFit/>
+          </a:bodyPr>
+          <a:lstStyle/>
+          <a:p>
+            <a:pPr algn="ctr"/>
+            <a:r>
+              <a:rPr sz="2400" b="0" i="1">
+                <a:solidFill>
+                  <a:srgbClr val="AAAAAA"/>
+                </a:solidFill>
+                <a:latin typeface="Arial"/>
+              </a:rPr>
+              <a:t>shu koso waga sukui</a:t>
+            </a:r>
+          </a:p>
+        </p:txBody>
+      </p:sp>
+      <p:sp>
+        <p:nvSpPr>
+          <p:cNvPr id="4" name="TextBox 3"/>
+          <p:cNvSpPr txBox="1"/>
+          <p:nvPr/>
+        </p:nvSpPr>
+        <p:spPr>
+          <a:xfrm>
+            <a:off x="640080" y="4046220"/>
+            <a:ext cx="10911535" cy="310896"/>
+          </a:xfrm>
+          <a:prstGeom prst="rect">
+            <a:avLst/>
+          </a:prstGeom>
+          <a:noFill/>
+        </p:spPr>
+        <p:txBody>
+          <a:bodyPr wrap="square">
+            <a:spAutoFit/>
+          </a:bodyPr>
+          <a:lstStyle/>
+          <a:p>
+            <a:pPr algn="ctr"/>
+            <a:r>
+              <a:rPr sz="2000" b="0" i="1">
+                <a:solidFill>
+                  <a:srgbClr val="828282"/>
+                </a:solidFill>
+                <a:latin typeface="Arial"/>
+              </a:rPr>
+              <a:t>Divina graça me alcançou</a:t>
             </a:r>
           </a:p>
         </p:txBody>
@@ -3949,29 +7519,29 @@
         </p:nvSpPr>
         <p:spPr>
           <a:xfrm>
-            <a:off x="594360" y="1837944"/>
-            <a:ext cx="11002975" cy="685800"/>
-          </a:xfrm>
-          <a:prstGeom prst="rect">
-            <a:avLst/>
-          </a:prstGeom>
-          <a:noFill/>
-        </p:spPr>
-        <p:txBody>
-          <a:bodyPr wrap="square">
-            <a:spAutoFit/>
-          </a:bodyPr>
-          <a:lstStyle/>
-          <a:p>
-            <a:pPr algn="ctr"/>
-            <a:r>
-              <a:rPr sz="4400" b="1" i="0">
+            <a:off x="640080" y="2052828"/>
+            <a:ext cx="10911535" cy="731520"/>
+          </a:xfrm>
+          <a:prstGeom prst="rect">
+            <a:avLst/>
+          </a:prstGeom>
+          <a:noFill/>
+        </p:spPr>
+        <p:txBody>
+          <a:bodyPr wrap="square">
+            <a:spAutoFit/>
+          </a:bodyPr>
+          <a:lstStyle/>
+          <a:p>
+            <a:pPr algn="ctr"/>
+            <a:r>
+              <a:rPr sz="4800" b="1" i="0">
                 <a:solidFill>
                   <a:srgbClr val="FFFFFF"/>
                 </a:solidFill>
                 <a:latin typeface="Arial"/>
               </a:rPr>
-              <a:t>最期の瞬間まで　私は主のもの</a:t>
+              <a:t>Salva os seus com amor fiel</a:t>
             </a:r>
           </a:p>
         </p:txBody>
@@ -3984,60 +7554,86 @@
         </p:nvSpPr>
         <p:spPr>
           <a:xfrm>
-            <a:off x="594360" y="2560320"/>
-            <a:ext cx="11002975" cy="384048"/>
-          </a:xfrm>
-          <a:prstGeom prst="rect">
-            <a:avLst/>
-          </a:prstGeom>
-          <a:noFill/>
-        </p:spPr>
-        <p:txBody>
-          <a:bodyPr wrap="square">
-            <a:spAutoFit/>
-          </a:bodyPr>
-          <a:lstStyle/>
-          <a:p>
-            <a:pPr algn="ctr"/>
-            <a:r>
-              <a:rPr sz="2400" b="0" i="1">
-                <a:solidFill>
-                  <a:srgbClr val="B4B4B4"/>
-                </a:solidFill>
-                <a:latin typeface="Arial"/>
-              </a:rPr>
-              <a:t>saigo no toki made  watashi wa shu no mono</a:t>
-            </a:r>
-          </a:p>
-        </p:txBody>
-      </p:sp>
-      <p:sp>
-        <p:nvSpPr>
-          <p:cNvPr id="4" name="TextBox 3"/>
-          <p:cNvSpPr txBox="1"/>
-          <p:nvPr/>
-        </p:nvSpPr>
-        <p:spPr>
-          <a:xfrm>
-            <a:off x="594360" y="2980944"/>
-            <a:ext cx="11002975" cy="347472"/>
-          </a:xfrm>
-          <a:prstGeom prst="rect">
-            <a:avLst/>
-          </a:prstGeom>
-          <a:noFill/>
-        </p:spPr>
-        <p:txBody>
-          <a:bodyPr wrap="square">
-            <a:spAutoFit/>
-          </a:bodyPr>
-          <a:lstStyle/>
-          <a:p>
-            <a:pPr algn="ctr"/>
-            <a:r>
-              <a:rPr sz="2000" b="0" i="1">
-                <a:solidFill>
-                  <a:srgbClr val="8C8C8C"/>
+            <a:off x="640080" y="2985516"/>
+            <a:ext cx="10911535" cy="731520"/>
+          </a:xfrm>
+          <a:prstGeom prst="rect">
+            <a:avLst/>
+          </a:prstGeom>
+          <a:noFill/>
+        </p:spPr>
+        <p:txBody>
+          <a:bodyPr wrap="square">
+            <a:spAutoFit/>
+          </a:bodyPr>
+          <a:lstStyle/>
+          <a:p>
+            <a:pPr algn="ctr"/>
+            <a:r>
+              <a:rPr sz="4800" b="1" i="0">
+                <a:solidFill>
+                  <a:srgbClr val="FFFFFF"/>
+                </a:solidFill>
+                <a:latin typeface="Arial"/>
+              </a:rPr>
+              <a:t>Pagou, venceu, tudo consumou</a:t>
+            </a:r>
+          </a:p>
+        </p:txBody>
+      </p:sp>
+    </p:spTree>
+  </p:cSld>
+  <p:clrMapOvr>
+    <a:masterClrMapping/>
+  </p:clrMapOvr>
+</p:sld>
+</file>
+
+<file path=ppt/slides/slide50.xml><?xml version="1.0" encoding="utf-8"?>
+<p:sld xmlns:a="http://schemas.openxmlformats.org/drawingml/2006/main" xmlns:p="http://schemas.openxmlformats.org/presentationml/2006/main" xmlns:r="http://schemas.openxmlformats.org/officeDocument/2006/relationships">
+  <p:cSld>
+    <p:bg>
+      <p:bgPr>
+        <a:solidFill>
+          <a:srgbClr val="000000"/>
+        </a:solidFill>
+        <a:effectLst/>
+      </p:bgPr>
+    </p:bg>
+    <p:spTree>
+      <p:nvGrpSpPr>
+        <p:cNvPr id="1" name=""/>
+        <p:cNvGrpSpPr/>
+        <p:nvPr/>
+      </p:nvGrpSpPr>
+      <p:grpSpPr/>
+      <p:sp>
+        <p:nvSpPr>
+          <p:cNvPr id="2" name="TextBox 1"/>
+          <p:cNvSpPr txBox="1"/>
+          <p:nvPr/>
+        </p:nvSpPr>
+        <p:spPr>
+          <a:xfrm>
+            <a:off x="640080" y="2052828"/>
+            <a:ext cx="10911535" cy="731520"/>
+          </a:xfrm>
+          <a:prstGeom prst="rect">
+            <a:avLst/>
+          </a:prstGeom>
+          <a:noFill/>
+        </p:spPr>
+        <p:txBody>
+          <a:bodyPr wrap="square">
+            <a:spAutoFit/>
+          </a:bodyPr>
+          <a:lstStyle/>
+          <a:p>
+            <a:pPr algn="ctr"/>
+            <a:r>
+              <a:rPr sz="4800" b="1" i="0">
+                <a:solidFill>
+                  <a:srgbClr val="FFFFFF"/>
                 </a:solidFill>
                 <a:latin typeface="Arial"/>
               </a:rPr>
@@ -4048,101 +7644,223 @@
       </p:sp>
       <p:sp>
         <p:nvSpPr>
-          <p:cNvPr id="5" name="TextBox 4"/>
-          <p:cNvSpPr txBox="1"/>
-          <p:nvPr/>
-        </p:nvSpPr>
-        <p:spPr>
-          <a:xfrm>
-            <a:off x="594360" y="3529584"/>
-            <a:ext cx="11002975" cy="685800"/>
-          </a:xfrm>
-          <a:prstGeom prst="rect">
-            <a:avLst/>
-          </a:prstGeom>
-          <a:noFill/>
-        </p:spPr>
-        <p:txBody>
-          <a:bodyPr wrap="square">
-            <a:spAutoFit/>
-          </a:bodyPr>
-          <a:lstStyle/>
-          <a:p>
-            <a:pPr algn="ctr"/>
-            <a:r>
-              <a:rPr sz="4400" b="1" i="0">
+          <p:cNvPr id="3" name="TextBox 2"/>
+          <p:cNvSpPr txBox="1"/>
+          <p:nvPr/>
+        </p:nvSpPr>
+        <p:spPr>
+          <a:xfrm>
+            <a:off x="640080" y="2985516"/>
+            <a:ext cx="10911535" cy="731520"/>
+          </a:xfrm>
+          <a:prstGeom prst="rect">
+            <a:avLst/>
+          </a:prstGeom>
+          <a:noFill/>
+        </p:spPr>
+        <p:txBody>
+          <a:bodyPr wrap="square">
+            <a:spAutoFit/>
+          </a:bodyPr>
+          <a:lstStyle/>
+          <a:p>
+            <a:pPr algn="ctr"/>
+            <a:r>
+              <a:rPr sz="4800" b="1" i="0">
                 <a:solidFill>
                   <a:srgbClr val="FFFFFF"/>
                 </a:solidFill>
                 <a:latin typeface="Arial"/>
               </a:rPr>
-              <a:t>帰りゆく 主のもとへ　主こそ我が救い</a:t>
-            </a:r>
-          </a:p>
-        </p:txBody>
-      </p:sp>
-      <p:sp>
-        <p:nvSpPr>
-          <p:cNvPr id="6" name="TextBox 5"/>
-          <p:cNvSpPr txBox="1"/>
-          <p:nvPr/>
-        </p:nvSpPr>
-        <p:spPr>
-          <a:xfrm>
-            <a:off x="594360" y="4251960"/>
-            <a:ext cx="11002975" cy="384048"/>
-          </a:xfrm>
-          <a:prstGeom prst="rect">
-            <a:avLst/>
-          </a:prstGeom>
-          <a:noFill/>
-        </p:spPr>
-        <p:txBody>
-          <a:bodyPr wrap="square">
-            <a:spAutoFit/>
-          </a:bodyPr>
-          <a:lstStyle/>
-          <a:p>
-            <a:pPr algn="ctr"/>
-            <a:r>
-              <a:rPr sz="2144" b="0" i="1">
-                <a:solidFill>
-                  <a:srgbClr val="B4B4B4"/>
-                </a:solidFill>
-                <a:latin typeface="Arial"/>
-              </a:rPr>
-              <a:t>kaeri yuku shu no moto he   shu koso waga sukui</a:t>
-            </a:r>
-          </a:p>
-        </p:txBody>
-      </p:sp>
-      <p:sp>
-        <p:nvSpPr>
-          <p:cNvPr id="7" name="TextBox 6"/>
-          <p:cNvSpPr txBox="1"/>
-          <p:nvPr/>
-        </p:nvSpPr>
-        <p:spPr>
-          <a:xfrm>
-            <a:off x="594360" y="4672584"/>
-            <a:ext cx="11002975" cy="347472"/>
-          </a:xfrm>
-          <a:prstGeom prst="rect">
-            <a:avLst/>
-          </a:prstGeom>
-          <a:noFill/>
-        </p:spPr>
-        <p:txBody>
-          <a:bodyPr wrap="square">
-            <a:spAutoFit/>
-          </a:bodyPr>
-          <a:lstStyle/>
-          <a:p>
-            <a:pPr algn="ctr"/>
-            <a:r>
-              <a:rPr sz="2000" b="0" i="1">
-                <a:solidFill>
-                  <a:srgbClr val="8C8C8C"/>
+              <a:t/>
+            </a:r>
+          </a:p>
+        </p:txBody>
+      </p:sp>
+    </p:spTree>
+  </p:cSld>
+  <p:clrMapOvr>
+    <a:masterClrMapping/>
+  </p:clrMapOvr>
+</p:sld>
+</file>
+
+<file path=ppt/slides/slide51.xml><?xml version="1.0" encoding="utf-8"?>
+<p:sld xmlns:a="http://schemas.openxmlformats.org/drawingml/2006/main" xmlns:p="http://schemas.openxmlformats.org/presentationml/2006/main" xmlns:r="http://schemas.openxmlformats.org/officeDocument/2006/relationships">
+  <p:cSld>
+    <p:bg>
+      <p:bgPr>
+        <a:solidFill>
+          <a:srgbClr val="000000"/>
+        </a:solidFill>
+        <a:effectLst/>
+      </p:bgPr>
+    </p:bg>
+    <p:spTree>
+      <p:nvGrpSpPr>
+        <p:cNvPr id="1" name=""/>
+        <p:cNvGrpSpPr/>
+        <p:nvPr/>
+      </p:nvGrpSpPr>
+      <p:grpSpPr/>
+      <p:sp>
+        <p:nvSpPr>
+          <p:cNvPr id="2" name="TextBox 1"/>
+          <p:cNvSpPr txBox="1"/>
+          <p:nvPr/>
+        </p:nvSpPr>
+        <p:spPr>
+          <a:xfrm>
+            <a:off x="640080" y="2052828"/>
+            <a:ext cx="10911535" cy="731520"/>
+          </a:xfrm>
+          <a:prstGeom prst="rect">
+            <a:avLst/>
+          </a:prstGeom>
+          <a:noFill/>
+        </p:spPr>
+        <p:txBody>
+          <a:bodyPr wrap="square">
+            <a:spAutoFit/>
+          </a:bodyPr>
+          <a:lstStyle/>
+          <a:p>
+            <a:pPr algn="ctr"/>
+            <a:r>
+              <a:rPr sz="4800" b="1" i="0">
+                <a:solidFill>
+                  <a:srgbClr val="FFFFFF"/>
+                </a:solidFill>
+                <a:latin typeface="Arial"/>
+              </a:rPr>
+              <a:t/>
+            </a:r>
+          </a:p>
+        </p:txBody>
+      </p:sp>
+      <p:sp>
+        <p:nvSpPr>
+          <p:cNvPr id="3" name="TextBox 2"/>
+          <p:cNvSpPr txBox="1"/>
+          <p:nvPr/>
+        </p:nvSpPr>
+        <p:spPr>
+          <a:xfrm>
+            <a:off x="640080" y="2985516"/>
+            <a:ext cx="10911535" cy="731520"/>
+          </a:xfrm>
+          <a:prstGeom prst="rect">
+            <a:avLst/>
+          </a:prstGeom>
+          <a:noFill/>
+        </p:spPr>
+        <p:txBody>
+          <a:bodyPr wrap="square">
+            <a:spAutoFit/>
+          </a:bodyPr>
+          <a:lstStyle/>
+          <a:p>
+            <a:pPr algn="ctr"/>
+            <a:r>
+              <a:rPr sz="4800" b="1" i="0">
+                <a:solidFill>
+                  <a:srgbClr val="FFFFFF"/>
+                </a:solidFill>
+                <a:latin typeface="Arial"/>
+              </a:rPr>
+              <a:t/>
+            </a:r>
+          </a:p>
+        </p:txBody>
+      </p:sp>
+    </p:spTree>
+  </p:cSld>
+  <p:clrMapOvr>
+    <a:masterClrMapping/>
+  </p:clrMapOvr>
+</p:sld>
+</file>
+
+<file path=ppt/slides/slide52.xml><?xml version="1.0" encoding="utf-8"?>
+<p:sld xmlns:a="http://schemas.openxmlformats.org/drawingml/2006/main" xmlns:p="http://schemas.openxmlformats.org/presentationml/2006/main" xmlns:r="http://schemas.openxmlformats.org/officeDocument/2006/relationships">
+  <p:cSld>
+    <p:bg>
+      <p:bgPr>
+        <a:solidFill>
+          <a:srgbClr val="000000"/>
+        </a:solidFill>
+        <a:effectLst/>
+      </p:bgPr>
+    </p:bg>
+    <p:spTree>
+      <p:nvGrpSpPr>
+        <p:cNvPr id="1" name=""/>
+        <p:cNvGrpSpPr/>
+        <p:nvPr/>
+      </p:nvGrpSpPr>
+      <p:grpSpPr/>
+      <p:sp>
+        <p:nvSpPr>
+          <p:cNvPr id="2" name="TextBox 1"/>
+          <p:cNvSpPr txBox="1"/>
+          <p:nvPr/>
+        </p:nvSpPr>
+        <p:spPr>
+          <a:xfrm>
+            <a:off x="640080" y="2052828"/>
+            <a:ext cx="10911535" cy="731520"/>
+          </a:xfrm>
+          <a:prstGeom prst="rect">
+            <a:avLst/>
+          </a:prstGeom>
+          <a:noFill/>
+        </p:spPr>
+        <p:txBody>
+          <a:bodyPr wrap="square">
+            <a:spAutoFit/>
+          </a:bodyPr>
+          <a:lstStyle/>
+          <a:p>
+            <a:pPr algn="ctr"/>
+            <a:r>
+              <a:rPr sz="4800" b="1" i="0">
+                <a:solidFill>
+                  <a:srgbClr val="FFFFFF"/>
+                </a:solidFill>
+                <a:latin typeface="Arial"/>
+              </a:rPr>
+              <a:t/>
+            </a:r>
+          </a:p>
+        </p:txBody>
+      </p:sp>
+      <p:sp>
+        <p:nvSpPr>
+          <p:cNvPr id="3" name="TextBox 2"/>
+          <p:cNvSpPr txBox="1"/>
+          <p:nvPr/>
+        </p:nvSpPr>
+        <p:spPr>
+          <a:xfrm>
+            <a:off x="640080" y="2985516"/>
+            <a:ext cx="10911535" cy="731520"/>
+          </a:xfrm>
+          <a:prstGeom prst="rect">
+            <a:avLst/>
+          </a:prstGeom>
+          <a:noFill/>
+        </p:spPr>
+        <p:txBody>
+          <a:bodyPr wrap="square">
+            <a:spAutoFit/>
+          </a:bodyPr>
+          <a:lstStyle/>
+          <a:p>
+            <a:pPr algn="ctr"/>
+            <a:r>
+              <a:rPr sz="4800" b="1" i="0">
+                <a:solidFill>
+                  <a:srgbClr val="FFFFFF"/>
                 </a:solidFill>
                 <a:latin typeface="Arial"/>
               </a:rPr>
@@ -4185,29 +7903,29 @@
         </p:nvSpPr>
         <p:spPr>
           <a:xfrm>
-            <a:off x="594360" y="1837944"/>
-            <a:ext cx="11002975" cy="685800"/>
-          </a:xfrm>
-          <a:prstGeom prst="rect">
-            <a:avLst/>
-          </a:prstGeom>
-          <a:noFill/>
-        </p:spPr>
-        <p:txBody>
-          <a:bodyPr wrap="square">
-            <a:spAutoFit/>
-          </a:bodyPr>
-          <a:lstStyle/>
-          <a:p>
-            <a:pPr algn="ctr"/>
-            <a:r>
-              <a:rPr sz="4400" b="1" i="0">
+            <a:off x="640080" y="2052828"/>
+            <a:ext cx="10911535" cy="731520"/>
+          </a:xfrm>
+          <a:prstGeom prst="rect">
+            <a:avLst/>
+          </a:prstGeom>
+          <a:noFill/>
+        </p:spPr>
+        <p:txBody>
+          <a:bodyPr wrap="square">
+            <a:spAutoFit/>
+          </a:bodyPr>
+          <a:lstStyle/>
+          <a:p>
+            <a:pPr algn="ctr"/>
+            <a:r>
+              <a:rPr sz="4800" b="1" i="0">
                 <a:solidFill>
                   <a:srgbClr val="FFFFFF"/>
                 </a:solidFill>
                 <a:latin typeface="Arial"/>
               </a:rPr>
-              <a:t>主イエスこそ神   我らの罪 背負い</a:t>
+              <a:t>Tu és minha salvação, Senhor</a:t>
             </a:r>
           </a:p>
         </p:txBody>
@@ -4220,169 +7938,29 @@
         </p:nvSpPr>
         <p:spPr>
           <a:xfrm>
-            <a:off x="594360" y="2560320"/>
-            <a:ext cx="11002975" cy="384048"/>
-          </a:xfrm>
-          <a:prstGeom prst="rect">
-            <a:avLst/>
-          </a:prstGeom>
-          <a:noFill/>
-        </p:spPr>
-        <p:txBody>
-          <a:bodyPr wrap="square">
-            <a:spAutoFit/>
-          </a:bodyPr>
-          <a:lstStyle/>
-          <a:p>
-            <a:pPr algn="ctr"/>
-            <a:r>
-              <a:rPr sz="2400" b="0" i="1">
-                <a:solidFill>
-                  <a:srgbClr val="B4B4B4"/>
-                </a:solidFill>
-                <a:latin typeface="Arial"/>
-              </a:rPr>
-              <a:t>shu iesu koso kami  warera no tsumi seoi</a:t>
-            </a:r>
-          </a:p>
-        </p:txBody>
-      </p:sp>
-      <p:sp>
-        <p:nvSpPr>
-          <p:cNvPr id="4" name="TextBox 3"/>
-          <p:cNvSpPr txBox="1"/>
-          <p:nvPr/>
-        </p:nvSpPr>
-        <p:spPr>
-          <a:xfrm>
-            <a:off x="594360" y="2980944"/>
-            <a:ext cx="11002975" cy="347472"/>
-          </a:xfrm>
-          <a:prstGeom prst="rect">
-            <a:avLst/>
-          </a:prstGeom>
-          <a:noFill/>
-        </p:spPr>
-        <p:txBody>
-          <a:bodyPr wrap="square">
-            <a:spAutoFit/>
-          </a:bodyPr>
-          <a:lstStyle/>
-          <a:p>
-            <a:pPr algn="ctr"/>
-            <a:r>
-              <a:rPr sz="2000" b="0" i="1">
-                <a:solidFill>
-                  <a:srgbClr val="8C8C8C"/>
-                </a:solidFill>
-                <a:latin typeface="Arial"/>
-              </a:rPr>
-              <a:t/>
-            </a:r>
-          </a:p>
-        </p:txBody>
-      </p:sp>
-      <p:sp>
-        <p:nvSpPr>
-          <p:cNvPr id="5" name="TextBox 4"/>
-          <p:cNvSpPr txBox="1"/>
-          <p:nvPr/>
-        </p:nvSpPr>
-        <p:spPr>
-          <a:xfrm>
-            <a:off x="594360" y="3529584"/>
-            <a:ext cx="11002975" cy="685800"/>
-          </a:xfrm>
-          <a:prstGeom prst="rect">
-            <a:avLst/>
-          </a:prstGeom>
-          <a:noFill/>
-        </p:spPr>
-        <p:txBody>
-          <a:bodyPr wrap="square">
-            <a:spAutoFit/>
-          </a:bodyPr>
-          <a:lstStyle/>
-          <a:p>
-            <a:pPr algn="ctr"/>
-            <a:r>
-              <a:rPr sz="4400" b="1" i="0">
+            <a:off x="640080" y="2985516"/>
+            <a:ext cx="10911535" cy="731520"/>
+          </a:xfrm>
+          <a:prstGeom prst="rect">
+            <a:avLst/>
+          </a:prstGeom>
+          <a:noFill/>
+        </p:spPr>
+        <p:txBody>
+          <a:bodyPr wrap="square">
+            <a:spAutoFit/>
+          </a:bodyPr>
+          <a:lstStyle/>
+          <a:p>
+            <a:pPr algn="ctr"/>
+            <a:r>
+              <a:rPr sz="4800" b="1" i="0">
                 <a:solidFill>
                   <a:srgbClr val="FFFFFF"/>
                 </a:solidFill>
                 <a:latin typeface="Arial"/>
               </a:rPr>
-              <a:t>あがなう 勝利の主</a:t>
-            </a:r>
-          </a:p>
-        </p:txBody>
-      </p:sp>
-      <p:sp>
-        <p:nvSpPr>
-          <p:cNvPr id="6" name="TextBox 5"/>
-          <p:cNvSpPr txBox="1"/>
-          <p:nvPr/>
-        </p:nvSpPr>
-        <p:spPr>
-          <a:xfrm>
-            <a:off x="594360" y="4251960"/>
-            <a:ext cx="11002975" cy="384048"/>
-          </a:xfrm>
-          <a:prstGeom prst="rect">
-            <a:avLst/>
-          </a:prstGeom>
-          <a:noFill/>
-        </p:spPr>
-        <p:txBody>
-          <a:bodyPr wrap="square">
-            <a:spAutoFit/>
-          </a:bodyPr>
-          <a:lstStyle/>
-          <a:p>
-            <a:pPr algn="ctr"/>
-            <a:r>
-              <a:rPr sz="2400" b="0" i="1">
-                <a:solidFill>
-                  <a:srgbClr val="B4B4B4"/>
-                </a:solidFill>
-                <a:latin typeface="Arial"/>
-              </a:rPr>
-              <a:t>aganau shori no Shu</a:t>
-            </a:r>
-          </a:p>
-        </p:txBody>
-      </p:sp>
-      <p:sp>
-        <p:nvSpPr>
-          <p:cNvPr id="7" name="TextBox 6"/>
-          <p:cNvSpPr txBox="1"/>
-          <p:nvPr/>
-        </p:nvSpPr>
-        <p:spPr>
-          <a:xfrm>
-            <a:off x="594360" y="4672584"/>
-            <a:ext cx="11002975" cy="347472"/>
-          </a:xfrm>
-          <a:prstGeom prst="rect">
-            <a:avLst/>
-          </a:prstGeom>
-          <a:noFill/>
-        </p:spPr>
-        <p:txBody>
-          <a:bodyPr wrap="square">
-            <a:spAutoFit/>
-          </a:bodyPr>
-          <a:lstStyle/>
-          <a:p>
-            <a:pPr algn="ctr"/>
-            <a:r>
-              <a:rPr sz="2000" b="0" i="1">
-                <a:solidFill>
-                  <a:srgbClr val="8C8C8C"/>
-                </a:solidFill>
-                <a:latin typeface="Arial"/>
-              </a:rPr>
-              <a:t/>
+              <a:t>Minha esperança está em Deus</a:t>
             </a:r>
           </a:p>
         </p:txBody>
@@ -4421,29 +7999,90 @@
         </p:nvSpPr>
         <p:spPr>
           <a:xfrm>
-            <a:off x="594360" y="2683764"/>
-            <a:ext cx="11002975" cy="685800"/>
-          </a:xfrm>
-          <a:prstGeom prst="rect">
-            <a:avLst/>
-          </a:prstGeom>
-          <a:noFill/>
-        </p:spPr>
-        <p:txBody>
-          <a:bodyPr wrap="square">
-            <a:spAutoFit/>
-          </a:bodyPr>
-          <a:lstStyle/>
-          <a:p>
-            <a:pPr algn="ctr"/>
-            <a:r>
-              <a:rPr sz="4400" b="1" i="0">
+            <a:off x="640080" y="2702052"/>
+            <a:ext cx="10911535" cy="731520"/>
+          </a:xfrm>
+          <a:prstGeom prst="rect">
+            <a:avLst/>
+          </a:prstGeom>
+          <a:noFill/>
+        </p:spPr>
+        <p:txBody>
+          <a:bodyPr wrap="square">
+            <a:spAutoFit/>
+          </a:bodyPr>
+          <a:lstStyle/>
+          <a:p>
+            <a:pPr algn="ctr"/>
+            <a:r>
+              <a:rPr sz="4800" b="1" i="0">
                 <a:solidFill>
                   <a:srgbClr val="FFFFFF"/>
                 </a:solidFill>
                 <a:latin typeface="Arial"/>
               </a:rPr>
-              <a:t>主こそ我が救い</a:t>
+              <a:t>No vale e na tribulação</a:t>
+            </a:r>
+          </a:p>
+        </p:txBody>
+      </p:sp>
+    </p:spTree>
+  </p:cSld>
+  <p:clrMapOvr>
+    <a:masterClrMapping/>
+  </p:clrMapOvr>
+</p:sld>
+</file>
+
+<file path=ppt/slides/slide8.xml><?xml version="1.0" encoding="utf-8"?>
+<p:sld xmlns:a="http://schemas.openxmlformats.org/drawingml/2006/main" xmlns:p="http://schemas.openxmlformats.org/presentationml/2006/main" xmlns:r="http://schemas.openxmlformats.org/officeDocument/2006/relationships">
+  <p:cSld>
+    <p:bg>
+      <p:bgPr>
+        <a:solidFill>
+          <a:srgbClr val="000000"/>
+        </a:solidFill>
+        <a:effectLst/>
+      </p:bgPr>
+    </p:bg>
+    <p:spTree>
+      <p:nvGrpSpPr>
+        <p:cNvPr id="1" name=""/>
+        <p:cNvGrpSpPr/>
+        <p:nvPr/>
+      </p:nvGrpSpPr>
+      <p:grpSpPr/>
+      <p:sp>
+        <p:nvSpPr>
+          <p:cNvPr id="2" name="TextBox 1"/>
+          <p:cNvSpPr txBox="1"/>
+          <p:nvPr/>
+        </p:nvSpPr>
+        <p:spPr>
+          <a:xfrm>
+            <a:off x="640080" y="2500884"/>
+            <a:ext cx="10911535" cy="731520"/>
+          </a:xfrm>
+          <a:prstGeom prst="rect">
+            <a:avLst/>
+          </a:prstGeom>
+          <a:noFill/>
+        </p:spPr>
+        <p:txBody>
+          <a:bodyPr wrap="square">
+            <a:spAutoFit/>
+          </a:bodyPr>
+          <a:lstStyle/>
+          <a:p>
+            <a:pPr algn="ctr"/>
+            <a:r>
+              <a:rPr sz="4800" b="1" i="0">
+                <a:solidFill>
+                  <a:srgbClr val="FFFFFF"/>
+                </a:solidFill>
+                <a:latin typeface="Arial"/>
+              </a:rPr>
+              <a:t>主の恵みにより　罪の嵐 抜け</a:t>
             </a:r>
           </a:p>
         </p:txBody>
@@ -4456,8 +8095,8 @@
         </p:nvSpPr>
         <p:spPr>
           <a:xfrm>
-            <a:off x="594360" y="3406140"/>
-            <a:ext cx="11002975" cy="384048"/>
+            <a:off x="640080" y="3268980"/>
+            <a:ext cx="10911535" cy="365760"/>
           </a:xfrm>
           <a:prstGeom prst="rect">
             <a:avLst/>
@@ -4474,11 +8113,11 @@
             <a:r>
               <a:rPr sz="2400" b="0" i="1">
                 <a:solidFill>
-                  <a:srgbClr val="B4B4B4"/>
-                </a:solidFill>
-                <a:latin typeface="Arial"/>
-              </a:rPr>
-              <a:t>Shu koso waga sukui</a:t>
+                  <a:srgbClr val="AAAAAA"/>
+                </a:solidFill>
+                <a:latin typeface="Arial"/>
+              </a:rPr>
+              <a:t>omono megumi niyori tsumi no arashi nuke</a:t>
             </a:r>
           </a:p>
         </p:txBody>
@@ -4491,8 +8130,8 @@
         </p:nvSpPr>
         <p:spPr>
           <a:xfrm>
-            <a:off x="594360" y="3826764"/>
-            <a:ext cx="11002975" cy="347472"/>
+            <a:off x="640080" y="4046220"/>
+            <a:ext cx="10911535" cy="310896"/>
           </a:xfrm>
           <a:prstGeom prst="rect">
             <a:avLst/>
@@ -4509,11 +8148,72 @@
             <a:r>
               <a:rPr sz="2000" b="0" i="1">
                 <a:solidFill>
-                  <a:srgbClr val="8C8C8C"/>
-                </a:solidFill>
-                <a:latin typeface="Arial"/>
-              </a:rPr>
-              <a:t/>
+                  <a:srgbClr val="828282"/>
+                </a:solidFill>
+                <a:latin typeface="Arial"/>
+              </a:rPr>
+              <a:t>Divina graça me alcançou</a:t>
+            </a:r>
+          </a:p>
+        </p:txBody>
+      </p:sp>
+    </p:spTree>
+  </p:cSld>
+  <p:clrMapOvr>
+    <a:masterClrMapping/>
+  </p:clrMapOvr>
+</p:sld>
+</file>
+
+<file path=ppt/slides/slide9.xml><?xml version="1.0" encoding="utf-8"?>
+<p:sld xmlns:a="http://schemas.openxmlformats.org/drawingml/2006/main" xmlns:p="http://schemas.openxmlformats.org/presentationml/2006/main" xmlns:r="http://schemas.openxmlformats.org/officeDocument/2006/relationships">
+  <p:cSld>
+    <p:bg>
+      <p:bgPr>
+        <a:solidFill>
+          <a:srgbClr val="000000"/>
+        </a:solidFill>
+        <a:effectLst/>
+      </p:bgPr>
+    </p:bg>
+    <p:spTree>
+      <p:nvGrpSpPr>
+        <p:cNvPr id="1" name=""/>
+        <p:cNvGrpSpPr/>
+        <p:nvPr/>
+      </p:nvGrpSpPr>
+      <p:grpSpPr/>
+      <p:sp>
+        <p:nvSpPr>
+          <p:cNvPr id="2" name="TextBox 1"/>
+          <p:cNvSpPr txBox="1"/>
+          <p:nvPr/>
+        </p:nvSpPr>
+        <p:spPr>
+          <a:xfrm>
+            <a:off x="640080" y="2702052"/>
+            <a:ext cx="10911535" cy="731520"/>
+          </a:xfrm>
+          <a:prstGeom prst="rect">
+            <a:avLst/>
+          </a:prstGeom>
+          <a:noFill/>
+        </p:spPr>
+        <p:txBody>
+          <a:bodyPr wrap="square">
+            <a:spAutoFit/>
+          </a:bodyPr>
+          <a:lstStyle/>
+          <a:p>
+            <a:pPr algn="ctr"/>
+            <a:r>
+              <a:rPr sz="4800" b="1" i="0">
+                <a:solidFill>
+                  <a:srgbClr val="FFFFFF"/>
+                </a:solidFill>
+                <a:latin typeface="Arial"/>
+              </a:rPr>
+              <a:t>Tua graça irá me fortalecer</a:t>
             </a:r>
           </a:p>
         </p:txBody>

--- a/output_pptx/The_Lord_Is_My_Salvation.pptx
+++ b/output_pptx/The_Lord_Is_My_Salvation.pptx
@@ -3217,6 +3217,76 @@
           </a:p>
         </p:txBody>
       </p:sp>
+      <p:sp>
+        <p:nvSpPr>
+          <p:cNvPr id="4" name="TextBox 3"/>
+          <p:cNvSpPr txBox="1"/>
+          <p:nvPr/>
+        </p:nvSpPr>
+        <p:spPr>
+          <a:xfrm>
+            <a:off x="640080" y="4128516"/>
+            <a:ext cx="10911535" cy="310896"/>
+          </a:xfrm>
+          <a:prstGeom prst="rect">
+            <a:avLst/>
+          </a:prstGeom>
+          <a:noFill/>
+        </p:spPr>
+        <p:txBody>
+          <a:bodyPr wrap="square">
+            <a:spAutoFit/>
+          </a:bodyPr>
+          <a:lstStyle/>
+          <a:p>
+            <a:pPr algn="ctr"/>
+            <a:r>
+              <a:rPr sz="2000" b="0" i="0">
+                <a:solidFill>
+                  <a:srgbClr val="828282"/>
+                </a:solidFill>
+                <a:latin typeface="Arial"/>
+              </a:rPr>
+              <a:t>神聖なる恵みが私に降り注いだ</a:t>
+            </a:r>
+          </a:p>
+        </p:txBody>
+      </p:sp>
+      <p:sp>
+        <p:nvSpPr>
+          <p:cNvPr id="5" name="TextBox 4"/>
+          <p:cNvSpPr txBox="1"/>
+          <p:nvPr/>
+        </p:nvSpPr>
+        <p:spPr>
+          <a:xfrm>
+            <a:off x="640080" y="4494276"/>
+            <a:ext cx="10911535" cy="310896"/>
+          </a:xfrm>
+          <a:prstGeom prst="rect">
+            <a:avLst/>
+          </a:prstGeom>
+          <a:noFill/>
+        </p:spPr>
+        <p:txBody>
+          <a:bodyPr wrap="square">
+            <a:spAutoFit/>
+          </a:bodyPr>
+          <a:lstStyle/>
+          <a:p>
+            <a:pPr algn="ctr"/>
+            <a:r>
+              <a:rPr sz="2000" b="0" i="0">
+                <a:solidFill>
+                  <a:srgbClr val="828282"/>
+                </a:solidFill>
+                <a:latin typeface="Arial"/>
+              </a:rPr>
+              <a:t>荒れ狂う海から私を救い出してくれた</a:t>
+            </a:r>
+          </a:p>
+        </p:txBody>
+      </p:sp>
     </p:spTree>
   </p:cSld>
   <p:clrMapOvr>
@@ -3409,6 +3479,41 @@
           </a:p>
         </p:txBody>
       </p:sp>
+      <p:sp>
+        <p:nvSpPr>
+          <p:cNvPr id="3" name="TextBox 2"/>
+          <p:cNvSpPr txBox="1"/>
+          <p:nvPr/>
+        </p:nvSpPr>
+        <p:spPr>
+          <a:xfrm>
+            <a:off x="640080" y="3845052"/>
+            <a:ext cx="10911535" cy="310896"/>
+          </a:xfrm>
+          <a:prstGeom prst="rect">
+            <a:avLst/>
+          </a:prstGeom>
+          <a:noFill/>
+        </p:spPr>
+        <p:txBody>
+          <a:bodyPr wrap="square">
+            <a:spAutoFit/>
+          </a:bodyPr>
+          <a:lstStyle/>
+          <a:p>
+            <a:pPr algn="ctr"/>
+            <a:r>
+              <a:rPr sz="2000" b="0" i="0">
+                <a:solidFill>
+                  <a:srgbClr val="828282"/>
+                </a:solidFill>
+                <a:latin typeface="Arial"/>
+              </a:rPr>
+              <a:t>あなたは私の救い主です、主よ</a:t>
+            </a:r>
+          </a:p>
+        </p:txBody>
+      </p:sp>
     </p:spTree>
   </p:cSld>
   <p:clrMapOvr>
@@ -3601,6 +3706,41 @@
           </a:p>
         </p:txBody>
       </p:sp>
+      <p:sp>
+        <p:nvSpPr>
+          <p:cNvPr id="3" name="TextBox 2"/>
+          <p:cNvSpPr txBox="1"/>
+          <p:nvPr/>
+        </p:nvSpPr>
+        <p:spPr>
+          <a:xfrm>
+            <a:off x="640080" y="3845052"/>
+            <a:ext cx="10911535" cy="310896"/>
+          </a:xfrm>
+          <a:prstGeom prst="rect">
+            <a:avLst/>
+          </a:prstGeom>
+          <a:noFill/>
+        </p:spPr>
+        <p:txBody>
+          <a:bodyPr wrap="square">
+            <a:spAutoFit/>
+          </a:bodyPr>
+          <a:lstStyle/>
+          <a:p>
+            <a:pPr algn="ctr"/>
+            <a:r>
+              <a:rPr sz="2000" b="0" i="0">
+                <a:solidFill>
+                  <a:srgbClr val="828282"/>
+                </a:solidFill>
+                <a:latin typeface="Arial"/>
+              </a:rPr>
+              <a:t>そして人生が終わるときが来たら</a:t>
+            </a:r>
+          </a:p>
+        </p:txBody>
+      </p:sp>
     </p:spTree>
   </p:cSld>
   <p:clrMapOvr>
@@ -3828,6 +3968,76 @@
           </a:p>
         </p:txBody>
       </p:sp>
+      <p:sp>
+        <p:nvSpPr>
+          <p:cNvPr id="4" name="TextBox 3"/>
+          <p:cNvSpPr txBox="1"/>
+          <p:nvPr/>
+        </p:nvSpPr>
+        <p:spPr>
+          <a:xfrm>
+            <a:off x="640080" y="4128516"/>
+            <a:ext cx="10911535" cy="310896"/>
+          </a:xfrm>
+          <a:prstGeom prst="rect">
+            <a:avLst/>
+          </a:prstGeom>
+          <a:noFill/>
+        </p:spPr>
+        <p:txBody>
+          <a:bodyPr wrap="square">
+            <a:spAutoFit/>
+          </a:bodyPr>
+          <a:lstStyle/>
+          <a:p>
+            <a:pPr algn="ctr"/>
+            <a:r>
+              <a:rPr sz="2000" b="0" i="0">
+                <a:solidFill>
+                  <a:srgbClr val="828282"/>
+                </a:solidFill>
+                <a:latin typeface="Arial"/>
+              </a:rPr>
+              <a:t>立ち上がり、家へ帰ります</a:t>
+            </a:r>
+          </a:p>
+        </p:txBody>
+      </p:sp>
+      <p:sp>
+        <p:nvSpPr>
+          <p:cNvPr id="5" name="TextBox 4"/>
+          <p:cNvSpPr txBox="1"/>
+          <p:nvPr/>
+        </p:nvSpPr>
+        <p:spPr>
+          <a:xfrm>
+            <a:off x="640080" y="4494276"/>
+            <a:ext cx="10911535" cy="310896"/>
+          </a:xfrm>
+          <a:prstGeom prst="rect">
+            <a:avLst/>
+          </a:prstGeom>
+          <a:noFill/>
+        </p:spPr>
+        <p:txBody>
+          <a:bodyPr wrap="square">
+            <a:spAutoFit/>
+          </a:bodyPr>
+          <a:lstStyle/>
+          <a:p>
+            <a:pPr algn="ctr"/>
+            <a:r>
+              <a:rPr sz="2000" b="0" i="0">
+                <a:solidFill>
+                  <a:srgbClr val="828282"/>
+                </a:solidFill>
+                <a:latin typeface="Arial"/>
+              </a:rPr>
+              <a:t>あなたは私の救い主です、主よ</a:t>
+            </a:r>
+          </a:p>
+        </p:txBody>
+      </p:sp>
     </p:spTree>
   </p:cSld>
   <p:clrMapOvr>
@@ -4020,6 +4230,41 @@
           </a:p>
         </p:txBody>
       </p:sp>
+      <p:sp>
+        <p:nvSpPr>
+          <p:cNvPr id="3" name="TextBox 2"/>
+          <p:cNvSpPr txBox="1"/>
+          <p:nvPr/>
+        </p:nvSpPr>
+        <p:spPr>
+          <a:xfrm>
+            <a:off x="640080" y="3845052"/>
+            <a:ext cx="10911535" cy="310896"/>
+          </a:xfrm>
+          <a:prstGeom prst="rect">
+            <a:avLst/>
+          </a:prstGeom>
+          <a:noFill/>
+        </p:spPr>
+        <p:txBody>
+          <a:bodyPr wrap="square">
+            <a:spAutoFit/>
+          </a:bodyPr>
+          <a:lstStyle/>
+          <a:p>
+            <a:pPr algn="ctr"/>
+            <a:r>
+              <a:rPr sz="2000" b="0" i="0">
+                <a:solidFill>
+                  <a:srgbClr val="828282"/>
+                </a:solidFill>
+                <a:latin typeface="Arial"/>
+              </a:rPr>
+              <a:t>栄光は父である神にあれ</a:t>
+            </a:r>
+          </a:p>
+        </p:txBody>
+      </p:sp>
     </p:spTree>
   </p:cSld>
   <p:clrMapOvr>
@@ -4212,6 +4457,41 @@
           </a:p>
         </p:txBody>
       </p:sp>
+      <p:sp>
+        <p:nvSpPr>
+          <p:cNvPr id="3" name="TextBox 2"/>
+          <p:cNvSpPr txBox="1"/>
+          <p:nvPr/>
+        </p:nvSpPr>
+        <p:spPr>
+          <a:xfrm>
+            <a:off x="640080" y="3845052"/>
+            <a:ext cx="10911535" cy="310896"/>
+          </a:xfrm>
+          <a:prstGeom prst="rect">
+            <a:avLst/>
+          </a:prstGeom>
+          <a:noFill/>
+        </p:spPr>
+        <p:txBody>
+          <a:bodyPr wrap="square">
+            <a:spAutoFit/>
+          </a:bodyPr>
+          <a:lstStyle/>
+          <a:p>
+            <a:pPr algn="ctr"/>
+            <a:r>
+              <a:rPr sz="2000" b="0" i="0">
+                <a:solidFill>
+                  <a:srgbClr val="828282"/>
+                </a:solidFill>
+                <a:latin typeface="Arial"/>
+              </a:rPr>
+              <a:t>栄光は神の子にあれ</a:t>
+            </a:r>
+          </a:p>
+        </p:txBody>
+      </p:sp>
     </p:spTree>
   </p:cSld>
   <p:clrMapOvr>
@@ -4308,6 +4588,76 @@
           </a:p>
         </p:txBody>
       </p:sp>
+      <p:sp>
+        <p:nvSpPr>
+          <p:cNvPr id="4" name="TextBox 3"/>
+          <p:cNvSpPr txBox="1"/>
+          <p:nvPr/>
+        </p:nvSpPr>
+        <p:spPr>
+          <a:xfrm>
+            <a:off x="640080" y="4128516"/>
+            <a:ext cx="10911535" cy="310896"/>
+          </a:xfrm>
+          <a:prstGeom prst="rect">
+            <a:avLst/>
+          </a:prstGeom>
+          <a:noFill/>
+        </p:spPr>
+        <p:txBody>
+          <a:bodyPr wrap="square">
+            <a:spAutoFit/>
+          </a:bodyPr>
+          <a:lstStyle/>
+          <a:p>
+            <a:pPr algn="ctr"/>
+            <a:r>
+              <a:rPr sz="2000" b="0" i="0">
+                <a:solidFill>
+                  <a:srgbClr val="828282"/>
+                </a:solidFill>
+                <a:latin typeface="Arial"/>
+              </a:rPr>
+              <a:t>堅い地へ私を導いてくれた</a:t>
+            </a:r>
+          </a:p>
+        </p:txBody>
+      </p:sp>
+      <p:sp>
+        <p:nvSpPr>
+          <p:cNvPr id="5" name="TextBox 4"/>
+          <p:cNvSpPr txBox="1"/>
+          <p:nvPr/>
+        </p:nvSpPr>
+        <p:spPr>
+          <a:xfrm>
+            <a:off x="640080" y="4494276"/>
+            <a:ext cx="10911535" cy="310896"/>
+          </a:xfrm>
+          <a:prstGeom prst="rect">
+            <a:avLst/>
+          </a:prstGeom>
+          <a:noFill/>
+        </p:spPr>
+        <p:txBody>
+          <a:bodyPr wrap="square">
+            <a:spAutoFit/>
+          </a:bodyPr>
+          <a:lstStyle/>
+          <a:p>
+            <a:pPr algn="ctr"/>
+            <a:r>
+              <a:rPr sz="2000" b="0" i="0">
+                <a:solidFill>
+                  <a:srgbClr val="828282"/>
+                </a:solidFill>
+                <a:latin typeface="Arial"/>
+              </a:rPr>
+              <a:t>あなたは私の救い主です、主よ</a:t>
+            </a:r>
+          </a:p>
+        </p:txBody>
+      </p:sp>
     </p:spTree>
   </p:cSld>
   <p:clrMapOvr>
@@ -4500,6 +4850,41 @@
           </a:p>
         </p:txBody>
       </p:sp>
+      <p:sp>
+        <p:nvSpPr>
+          <p:cNvPr id="3" name="TextBox 2"/>
+          <p:cNvSpPr txBox="1"/>
+          <p:nvPr/>
+        </p:nvSpPr>
+        <p:spPr>
+          <a:xfrm>
+            <a:off x="640080" y="3845052"/>
+            <a:ext cx="10911535" cy="310896"/>
+          </a:xfrm>
+          <a:prstGeom prst="rect">
+            <a:avLst/>
+          </a:prstGeom>
+          <a:noFill/>
+        </p:spPr>
+        <p:txBody>
+          <a:bodyPr wrap="square">
+            <a:spAutoFit/>
+          </a:bodyPr>
+          <a:lstStyle/>
+          <a:p>
+            <a:pPr algn="ctr"/>
+            <a:r>
+              <a:rPr sz="2000" b="0" i="0">
+                <a:solidFill>
+                  <a:srgbClr val="828282"/>
+                </a:solidFill>
+                <a:latin typeface="Arial"/>
+              </a:rPr>
+              <a:t>神聖なる恵みが私に降り注いだ</a:t>
+            </a:r>
+          </a:p>
+        </p:txBody>
+      </p:sp>
     </p:spTree>
   </p:cSld>
   <p:clrMapOvr>
@@ -4727,6 +5112,76 @@
           </a:p>
         </p:txBody>
       </p:sp>
+      <p:sp>
+        <p:nvSpPr>
+          <p:cNvPr id="4" name="TextBox 3"/>
+          <p:cNvSpPr txBox="1"/>
+          <p:nvPr/>
+        </p:nvSpPr>
+        <p:spPr>
+          <a:xfrm>
+            <a:off x="640080" y="4128516"/>
+            <a:ext cx="10911535" cy="310896"/>
+          </a:xfrm>
+          <a:prstGeom prst="rect">
+            <a:avLst/>
+          </a:prstGeom>
+          <a:noFill/>
+        </p:spPr>
+        <p:txBody>
+          <a:bodyPr wrap="square">
+            <a:spAutoFit/>
+          </a:bodyPr>
+          <a:lstStyle/>
+          <a:p>
+            <a:pPr algn="ctr"/>
+            <a:r>
+              <a:rPr sz="2000" b="0" i="0">
+                <a:solidFill>
+                  <a:srgbClr val="828282"/>
+                </a:solidFill>
+                <a:latin typeface="Arial"/>
+              </a:rPr>
+              <a:t>荒れ狂う海から私を救い出してくれた</a:t>
+            </a:r>
+          </a:p>
+        </p:txBody>
+      </p:sp>
+      <p:sp>
+        <p:nvSpPr>
+          <p:cNvPr id="5" name="TextBox 4"/>
+          <p:cNvSpPr txBox="1"/>
+          <p:nvPr/>
+        </p:nvSpPr>
+        <p:spPr>
+          <a:xfrm>
+            <a:off x="640080" y="4494276"/>
+            <a:ext cx="10911535" cy="310896"/>
+          </a:xfrm>
+          <a:prstGeom prst="rect">
+            <a:avLst/>
+          </a:prstGeom>
+          <a:noFill/>
+        </p:spPr>
+        <p:txBody>
+          <a:bodyPr wrap="square">
+            <a:spAutoFit/>
+          </a:bodyPr>
+          <a:lstStyle/>
+          <a:p>
+            <a:pPr algn="ctr"/>
+            <a:r>
+              <a:rPr sz="2000" b="0" i="0">
+                <a:solidFill>
+                  <a:srgbClr val="828282"/>
+                </a:solidFill>
+                <a:latin typeface="Arial"/>
+              </a:rPr>
+              <a:t>堅い地へ私を導いてくれた</a:t>
+            </a:r>
+          </a:p>
+        </p:txBody>
+      </p:sp>
     </p:spTree>
   </p:cSld>
   <p:clrMapOvr>
@@ -4919,6 +5374,41 @@
           </a:p>
         </p:txBody>
       </p:sp>
+      <p:sp>
+        <p:nvSpPr>
+          <p:cNvPr id="3" name="TextBox 2"/>
+          <p:cNvSpPr txBox="1"/>
+          <p:nvPr/>
+        </p:nvSpPr>
+        <p:spPr>
+          <a:xfrm>
+            <a:off x="640080" y="3845052"/>
+            <a:ext cx="10911535" cy="310896"/>
+          </a:xfrm>
+          <a:prstGeom prst="rect">
+            <a:avLst/>
+          </a:prstGeom>
+          <a:noFill/>
+        </p:spPr>
+        <p:txBody>
+          <a:bodyPr wrap="square">
+            <a:spAutoFit/>
+          </a:bodyPr>
+          <a:lstStyle/>
+          <a:p>
+            <a:pPr algn="ctr"/>
+            <a:r>
+              <a:rPr sz="2000" b="0" i="0">
+                <a:solidFill>
+                  <a:srgbClr val="828282"/>
+                </a:solidFill>
+                <a:latin typeface="Arial"/>
+              </a:rPr>
+              <a:t>あなたは私の救い主です、主よ</a:t>
+            </a:r>
+          </a:p>
+        </p:txBody>
+      </p:sp>
     </p:spTree>
   </p:cSld>
   <p:clrMapOvr>
@@ -5146,6 +5636,76 @@
           </a:p>
         </p:txBody>
       </p:sp>
+      <p:sp>
+        <p:nvSpPr>
+          <p:cNvPr id="4" name="TextBox 3"/>
+          <p:cNvSpPr txBox="1"/>
+          <p:nvPr/>
+        </p:nvSpPr>
+        <p:spPr>
+          <a:xfrm>
+            <a:off x="640080" y="4128516"/>
+            <a:ext cx="10911535" cy="310896"/>
+          </a:xfrm>
+          <a:prstGeom prst="rect">
+            <a:avLst/>
+          </a:prstGeom>
+          <a:noFill/>
+        </p:spPr>
+        <p:txBody>
+          <a:bodyPr wrap="square">
+            <a:spAutoFit/>
+          </a:bodyPr>
+          <a:lstStyle/>
+          <a:p>
+            <a:pPr algn="ctr"/>
+            <a:r>
+              <a:rPr sz="2000" b="0" i="0">
+                <a:solidFill>
+                  <a:srgbClr val="828282"/>
+                </a:solidFill>
+                <a:latin typeface="Arial"/>
+              </a:rPr>
+              <a:t>あなたは私の救い主です、主よ</a:t>
+            </a:r>
+          </a:p>
+        </p:txBody>
+      </p:sp>
+      <p:sp>
+        <p:nvSpPr>
+          <p:cNvPr id="5" name="TextBox 4"/>
+          <p:cNvSpPr txBox="1"/>
+          <p:nvPr/>
+        </p:nvSpPr>
+        <p:spPr>
+          <a:xfrm>
+            <a:off x="640080" y="4494276"/>
+            <a:ext cx="10911535" cy="310896"/>
+          </a:xfrm>
+          <a:prstGeom prst="rect">
+            <a:avLst/>
+          </a:prstGeom>
+          <a:noFill/>
+        </p:spPr>
+        <p:txBody>
+          <a:bodyPr wrap="square">
+            <a:spAutoFit/>
+          </a:bodyPr>
+          <a:lstStyle/>
+          <a:p>
+            <a:pPr algn="ctr"/>
+            <a:r>
+              <a:rPr sz="2000" b="0" i="0">
+                <a:solidFill>
+                  <a:srgbClr val="828282"/>
+                </a:solidFill>
+                <a:latin typeface="Arial"/>
+              </a:rPr>
+              <a:t>主よ、私の神よ、誰があなたのようでしょう</a:t>
+            </a:r>
+          </a:p>
+        </p:txBody>
+      </p:sp>
     </p:spTree>
   </p:cSld>
   <p:clrMapOvr>
@@ -5242,6 +5802,76 @@
           </a:p>
         </p:txBody>
       </p:sp>
+      <p:sp>
+        <p:nvSpPr>
+          <p:cNvPr id="4" name="TextBox 3"/>
+          <p:cNvSpPr txBox="1"/>
+          <p:nvPr/>
+        </p:nvSpPr>
+        <p:spPr>
+          <a:xfrm>
+            <a:off x="640080" y="4128516"/>
+            <a:ext cx="10911535" cy="310896"/>
+          </a:xfrm>
+          <a:prstGeom prst="rect">
+            <a:avLst/>
+          </a:prstGeom>
+          <a:noFill/>
+        </p:spPr>
+        <p:txBody>
+          <a:bodyPr wrap="square">
+            <a:spAutoFit/>
+          </a:bodyPr>
+          <a:lstStyle/>
+          <a:p>
+            <a:pPr algn="ctr"/>
+            <a:r>
+              <a:rPr sz="2000" b="0" i="0">
+                <a:solidFill>
+                  <a:srgbClr val="828282"/>
+                </a:solidFill>
+                <a:latin typeface="Arial"/>
+              </a:rPr>
+              <a:t>変わらない愛で御民を救われます</a:t>
+            </a:r>
+          </a:p>
+        </p:txBody>
+      </p:sp>
+      <p:sp>
+        <p:nvSpPr>
+          <p:cNvPr id="5" name="TextBox 4"/>
+          <p:cNvSpPr txBox="1"/>
+          <p:nvPr/>
+        </p:nvSpPr>
+        <p:spPr>
+          <a:xfrm>
+            <a:off x="640080" y="4494276"/>
+            <a:ext cx="10911535" cy="310896"/>
+          </a:xfrm>
+          <a:prstGeom prst="rect">
+            <a:avLst/>
+          </a:prstGeom>
+          <a:noFill/>
+        </p:spPr>
+        <p:txBody>
+          <a:bodyPr wrap="square">
+            <a:spAutoFit/>
+          </a:bodyPr>
+          <a:lstStyle/>
+          <a:p>
+            <a:pPr algn="ctr"/>
+            <a:r>
+              <a:rPr sz="2000" b="0" i="0">
+                <a:solidFill>
+                  <a:srgbClr val="828282"/>
+                </a:solidFill>
+                <a:latin typeface="Arial"/>
+              </a:rPr>
+              <a:t>買い戻し、勝利し、すべてを成し遂げられた</a:t>
+            </a:r>
+          </a:p>
+        </p:txBody>
+      </p:sp>
     </p:spTree>
   </p:cSld>
   <p:clrMapOvr>
@@ -5434,6 +6064,76 @@
           </a:p>
         </p:txBody>
       </p:sp>
+      <p:sp>
+        <p:nvSpPr>
+          <p:cNvPr id="4" name="TextBox 3"/>
+          <p:cNvSpPr txBox="1"/>
+          <p:nvPr/>
+        </p:nvSpPr>
+        <p:spPr>
+          <a:xfrm>
+            <a:off x="640080" y="4128516"/>
+            <a:ext cx="10911535" cy="310896"/>
+          </a:xfrm>
+          <a:prstGeom prst="rect">
+            <a:avLst/>
+          </a:prstGeom>
+          <a:noFill/>
+        </p:spPr>
+        <p:txBody>
+          <a:bodyPr wrap="square">
+            <a:spAutoFit/>
+          </a:bodyPr>
+          <a:lstStyle/>
+          <a:p>
+            <a:pPr algn="ctr"/>
+            <a:r>
+              <a:rPr sz="2000" b="0" i="0">
+                <a:solidFill>
+                  <a:srgbClr val="828282"/>
+                </a:solidFill>
+                <a:latin typeface="Arial"/>
+              </a:rPr>
+              <a:t>暗闇を恐れることはありません</a:t>
+            </a:r>
+          </a:p>
+        </p:txBody>
+      </p:sp>
+      <p:sp>
+        <p:nvSpPr>
+          <p:cNvPr id="5" name="TextBox 4"/>
+          <p:cNvSpPr txBox="1"/>
+          <p:nvPr/>
+        </p:nvSpPr>
+        <p:spPr>
+          <a:xfrm>
+            <a:off x="640080" y="4494276"/>
+            <a:ext cx="10911535" cy="310896"/>
+          </a:xfrm>
+          <a:prstGeom prst="rect">
+            <a:avLst/>
+          </a:prstGeom>
+          <a:noFill/>
+        </p:spPr>
+        <p:txBody>
+          <a:bodyPr wrap="square">
+            <a:spAutoFit/>
+          </a:bodyPr>
+          <a:lstStyle/>
+          <a:p>
+            <a:pPr algn="ctr"/>
+            <a:r>
+              <a:rPr sz="2000" b="0" i="0">
+                <a:solidFill>
+                  <a:srgbClr val="828282"/>
+                </a:solidFill>
+                <a:latin typeface="Arial"/>
+              </a:rPr>
+              <a:t>あなたの手にしっかりつかまります</a:t>
+            </a:r>
+          </a:p>
+        </p:txBody>
+      </p:sp>
     </p:spTree>
   </p:cSld>
   <p:clrMapOvr>
@@ -6490,6 +7190,76 @@
           </a:p>
         </p:txBody>
       </p:sp>
+      <p:sp>
+        <p:nvSpPr>
+          <p:cNvPr id="4" name="TextBox 3"/>
+          <p:cNvSpPr txBox="1"/>
+          <p:nvPr/>
+        </p:nvSpPr>
+        <p:spPr>
+          <a:xfrm>
+            <a:off x="640080" y="4128516"/>
+            <a:ext cx="10911535" cy="310896"/>
+          </a:xfrm>
+          <a:prstGeom prst="rect">
+            <a:avLst/>
+          </a:prstGeom>
+          <a:noFill/>
+        </p:spPr>
+        <p:txBody>
+          <a:bodyPr wrap="square">
+            <a:spAutoFit/>
+          </a:bodyPr>
+          <a:lstStyle/>
+          <a:p>
+            <a:pPr algn="ctr"/>
+            <a:r>
+              <a:rPr sz="2000" b="0" i="0">
+                <a:solidFill>
+                  <a:srgbClr val="828282"/>
+                </a:solidFill>
+                <a:latin typeface="Arial"/>
+              </a:rPr>
+              <a:t>日の出を眺めます</a:t>
+            </a:r>
+          </a:p>
+        </p:txBody>
+      </p:sp>
+      <p:sp>
+        <p:nvSpPr>
+          <p:cNvPr id="5" name="TextBox 4"/>
+          <p:cNvSpPr txBox="1"/>
+          <p:nvPr/>
+        </p:nvSpPr>
+        <p:spPr>
+          <a:xfrm>
+            <a:off x="640080" y="4494276"/>
+            <a:ext cx="10911535" cy="310896"/>
+          </a:xfrm>
+          <a:prstGeom prst="rect">
+            <a:avLst/>
+          </a:prstGeom>
+          <a:noFill/>
+        </p:spPr>
+        <p:txBody>
+          <a:bodyPr wrap="square">
+            <a:spAutoFit/>
+          </a:bodyPr>
+          <a:lstStyle/>
+          <a:p>
+            <a:pPr algn="ctr"/>
+            <a:r>
+              <a:rPr sz="2000" b="0" i="0">
+                <a:solidFill>
+                  <a:srgbClr val="828282"/>
+                </a:solidFill>
+                <a:latin typeface="Arial"/>
+              </a:rPr>
+              <a:t>あなたは私の救い主です、主よ</a:t>
+            </a:r>
+          </a:p>
+        </p:txBody>
+      </p:sp>
     </p:spTree>
   </p:cSld>
   <p:clrMapOvr>
@@ -7581,6 +8351,76 @@
           </a:p>
         </p:txBody>
       </p:sp>
+      <p:sp>
+        <p:nvSpPr>
+          <p:cNvPr id="4" name="TextBox 3"/>
+          <p:cNvSpPr txBox="1"/>
+          <p:nvPr/>
+        </p:nvSpPr>
+        <p:spPr>
+          <a:xfrm>
+            <a:off x="640080" y="4128516"/>
+            <a:ext cx="10911535" cy="310896"/>
+          </a:xfrm>
+          <a:prstGeom prst="rect">
+            <a:avLst/>
+          </a:prstGeom>
+          <a:noFill/>
+        </p:spPr>
+        <p:txBody>
+          <a:bodyPr wrap="square">
+            <a:spAutoFit/>
+          </a:bodyPr>
+          <a:lstStyle/>
+          <a:p>
+            <a:pPr algn="ctr"/>
+            <a:r>
+              <a:rPr sz="2000" b="0" i="0">
+                <a:solidFill>
+                  <a:srgbClr val="828282"/>
+                </a:solidFill>
+                <a:latin typeface="Arial"/>
+              </a:rPr>
+              <a:t>変わらない愛で御民を救われます</a:t>
+            </a:r>
+          </a:p>
+        </p:txBody>
+      </p:sp>
+      <p:sp>
+        <p:nvSpPr>
+          <p:cNvPr id="5" name="TextBox 4"/>
+          <p:cNvSpPr txBox="1"/>
+          <p:nvPr/>
+        </p:nvSpPr>
+        <p:spPr>
+          <a:xfrm>
+            <a:off x="640080" y="4494276"/>
+            <a:ext cx="10911535" cy="310896"/>
+          </a:xfrm>
+          <a:prstGeom prst="rect">
+            <a:avLst/>
+          </a:prstGeom>
+          <a:noFill/>
+        </p:spPr>
+        <p:txBody>
+          <a:bodyPr wrap="square">
+            <a:spAutoFit/>
+          </a:bodyPr>
+          <a:lstStyle/>
+          <a:p>
+            <a:pPr algn="ctr"/>
+            <a:r>
+              <a:rPr sz="2000" b="0" i="0">
+                <a:solidFill>
+                  <a:srgbClr val="828282"/>
+                </a:solidFill>
+                <a:latin typeface="Arial"/>
+              </a:rPr>
+              <a:t>買い戻し、勝利し、すべてを成し遂げられた</a:t>
+            </a:r>
+          </a:p>
+        </p:txBody>
+      </p:sp>
     </p:spTree>
   </p:cSld>
   <p:clrMapOvr>
@@ -7965,6 +8805,76 @@
           </a:p>
         </p:txBody>
       </p:sp>
+      <p:sp>
+        <p:nvSpPr>
+          <p:cNvPr id="4" name="TextBox 3"/>
+          <p:cNvSpPr txBox="1"/>
+          <p:nvPr/>
+        </p:nvSpPr>
+        <p:spPr>
+          <a:xfrm>
+            <a:off x="640080" y="4128516"/>
+            <a:ext cx="10911535" cy="310896"/>
+          </a:xfrm>
+          <a:prstGeom prst="rect">
+            <a:avLst/>
+          </a:prstGeom>
+          <a:noFill/>
+        </p:spPr>
+        <p:txBody>
+          <a:bodyPr wrap="square">
+            <a:spAutoFit/>
+          </a:bodyPr>
+          <a:lstStyle/>
+          <a:p>
+            <a:pPr algn="ctr"/>
+            <a:r>
+              <a:rPr sz="2000" b="0" i="0">
+                <a:solidFill>
+                  <a:srgbClr val="828282"/>
+                </a:solidFill>
+                <a:latin typeface="Arial"/>
+              </a:rPr>
+              <a:t>あなたは私の救い主です、主よ</a:t>
+            </a:r>
+          </a:p>
+        </p:txBody>
+      </p:sp>
+      <p:sp>
+        <p:nvSpPr>
+          <p:cNvPr id="5" name="TextBox 4"/>
+          <p:cNvSpPr txBox="1"/>
+          <p:nvPr/>
+        </p:nvSpPr>
+        <p:spPr>
+          <a:xfrm>
+            <a:off x="640080" y="4494276"/>
+            <a:ext cx="10911535" cy="310896"/>
+          </a:xfrm>
+          <a:prstGeom prst="rect">
+            <a:avLst/>
+          </a:prstGeom>
+          <a:noFill/>
+        </p:spPr>
+        <p:txBody>
+          <a:bodyPr wrap="square">
+            <a:spAutoFit/>
+          </a:bodyPr>
+          <a:lstStyle/>
+          <a:p>
+            <a:pPr algn="ctr"/>
+            <a:r>
+              <a:rPr sz="2000" b="0" i="0">
+                <a:solidFill>
+                  <a:srgbClr val="828282"/>
+                </a:solidFill>
+                <a:latin typeface="Arial"/>
+              </a:rPr>
+              <a:t>私の希望は神にあります</a:t>
+            </a:r>
+          </a:p>
+        </p:txBody>
+      </p:sp>
     </p:spTree>
   </p:cSld>
   <p:clrMapOvr>
@@ -8026,6 +8936,41 @@
           </a:p>
         </p:txBody>
       </p:sp>
+      <p:sp>
+        <p:nvSpPr>
+          <p:cNvPr id="3" name="TextBox 2"/>
+          <p:cNvSpPr txBox="1"/>
+          <p:nvPr/>
+        </p:nvSpPr>
+        <p:spPr>
+          <a:xfrm>
+            <a:off x="640080" y="3845052"/>
+            <a:ext cx="10911535" cy="310896"/>
+          </a:xfrm>
+          <a:prstGeom prst="rect">
+            <a:avLst/>
+          </a:prstGeom>
+          <a:noFill/>
+        </p:spPr>
+        <p:txBody>
+          <a:bodyPr wrap="square">
+            <a:spAutoFit/>
+          </a:bodyPr>
+          <a:lstStyle/>
+          <a:p>
+            <a:pPr algn="ctr"/>
+            <a:r>
+              <a:rPr sz="2000" b="0" i="0">
+                <a:solidFill>
+                  <a:srgbClr val="828282"/>
+                </a:solidFill>
+                <a:latin typeface="Arial"/>
+              </a:rPr>
+              <a:t>谷間にも苦しみの中にも</a:t>
+            </a:r>
+          </a:p>
+        </p:txBody>
+      </p:sp>
     </p:spTree>
   </p:cSld>
   <p:clrMapOvr>
@@ -8214,6 +9159,41 @@
                 <a:latin typeface="Arial"/>
               </a:rPr>
               <a:t>Tua graça irá me fortalecer</a:t>
+            </a:r>
+          </a:p>
+        </p:txBody>
+      </p:sp>
+      <p:sp>
+        <p:nvSpPr>
+          <p:cNvPr id="3" name="TextBox 2"/>
+          <p:cNvSpPr txBox="1"/>
+          <p:nvPr/>
+        </p:nvSpPr>
+        <p:spPr>
+          <a:xfrm>
+            <a:off x="640080" y="3845052"/>
+            <a:ext cx="10911535" cy="310896"/>
+          </a:xfrm>
+          <a:prstGeom prst="rect">
+            <a:avLst/>
+          </a:prstGeom>
+          <a:noFill/>
+        </p:spPr>
+        <p:txBody>
+          <a:bodyPr wrap="square">
+            <a:spAutoFit/>
+          </a:bodyPr>
+          <a:lstStyle/>
+          <a:p>
+            <a:pPr algn="ctr"/>
+            <a:r>
+              <a:rPr sz="2000" b="0" i="0">
+                <a:solidFill>
+                  <a:srgbClr val="828282"/>
+                </a:solidFill>
+                <a:latin typeface="Arial"/>
+              </a:rPr>
+              <a:t>あなたの恵みが私を強くしてくれます</a:t>
             </a:r>
           </a:p>
         </p:txBody>
